--- a/HRV_Praesentation.pptx
+++ b/HRV_Praesentation.pptx
@@ -4,17 +4,20 @@
   <p:sldMasterIdLst>
     <p:sldMasterId id="2147483648" r:id="rId1"/>
   </p:sldMasterIdLst>
+  <p:notesMasterIdLst>
+    <p:notesMasterId r:id="rId10"/>
+  </p:notesMasterIdLst>
   <p:sldIdLst>
-    <p:sldId id="256" r:id="rId7"/>
-    <p:sldId id="257" r:id="rId9"/>
-    <p:sldId id="258" r:id="rId10"/>
-    <p:sldId id="259" r:id="rId11"/>
-    <p:sldId id="260" r:id="rId12"/>
-    <p:sldId id="261" r:id="rId13"/>
-    <p:sldId id="262" r:id="rId14"/>
-    <p:sldId id="263" r:id="rId15"/>
+    <p:sldId id="256" r:id="rId2"/>
+    <p:sldId id="257" r:id="rId3"/>
+    <p:sldId id="258" r:id="rId4"/>
+    <p:sldId id="259" r:id="rId5"/>
+    <p:sldId id="260" r:id="rId6"/>
+    <p:sldId id="261" r:id="rId7"/>
+    <p:sldId id="262" r:id="rId8"/>
+    <p:sldId id="263" r:id="rId9"/>
   </p:sldIdLst>
-  <p:sldSz cx="12191695" cy="6858000" type="screen4x3"/>
+  <p:sldSz cx="12192000" cy="6858000"/>
   <p:notesSz cx="6858000" cy="9144000"/>
   <p:defaultTextStyle>
     <a:defPPr>
@@ -111,11 +114,27 @@
       </a:defRPr>
     </a:lvl9pPr>
   </p:defaultTextStyle>
+  <p:extLst>
+    <p:ext uri="{EFAFB233-063F-42B5-8137-9DF3F51BA10A}">
+      <p15:sldGuideLst xmlns:p15="http://schemas.microsoft.com/office/powerpoint/2012/main">
+        <p15:guide id="1" orient="horz" pos="2160">
+          <p15:clr>
+            <a:srgbClr val="A4A3A4"/>
+          </p15:clr>
+        </p15:guide>
+        <p15:guide id="2" pos="2880">
+          <p15:clr>
+            <a:srgbClr val="A4A3A4"/>
+          </p15:clr>
+        </p15:guide>
+      </p15:sldGuideLst>
+    </p:ext>
+  </p:extLst>
 </p:presentation>
 </file>
 
 <file path=ppt/notesMasters/notesMaster1.xml><?xml version="1.0" encoding="utf-8"?>
-<p:notesMaster xmlns:a="http://schemas.openxmlformats.org/drawingml/2006/main" xmlns:p="http://schemas.openxmlformats.org/presentationml/2006/main" xmlns:r="http://schemas.openxmlformats.org/officeDocument/2006/relationships">
+<p:notesMaster xmlns:a="http://schemas.openxmlformats.org/drawingml/2006/main" xmlns:r="http://schemas.openxmlformats.org/officeDocument/2006/relationships" xmlns:p="http://schemas.openxmlformats.org/presentationml/2006/main">
   <p:cSld>
     <p:bg>
       <p:bgRef idx="1001">
@@ -136,241 +155,16 @@
           <a:chExt cx="0" cy="0"/>
         </a:xfrm>
       </p:grpSpPr>
-      <p:sp>
-        <p:nvSpPr>
-          <p:cNvPr id="2" name="Header Placeholder 1"/>
-          <p:cNvSpPr>
-            <a:spLocks noGrp="1"/>
-          </p:cNvSpPr>
-          <p:nvPr>
-            <p:ph type="hdr" sz="quarter"/>
-          </p:nvPr>
-        </p:nvSpPr>
-        <p:spPr>
-          <a:xfrm>
-            <a:off x="0" y="0"/>
-            <a:ext cx="2971800" cy="457200"/>
-          </a:xfrm>
-          <a:prstGeom prst="rect">
-            <a:avLst/>
-          </a:prstGeom>
-        </p:spPr>
-        <p:txBody>
-          <a:bodyPr vert="horz" lIns="91440" tIns="45720" rIns="91440" bIns="45720" rtlCol="0"/>
-          <a:lstStyle>
-            <a:lvl1pPr algn="l">
-              <a:defRPr sz="1200"/>
-            </a:lvl1pPr>
-          </a:lstStyle>
-          <a:p>
-            <a:endParaRPr lang="en-US"/>
-          </a:p>
-        </p:txBody>
-      </p:sp>
-      <p:sp>
-        <p:nvSpPr>
-          <p:cNvPr id="3" name="Date Placeholder 2"/>
-          <p:cNvSpPr>
-            <a:spLocks noGrp="1"/>
-          </p:cNvSpPr>
-          <p:nvPr>
-            <p:ph type="dt" idx="1"/>
-          </p:nvPr>
-        </p:nvSpPr>
-        <p:spPr>
-          <a:xfrm>
-            <a:off x="3884613" y="0"/>
-            <a:ext cx="2971800" cy="457200"/>
-          </a:xfrm>
-          <a:prstGeom prst="rect">
-            <a:avLst/>
-          </a:prstGeom>
-        </p:spPr>
-        <p:txBody>
-          <a:bodyPr vert="horz" lIns="91440" tIns="45720" rIns="91440" bIns="45720" rtlCol="0"/>
-          <a:lstStyle>
-            <a:lvl1pPr algn="r">
-              <a:defRPr sz="1200"/>
-            </a:lvl1pPr>
-          </a:lstStyle>
-          <a:p>
-            <a:fld id="{0F89C1C7-3DCD-1040-A9CF-14679D8B5DDD}" type="datetimeFigureOut">
-              <a:rPr lang="en-US" smtClean="0"/>
-              <a:t>10/17/16</a:t>
-            </a:fld>
-            <a:endParaRPr lang="en-US"/>
-          </a:p>
-        </p:txBody>
-      </p:sp>
-      <p:sp>
-        <p:nvSpPr>
-          <p:cNvPr id="4" name="Slide Image Placeholder 3"/>
-          <p:cNvSpPr>
-            <a:spLocks noGrp="1" noRot="1" noChangeAspect="1"/>
-          </p:cNvSpPr>
-          <p:nvPr>
-            <p:ph type="sldImg" idx="2"/>
-          </p:nvPr>
-        </p:nvSpPr>
-        <p:spPr>
-          <a:xfrm>
-            <a:off x="1143000" y="685800"/>
-            <a:ext cx="4572000" cy="3429000"/>
-          </a:xfrm>
-          <a:prstGeom prst="rect">
-            <a:avLst/>
-          </a:prstGeom>
-          <a:noFill/>
-          <a:ln w="12700">
-            <a:solidFill>
-              <a:prstClr val="black"/>
-            </a:solidFill>
-          </a:ln>
-        </p:spPr>
-        <p:txBody>
-          <a:bodyPr vert="horz" lIns="91440" tIns="45720" rIns="91440" bIns="45720" rtlCol="0" anchor="ctr"/>
-          <a:lstStyle/>
-          <a:p>
-            <a:endParaRPr lang="en-US"/>
-          </a:p>
-        </p:txBody>
-      </p:sp>
-      <p:sp>
-        <p:nvSpPr>
-          <p:cNvPr id="5" name="Notes Placeholder 4"/>
-          <p:cNvSpPr>
-            <a:spLocks noGrp="1"/>
-          </p:cNvSpPr>
-          <p:nvPr>
-            <p:ph type="body" sz="quarter" idx="3"/>
-          </p:nvPr>
-        </p:nvSpPr>
-        <p:spPr>
-          <a:xfrm>
-            <a:off x="685800" y="4343400"/>
-            <a:ext cx="5486400" cy="4114800"/>
-          </a:xfrm>
-          <a:prstGeom prst="rect">
-            <a:avLst/>
-          </a:prstGeom>
-        </p:spPr>
-        <p:txBody>
-          <a:bodyPr vert="horz" lIns="91440" tIns="45720" rIns="91440" bIns="45720" rtlCol="0"/>
-          <a:lstStyle/>
-          <a:p>
-            <a:pPr lvl="0"/>
-            <a:r>
-              <a:rPr lang="en-US" smtClean="0"/>
-              <a:t>Click to edit Master text styles</a:t>
-            </a:r>
-          </a:p>
-          <a:p>
-            <a:pPr lvl="1"/>
-            <a:r>
-              <a:rPr lang="en-US" smtClean="0"/>
-              <a:t>Second level</a:t>
-            </a:r>
-          </a:p>
-          <a:p>
-            <a:pPr lvl="2"/>
-            <a:r>
-              <a:rPr lang="en-US" smtClean="0"/>
-              <a:t>Third level</a:t>
-            </a:r>
-          </a:p>
-          <a:p>
-            <a:pPr lvl="3"/>
-            <a:r>
-              <a:rPr lang="en-US" smtClean="0"/>
-              <a:t>Fourth level</a:t>
-            </a:r>
-          </a:p>
-          <a:p>
-            <a:pPr lvl="4"/>
-            <a:r>
-              <a:rPr lang="en-US" smtClean="0"/>
-              <a:t>Fifth level</a:t>
-            </a:r>
-            <a:endParaRPr lang="en-US"/>
-          </a:p>
-        </p:txBody>
-      </p:sp>
-      <p:sp>
-        <p:nvSpPr>
-          <p:cNvPr id="6" name="Footer Placeholder 5"/>
-          <p:cNvSpPr>
-            <a:spLocks noGrp="1"/>
-          </p:cNvSpPr>
-          <p:nvPr>
-            <p:ph type="ftr" sz="quarter" idx="4"/>
-          </p:nvPr>
-        </p:nvSpPr>
-        <p:spPr>
-          <a:xfrm>
-            <a:off x="0" y="8685213"/>
-            <a:ext cx="2971800" cy="457200"/>
-          </a:xfrm>
-          <a:prstGeom prst="rect">
-            <a:avLst/>
-          </a:prstGeom>
-        </p:spPr>
-        <p:txBody>
-          <a:bodyPr vert="horz" lIns="91440" tIns="45720" rIns="91440" bIns="45720" rtlCol="0" anchor="b"/>
-          <a:lstStyle>
-            <a:lvl1pPr algn="l">
-              <a:defRPr sz="1200"/>
-            </a:lvl1pPr>
-          </a:lstStyle>
-          <a:p>
-            <a:endParaRPr lang="en-US"/>
-          </a:p>
-        </p:txBody>
-      </p:sp>
-      <p:sp>
-        <p:nvSpPr>
-          <p:cNvPr id="7" name="Slide Number Placeholder 6"/>
-          <p:cNvSpPr>
-            <a:spLocks noGrp="1"/>
-          </p:cNvSpPr>
-          <p:nvPr>
-            <p:ph type="sldNum" sz="quarter" idx="5"/>
-          </p:nvPr>
-        </p:nvSpPr>
-        <p:spPr>
-          <a:xfrm>
-            <a:off x="3884613" y="8685213"/>
-            <a:ext cx="2971800" cy="457200"/>
-          </a:xfrm>
-          <a:prstGeom prst="rect">
-            <a:avLst/>
-          </a:prstGeom>
-        </p:spPr>
-        <p:txBody>
-          <a:bodyPr vert="horz" lIns="91440" tIns="45720" rIns="91440" bIns="45720" rtlCol="0" anchor="b"/>
-          <a:lstStyle>
-            <a:lvl1pPr algn="r">
-              <a:defRPr sz="1200"/>
-            </a:lvl1pPr>
-          </a:lstStyle>
-          <a:p>
-            <a:fld id="{BB5E49A5-4136-284D-997B-48E1D791AD67}" type="slidenum">
-              <a:rPr lang="en-US" smtClean="0"/>
-              <a:t>‹#›</a:t>
-            </a:fld>
-            <a:endParaRPr lang="en-US"/>
-          </a:p>
-        </p:txBody>
-      </p:sp>
     </p:spTree>
     <p:extLst>
       <p:ext uri="{BB962C8B-B14F-4D97-AF65-F5344CB8AC3E}">
-        <p14:creationId xmlns:p14="http://schemas.microsoft.com/office/powerpoint/2010/main" val="2623252185"/>
+        <p14:creationId xmlns:p14="http://schemas.microsoft.com/office/powerpoint/2010/main" val="656541991"/>
       </p:ext>
     </p:extLst>
   </p:cSld>
   <p:clrMap bg1="lt1" tx1="dk1" bg2="lt2" tx2="dk2" accent1="accent1" accent2="accent2" accent3="accent3" accent4="accent4" accent5="accent5" accent6="accent6" hlink="hlink" folHlink="folHlink"/>
   <p:notesStyle>
-    <a:lvl1pPr marL="0" algn="l" defTabSz="457200" rtl="0" eaLnBrk="1" latinLnBrk="0" hangingPunct="1">
+    <a:lvl1pPr marL="0" algn="l" defTabSz="914400" rtl="0" eaLnBrk="1" latinLnBrk="0" hangingPunct="1">
       <a:defRPr sz="1200" kern="1200">
         <a:solidFill>
           <a:schemeClr val="tx1"/>
@@ -380,7 +174,7 @@
         <a:cs typeface="+mn-cs"/>
       </a:defRPr>
     </a:lvl1pPr>
-    <a:lvl2pPr marL="457200" algn="l" defTabSz="457200" rtl="0" eaLnBrk="1" latinLnBrk="0" hangingPunct="1">
+    <a:lvl2pPr marL="457200" algn="l" defTabSz="914400" rtl="0" eaLnBrk="1" latinLnBrk="0" hangingPunct="1">
       <a:defRPr sz="1200" kern="1200">
         <a:solidFill>
           <a:schemeClr val="tx1"/>
@@ -390,7 +184,7 @@
         <a:cs typeface="+mn-cs"/>
       </a:defRPr>
     </a:lvl2pPr>
-    <a:lvl3pPr marL="914400" algn="l" defTabSz="457200" rtl="0" eaLnBrk="1" latinLnBrk="0" hangingPunct="1">
+    <a:lvl3pPr marL="914400" algn="l" defTabSz="914400" rtl="0" eaLnBrk="1" latinLnBrk="0" hangingPunct="1">
       <a:defRPr sz="1200" kern="1200">
         <a:solidFill>
           <a:schemeClr val="tx1"/>
@@ -400,7 +194,7 @@
         <a:cs typeface="+mn-cs"/>
       </a:defRPr>
     </a:lvl3pPr>
-    <a:lvl4pPr marL="1371600" algn="l" defTabSz="457200" rtl="0" eaLnBrk="1" latinLnBrk="0" hangingPunct="1">
+    <a:lvl4pPr marL="1371600" algn="l" defTabSz="914400" rtl="0" eaLnBrk="1" latinLnBrk="0" hangingPunct="1">
       <a:defRPr sz="1200" kern="1200">
         <a:solidFill>
           <a:schemeClr val="tx1"/>
@@ -410,7 +204,7 @@
         <a:cs typeface="+mn-cs"/>
       </a:defRPr>
     </a:lvl4pPr>
-    <a:lvl5pPr marL="1828800" algn="l" defTabSz="457200" rtl="0" eaLnBrk="1" latinLnBrk="0" hangingPunct="1">
+    <a:lvl5pPr marL="1828800" algn="l" defTabSz="914400" rtl="0" eaLnBrk="1" latinLnBrk="0" hangingPunct="1">
       <a:defRPr sz="1200" kern="1200">
         <a:solidFill>
           <a:schemeClr val="tx1"/>
@@ -420,7 +214,7 @@
         <a:cs typeface="+mn-cs"/>
       </a:defRPr>
     </a:lvl5pPr>
-    <a:lvl6pPr marL="2286000" algn="l" defTabSz="457200" rtl="0" eaLnBrk="1" latinLnBrk="0" hangingPunct="1">
+    <a:lvl6pPr marL="2286000" algn="l" defTabSz="914400" rtl="0" eaLnBrk="1" latinLnBrk="0" hangingPunct="1">
       <a:defRPr sz="1200" kern="1200">
         <a:solidFill>
           <a:schemeClr val="tx1"/>
@@ -430,7 +224,7 @@
         <a:cs typeface="+mn-cs"/>
       </a:defRPr>
     </a:lvl6pPr>
-    <a:lvl7pPr marL="2743200" algn="l" defTabSz="457200" rtl="0" eaLnBrk="1" latinLnBrk="0" hangingPunct="1">
+    <a:lvl7pPr marL="2743200" algn="l" defTabSz="914400" rtl="0" eaLnBrk="1" latinLnBrk="0" hangingPunct="1">
       <a:defRPr sz="1200" kern="1200">
         <a:solidFill>
           <a:schemeClr val="tx1"/>
@@ -440,7 +234,7 @@
         <a:cs typeface="+mn-cs"/>
       </a:defRPr>
     </a:lvl7pPr>
-    <a:lvl8pPr marL="3200400" algn="l" defTabSz="457200" rtl="0" eaLnBrk="1" latinLnBrk="0" hangingPunct="1">
+    <a:lvl8pPr marL="3200400" algn="l" defTabSz="914400" rtl="0" eaLnBrk="1" latinLnBrk="0" hangingPunct="1">
       <a:defRPr sz="1200" kern="1200">
         <a:solidFill>
           <a:schemeClr val="tx1"/>
@@ -450,7 +244,7 @@
         <a:cs typeface="+mn-cs"/>
       </a:defRPr>
     </a:lvl8pPr>
-    <a:lvl9pPr marL="3657600" algn="l" defTabSz="457200" rtl="0" eaLnBrk="1" latinLnBrk="0" hangingPunct="1">
+    <a:lvl9pPr marL="3657600" algn="l" defTabSz="914400" rtl="0" eaLnBrk="1" latinLnBrk="0" hangingPunct="1">
       <a:defRPr sz="1200" kern="1200">
         <a:solidFill>
           <a:schemeClr val="tx1"/>
@@ -465,7 +259,7 @@
 </file>
 
 <file path=ppt/notesSlides/notesSlide1.xml><?xml version="1.0" encoding="utf-8"?>
-<p:notes xmlns:a="http://schemas.openxmlformats.org/drawingml/2006/main" xmlns:p="http://schemas.openxmlformats.org/presentationml/2006/main" xmlns:r="http://schemas.openxmlformats.org/officeDocument/2006/relationships">
+<p:notes xmlns:a="http://schemas.openxmlformats.org/drawingml/2006/main" xmlns:r="http://schemas.openxmlformats.org/officeDocument/2006/relationships" xmlns:p="http://schemas.openxmlformats.org/presentationml/2006/main">
   <p:cSld>
     <p:spTree>
       <p:nvGrpSpPr>
@@ -485,7 +279,7 @@
         <p:nvSpPr>
           <p:cNvPr id="2" name="Slide Image Placeholder 1"/>
           <p:cNvSpPr>
-            <a:spLocks noGrp="1"/>
+            <a:spLocks noGrp="1" noRot="1" noChangeAspect="1"/>
           </p:cNvSpPr>
           <p:nvPr>
             <p:ph type="sldImg" idx="2"/>
@@ -500,7 +294,7 @@
             <a:spLocks noGrp="1"/>
           </p:cNvSpPr>
           <p:nvPr>
-            <p:ph type="body" idx="3" sz="quarter"/>
+            <p:ph type="body" sz="quarter" idx="3"/>
           </p:nvPr>
         </p:nvSpPr>
         <p:spPr/>
@@ -509,20 +303,221 @@
           <a:lstStyle/>
           <a:p>
             <a:r>
-              <a:t>GESAMT-ZIEL: 8 Minuten, sehr wenige Folien – der Fokus liegt auf der LIVE-Demo von Code und Plots.</a:t>
-            </a:r>
-          </a:p>
-          <a:p/>
-          <a:p>
-            <a:r>
-              <a:t>(ca. 0:00–0:30) Begrüßung. „In unserem Projekt untersuchen wir, wie sich verschiedene FFT-Fensterfunktionen auf die Analyse der Herzfrequenzvariabilität auswirken. Wir zeigen den Code und die Ergebnisse gleich live – die Folien halten wir bewusst kurz.“</a:t>
-            </a:r>
-          </a:p>
-          <a:p/>
-          <a:p>
-            <a:r>
-              <a:t>HINWEIS: Namen und Studiengang oben noch anpassen.</a:t>
-            </a:r>
+              <a:rPr dirty="0"/>
+              <a:t>GESAMT-ZIEL: 8 </a:t>
+            </a:r>
+            <a:r>
+              <a:rPr dirty="0" err="1"/>
+              <a:t>Minuten</a:t>
+            </a:r>
+            <a:r>
+              <a:rPr dirty="0"/>
+              <a:t>, </a:t>
+            </a:r>
+            <a:r>
+              <a:rPr dirty="0" err="1"/>
+              <a:t>sehr</a:t>
+            </a:r>
+            <a:r>
+              <a:rPr dirty="0"/>
+              <a:t> </a:t>
+            </a:r>
+            <a:r>
+              <a:rPr dirty="0" err="1"/>
+              <a:t>wenige</a:t>
+            </a:r>
+            <a:r>
+              <a:rPr dirty="0"/>
+              <a:t> </a:t>
+            </a:r>
+            <a:r>
+              <a:rPr dirty="0" err="1"/>
+              <a:t>Folien</a:t>
+            </a:r>
+            <a:r>
+              <a:rPr dirty="0"/>
+              <a:t> – der </a:t>
+            </a:r>
+            <a:r>
+              <a:rPr dirty="0" err="1"/>
+              <a:t>Fokus</a:t>
+            </a:r>
+            <a:r>
+              <a:rPr dirty="0"/>
+              <a:t> </a:t>
+            </a:r>
+            <a:r>
+              <a:rPr dirty="0" err="1"/>
+              <a:t>liegt</a:t>
+            </a:r>
+            <a:r>
+              <a:rPr dirty="0"/>
+              <a:t> auf der LIVE-Demo von Code und Plots.</a:t>
+            </a:r>
+          </a:p>
+          <a:p>
+            <a:endParaRPr dirty="0"/>
+          </a:p>
+          <a:p>
+            <a:r>
+              <a:rPr dirty="0"/>
+              <a:t>(ca. 0:00–0:30) </a:t>
+            </a:r>
+            <a:r>
+              <a:rPr dirty="0" err="1"/>
+              <a:t>Begrüßung</a:t>
+            </a:r>
+            <a:r>
+              <a:rPr dirty="0"/>
+              <a:t>. „In </a:t>
+            </a:r>
+            <a:r>
+              <a:rPr dirty="0" err="1"/>
+              <a:t>unserem</a:t>
+            </a:r>
+            <a:r>
+              <a:rPr dirty="0"/>
+              <a:t> Projekt </a:t>
+            </a:r>
+            <a:r>
+              <a:rPr dirty="0" err="1"/>
+              <a:t>untersuchen</a:t>
+            </a:r>
+            <a:r>
+              <a:rPr dirty="0"/>
+              <a:t> </a:t>
+            </a:r>
+            <a:r>
+              <a:rPr dirty="0" err="1"/>
+              <a:t>wir</a:t>
+            </a:r>
+            <a:r>
+              <a:rPr dirty="0"/>
+              <a:t>, </a:t>
+            </a:r>
+            <a:r>
+              <a:rPr dirty="0" err="1"/>
+              <a:t>wie</a:t>
+            </a:r>
+            <a:r>
+              <a:rPr dirty="0"/>
+              <a:t> </a:t>
+            </a:r>
+            <a:r>
+              <a:rPr dirty="0" err="1"/>
+              <a:t>sich</a:t>
+            </a:r>
+            <a:r>
+              <a:rPr dirty="0"/>
+              <a:t> </a:t>
+            </a:r>
+            <a:r>
+              <a:rPr dirty="0" err="1"/>
+              <a:t>verschiedene</a:t>
+            </a:r>
+            <a:r>
+              <a:rPr dirty="0"/>
+              <a:t> FFT-</a:t>
+            </a:r>
+            <a:r>
+              <a:rPr dirty="0" err="1"/>
+              <a:t>Fensterfunktionen</a:t>
+            </a:r>
+            <a:r>
+              <a:rPr dirty="0"/>
+              <a:t> auf die </a:t>
+            </a:r>
+            <a:r>
+              <a:rPr dirty="0" err="1"/>
+              <a:t>Analyse</a:t>
+            </a:r>
+            <a:r>
+              <a:rPr dirty="0"/>
+              <a:t> der </a:t>
+            </a:r>
+            <a:r>
+              <a:rPr dirty="0" err="1"/>
+              <a:t>Herzfrequenzvariabilität</a:t>
+            </a:r>
+            <a:r>
+              <a:rPr dirty="0"/>
+              <a:t> </a:t>
+            </a:r>
+            <a:r>
+              <a:rPr dirty="0" err="1"/>
+              <a:t>auswirken</a:t>
+            </a:r>
+            <a:r>
+              <a:rPr dirty="0"/>
+              <a:t>. Wir </a:t>
+            </a:r>
+            <a:r>
+              <a:rPr dirty="0" err="1"/>
+              <a:t>zeigen</a:t>
+            </a:r>
+            <a:r>
+              <a:rPr dirty="0"/>
+              <a:t> den Code und die </a:t>
+            </a:r>
+            <a:r>
+              <a:rPr dirty="0" err="1"/>
+              <a:t>Ergebnisse</a:t>
+            </a:r>
+            <a:r>
+              <a:rPr dirty="0"/>
+              <a:t> </a:t>
+            </a:r>
+            <a:r>
+              <a:rPr dirty="0" err="1"/>
+              <a:t>gleich</a:t>
+            </a:r>
+            <a:r>
+              <a:rPr dirty="0"/>
+              <a:t> live – die </a:t>
+            </a:r>
+            <a:r>
+              <a:rPr dirty="0" err="1"/>
+              <a:t>Folien</a:t>
+            </a:r>
+            <a:r>
+              <a:rPr dirty="0"/>
+              <a:t> </a:t>
+            </a:r>
+            <a:r>
+              <a:rPr dirty="0" err="1"/>
+              <a:t>halten</a:t>
+            </a:r>
+            <a:r>
+              <a:rPr dirty="0"/>
+              <a:t> </a:t>
+            </a:r>
+            <a:r>
+              <a:rPr dirty="0" err="1"/>
+              <a:t>wir</a:t>
+            </a:r>
+            <a:r>
+              <a:rPr dirty="0"/>
+              <a:t> </a:t>
+            </a:r>
+            <a:r>
+              <a:rPr dirty="0" err="1"/>
+              <a:t>bewusst</a:t>
+            </a:r>
+            <a:r>
+              <a:rPr dirty="0"/>
+              <a:t> </a:t>
+            </a:r>
+            <a:r>
+              <a:rPr dirty="0" err="1"/>
+              <a:t>kurz</a:t>
+            </a:r>
+            <a:r>
+              <a:rPr dirty="0"/>
+              <a:t>.“</a:t>
+            </a:r>
+          </a:p>
+          <a:p>
+            <a:endParaRPr dirty="0"/>
           </a:p>
         </p:txBody>
       </p:sp>
@@ -533,7 +528,7 @@
             <a:spLocks noGrp="1"/>
           </p:cNvSpPr>
           <p:nvPr>
-            <p:ph type="sldNum" idx="5" sz="quarter"/>
+            <p:ph type="sldNum" sz="quarter" idx="5"/>
           </p:nvPr>
         </p:nvSpPr>
         <p:spPr/>
@@ -547,7 +542,7 @@
 </file>
 
 <file path=ppt/notesSlides/notesSlide2.xml><?xml version="1.0" encoding="utf-8"?>
-<p:notes xmlns:a="http://schemas.openxmlformats.org/drawingml/2006/main" xmlns:p="http://schemas.openxmlformats.org/presentationml/2006/main" xmlns:r="http://schemas.openxmlformats.org/officeDocument/2006/relationships">
+<p:notes xmlns:a="http://schemas.openxmlformats.org/drawingml/2006/main" xmlns:r="http://schemas.openxmlformats.org/officeDocument/2006/relationships" xmlns:p="http://schemas.openxmlformats.org/presentationml/2006/main">
   <p:cSld>
     <p:spTree>
       <p:nvGrpSpPr>
@@ -567,7 +562,7 @@
         <p:nvSpPr>
           <p:cNvPr id="2" name="Slide Image Placeholder 1"/>
           <p:cNvSpPr>
-            <a:spLocks noGrp="1"/>
+            <a:spLocks noGrp="1" noRot="1" noChangeAspect="1"/>
           </p:cNvSpPr>
           <p:nvPr>
             <p:ph type="sldImg" idx="2"/>
@@ -582,7 +577,7 @@
             <a:spLocks noGrp="1"/>
           </p:cNvSpPr>
           <p:nvPr>
-            <p:ph type="body" idx="3" sz="quarter"/>
+            <p:ph type="body" sz="quarter" idx="3"/>
           </p:nvPr>
         </p:nvSpPr>
         <p:spPr/>
@@ -591,28 +586,267 @@
           <a:lstStyle/>
           <a:p>
             <a:r>
-              <a:t>(ca. 0:30–1:45) Motivation in einem Satz pro Punkt – nicht vorlesen, frei erzählen.</a:t>
-            </a:r>
-          </a:p>
-          <a:p/>
-          <a:p>
-            <a:r>
-              <a:t>• HRV = Herzfrequenzvariabilität; die Schwankung ist gesund und verrät etwas über das vegetative Nervensystem.</a:t>
-            </a:r>
-          </a:p>
-          <a:p>
-            <a:r>
-              <a:t>• FFT = zerlegt das Signal in Frequenzen (kurz: wie ein Prisma / Akkord in Einzeltöne).</a:t>
-            </a:r>
-          </a:p>
-          <a:p>
-            <a:r>
-              <a:t>• Leakage kurz anteasern – Details zeigen wir gleich live im Spektrum.</a:t>
-            </a:r>
-          </a:p>
-          <a:p>
-            <a:r>
-              <a:t>• Die Leitfrage ist der rote Faden der Präsentation.</a:t>
+              <a:rPr dirty="0"/>
+              <a:t>(ca. 0:30–1:45) Motivation in </a:t>
+            </a:r>
+            <a:r>
+              <a:rPr dirty="0" err="1"/>
+              <a:t>einem</a:t>
+            </a:r>
+            <a:r>
+              <a:rPr dirty="0"/>
+              <a:t> Satz pro </a:t>
+            </a:r>
+            <a:r>
+              <a:rPr dirty="0" err="1"/>
+              <a:t>Punkt</a:t>
+            </a:r>
+            <a:r>
+              <a:rPr dirty="0"/>
+              <a:t> – nicht </a:t>
+            </a:r>
+            <a:r>
+              <a:rPr dirty="0" err="1"/>
+              <a:t>vorlesen</a:t>
+            </a:r>
+            <a:r>
+              <a:rPr dirty="0"/>
+              <a:t>, </a:t>
+            </a:r>
+            <a:r>
+              <a:rPr dirty="0" err="1"/>
+              <a:t>frei</a:t>
+            </a:r>
+            <a:r>
+              <a:rPr dirty="0"/>
+              <a:t> </a:t>
+            </a:r>
+            <a:r>
+              <a:rPr dirty="0" err="1"/>
+              <a:t>erzählen</a:t>
+            </a:r>
+            <a:r>
+              <a:rPr dirty="0"/>
+              <a:t>.</a:t>
+            </a:r>
+          </a:p>
+          <a:p>
+            <a:endParaRPr dirty="0"/>
+          </a:p>
+          <a:p>
+            <a:r>
+              <a:rPr dirty="0"/>
+              <a:t>• HRV = </a:t>
+            </a:r>
+            <a:r>
+              <a:rPr dirty="0" err="1"/>
+              <a:t>Herzfrequenzvariabilität</a:t>
+            </a:r>
+            <a:r>
+              <a:rPr dirty="0"/>
+              <a:t>; die </a:t>
+            </a:r>
+            <a:r>
+              <a:rPr dirty="0" err="1"/>
+              <a:t>Schwankung</a:t>
+            </a:r>
+            <a:r>
+              <a:rPr dirty="0"/>
+              <a:t> </a:t>
+            </a:r>
+            <a:r>
+              <a:rPr dirty="0" err="1"/>
+              <a:t>ist</a:t>
+            </a:r>
+            <a:r>
+              <a:rPr dirty="0"/>
+              <a:t> </a:t>
+            </a:r>
+            <a:r>
+              <a:rPr dirty="0" err="1"/>
+              <a:t>gesund</a:t>
+            </a:r>
+            <a:r>
+              <a:rPr dirty="0"/>
+              <a:t> und </a:t>
+            </a:r>
+            <a:r>
+              <a:rPr dirty="0" err="1"/>
+              <a:t>verrät</a:t>
+            </a:r>
+            <a:r>
+              <a:rPr dirty="0"/>
+              <a:t> </a:t>
+            </a:r>
+            <a:r>
+              <a:rPr dirty="0" err="1"/>
+              <a:t>etwas</a:t>
+            </a:r>
+            <a:r>
+              <a:rPr dirty="0"/>
+              <a:t> </a:t>
+            </a:r>
+            <a:r>
+              <a:rPr dirty="0" err="1"/>
+              <a:t>über</a:t>
+            </a:r>
+            <a:r>
+              <a:rPr dirty="0"/>
+              <a:t> das vegetative </a:t>
+            </a:r>
+            <a:r>
+              <a:rPr dirty="0" err="1"/>
+              <a:t>Nervensystem</a:t>
+            </a:r>
+            <a:r>
+              <a:rPr dirty="0"/>
+              <a:t>.</a:t>
+            </a:r>
+          </a:p>
+          <a:p>
+            <a:r>
+              <a:rPr dirty="0"/>
+              <a:t>• FFT = </a:t>
+            </a:r>
+            <a:r>
+              <a:rPr dirty="0" err="1"/>
+              <a:t>zerlegt</a:t>
+            </a:r>
+            <a:r>
+              <a:rPr dirty="0"/>
+              <a:t> das Signal in </a:t>
+            </a:r>
+            <a:r>
+              <a:rPr dirty="0" err="1"/>
+              <a:t>Frequenzen</a:t>
+            </a:r>
+            <a:r>
+              <a:rPr dirty="0"/>
+              <a:t> (</a:t>
+            </a:r>
+            <a:r>
+              <a:rPr dirty="0" err="1"/>
+              <a:t>kurz</a:t>
+            </a:r>
+            <a:r>
+              <a:rPr dirty="0"/>
+              <a:t>: </a:t>
+            </a:r>
+            <a:r>
+              <a:rPr dirty="0" err="1"/>
+              <a:t>wie</a:t>
+            </a:r>
+            <a:r>
+              <a:rPr dirty="0"/>
+              <a:t> </a:t>
+            </a:r>
+            <a:r>
+              <a:rPr dirty="0" err="1"/>
+              <a:t>ein</a:t>
+            </a:r>
+            <a:r>
+              <a:rPr dirty="0"/>
+              <a:t> Prisma / </a:t>
+            </a:r>
+            <a:r>
+              <a:rPr dirty="0" err="1"/>
+              <a:t>Akkord</a:t>
+            </a:r>
+            <a:r>
+              <a:rPr dirty="0"/>
+              <a:t> in </a:t>
+            </a:r>
+            <a:r>
+              <a:rPr dirty="0" err="1"/>
+              <a:t>Einzeltöne</a:t>
+            </a:r>
+            <a:r>
+              <a:rPr dirty="0"/>
+              <a:t>).</a:t>
+            </a:r>
+          </a:p>
+          <a:p>
+            <a:r>
+              <a:rPr dirty="0"/>
+              <a:t>• Leakage </a:t>
+            </a:r>
+            <a:r>
+              <a:rPr dirty="0" err="1"/>
+              <a:t>kurz</a:t>
+            </a:r>
+            <a:r>
+              <a:rPr dirty="0"/>
+              <a:t> </a:t>
+            </a:r>
+            <a:r>
+              <a:rPr dirty="0" err="1"/>
+              <a:t>anteasern</a:t>
+            </a:r>
+            <a:r>
+              <a:rPr dirty="0"/>
+              <a:t> – Details </a:t>
+            </a:r>
+            <a:r>
+              <a:rPr dirty="0" err="1"/>
+              <a:t>zeigen</a:t>
+            </a:r>
+            <a:r>
+              <a:rPr dirty="0"/>
+              <a:t> </a:t>
+            </a:r>
+            <a:r>
+              <a:rPr dirty="0" err="1"/>
+              <a:t>wir</a:t>
+            </a:r>
+            <a:r>
+              <a:rPr dirty="0"/>
+              <a:t> </a:t>
+            </a:r>
+            <a:r>
+              <a:rPr dirty="0" err="1"/>
+              <a:t>gleich</a:t>
+            </a:r>
+            <a:r>
+              <a:rPr dirty="0"/>
+              <a:t> live </a:t>
+            </a:r>
+            <a:r>
+              <a:rPr dirty="0" err="1"/>
+              <a:t>im</a:t>
+            </a:r>
+            <a:r>
+              <a:rPr dirty="0"/>
+              <a:t> Spektrum.</a:t>
+            </a:r>
+          </a:p>
+          <a:p>
+            <a:r>
+              <a:rPr dirty="0"/>
+              <a:t>• Die </a:t>
+            </a:r>
+            <a:r>
+              <a:rPr dirty="0" err="1"/>
+              <a:t>Leitfrage</a:t>
+            </a:r>
+            <a:r>
+              <a:rPr dirty="0"/>
+              <a:t> </a:t>
+            </a:r>
+            <a:r>
+              <a:rPr dirty="0" err="1"/>
+              <a:t>ist</a:t>
+            </a:r>
+            <a:r>
+              <a:rPr dirty="0"/>
+              <a:t> der rote Faden der </a:t>
+            </a:r>
+            <a:r>
+              <a:rPr dirty="0" err="1"/>
+              <a:t>Präsentation</a:t>
+            </a:r>
+            <a:r>
+              <a:rPr dirty="0"/>
+              <a:t>.</a:t>
             </a:r>
           </a:p>
         </p:txBody>
@@ -624,7 +858,7 @@
             <a:spLocks noGrp="1"/>
           </p:cNvSpPr>
           <p:nvPr>
-            <p:ph type="sldNum" idx="5" sz="quarter"/>
+            <p:ph type="sldNum" sz="quarter" idx="5"/>
           </p:nvPr>
         </p:nvSpPr>
         <p:spPr/>
@@ -638,7 +872,7 @@
 </file>
 
 <file path=ppt/notesSlides/notesSlide3.xml><?xml version="1.0" encoding="utf-8"?>
-<p:notes xmlns:a="http://schemas.openxmlformats.org/drawingml/2006/main" xmlns:p="http://schemas.openxmlformats.org/presentationml/2006/main" xmlns:r="http://schemas.openxmlformats.org/officeDocument/2006/relationships">
+<p:notes xmlns:a="http://schemas.openxmlformats.org/drawingml/2006/main" xmlns:r="http://schemas.openxmlformats.org/officeDocument/2006/relationships" xmlns:p="http://schemas.openxmlformats.org/presentationml/2006/main">
   <p:cSld>
     <p:spTree>
       <p:nvGrpSpPr>
@@ -658,7 +892,7 @@
         <p:nvSpPr>
           <p:cNvPr id="2" name="Slide Image Placeholder 1"/>
           <p:cNvSpPr>
-            <a:spLocks noGrp="1"/>
+            <a:spLocks noGrp="1" noRot="1" noChangeAspect="1"/>
           </p:cNvSpPr>
           <p:nvPr>
             <p:ph type="sldImg" idx="2"/>
@@ -673,7 +907,7 @@
             <a:spLocks noGrp="1"/>
           </p:cNvSpPr>
           <p:nvPr>
-            <p:ph type="body" idx="3" sz="quarter"/>
+            <p:ph type="body" sz="quarter" idx="3"/>
           </p:nvPr>
         </p:nvSpPr>
         <p:spPr/>
@@ -685,13 +919,17 @@
               <a:t>(ca. 1:45–3:15) DIE zentrale Erklärfolie – hier ruhig etwas mehr Zeit.</a:t>
             </a:r>
           </a:p>
-          <a:p/>
+          <a:p>
+            <a:endParaRPr/>
+          </a:p>
           <a:p>
             <a:r>
               <a:t>Kette einmal durchgehen: EKG rein → filtern → R-Zacken finden → Abstände (RR) berechnen → gleichmäßig abtasten (FFT braucht gleiche Abstände) → FFT mit jedem Fenster → Leistung in den Bändern VLF/LF/HF + Wasserfall.</a:t>
             </a:r>
           </a:p>
-          <a:p/>
+          <a:p>
+            <a:endParaRPr/>
+          </a:p>
           <a:p>
             <a:r>
               <a:t>Betonen: Der rote Block (FFT × 6 Fenster) ist das eigentliche Experiment – alles davor ist gleich, nur das Fenster wird variiert.</a:t>
@@ -711,7 +949,7 @@
             <a:spLocks noGrp="1"/>
           </p:cNvSpPr>
           <p:nvPr>
-            <p:ph type="sldNum" idx="5" sz="quarter"/>
+            <p:ph type="sldNum" sz="quarter" idx="5"/>
           </p:nvPr>
         </p:nvSpPr>
         <p:spPr/>
@@ -725,7 +963,7 @@
 </file>
 
 <file path=ppt/notesSlides/notesSlide4.xml><?xml version="1.0" encoding="utf-8"?>
-<p:notes xmlns:a="http://schemas.openxmlformats.org/drawingml/2006/main" xmlns:p="http://schemas.openxmlformats.org/presentationml/2006/main" xmlns:r="http://schemas.openxmlformats.org/officeDocument/2006/relationships">
+<p:notes xmlns:a="http://schemas.openxmlformats.org/drawingml/2006/main" xmlns:r="http://schemas.openxmlformats.org/officeDocument/2006/relationships" xmlns:p="http://schemas.openxmlformats.org/presentationml/2006/main">
   <p:cSld>
     <p:spTree>
       <p:nvGrpSpPr>
@@ -745,7 +983,7 @@
         <p:nvSpPr>
           <p:cNvPr id="2" name="Slide Image Placeholder 1"/>
           <p:cNvSpPr>
-            <a:spLocks noGrp="1"/>
+            <a:spLocks noGrp="1" noRot="1" noChangeAspect="1"/>
           </p:cNvSpPr>
           <p:nvPr>
             <p:ph type="sldImg" idx="2"/>
@@ -760,7 +998,7 @@
             <a:spLocks noGrp="1"/>
           </p:cNvSpPr>
           <p:nvPr>
-            <p:ph type="body" idx="3" sz="quarter"/>
+            <p:ph type="body" sz="quarter" idx="3"/>
           </p:nvPr>
         </p:nvSpPr>
         <p:spPr/>
@@ -769,34 +1007,384 @@
           <a:lstStyle/>
           <a:p>
             <a:r>
-              <a:t>(ca. 3:15–4:15) Nur das Prinzip – die echten Kurven zeigen wir gleich live (Fenster im Zeit-/Frequenzbereich).</a:t>
-            </a:r>
-          </a:p>
-          <a:p/>
-          <a:p>
-            <a:r>
-              <a:t>• Hauptkeule = der „echte“ Peak; schmal = zwei nahe Frequenzen bleiben trennbar.</a:t>
-            </a:r>
-          </a:p>
-          <a:p>
-            <a:r>
-              <a:t>• Nebenkeulen = unerwünschtes Auslaufen = Leakage; niedrig = sauber.</a:t>
-            </a:r>
-          </a:p>
-          <a:p>
-            <a:r>
-              <a:t>• Naturgesetz: schmaler bedeutet höhere Nebenkeulen – immer ein Kompromiss.</a:t>
-            </a:r>
-          </a:p>
-          <a:p>
-            <a:r>
-              <a:t>• Rechteck = „kein Fenster“ (Negativbeispiel), Flat-Top = extrem sauber, aber sehr breit.</a:t>
-            </a:r>
-          </a:p>
-          <a:p/>
-          <a:p>
-            <a:r>
-              <a:t>Überleitung: „Genug Theorie – schauen wir es uns direkt in MATLAB an.“</a:t>
+              <a:rPr dirty="0"/>
+              <a:t>(ca. 3:15–4:15) Nur das </a:t>
+            </a:r>
+            <a:r>
+              <a:rPr dirty="0" err="1"/>
+              <a:t>Prinzip</a:t>
+            </a:r>
+            <a:r>
+              <a:rPr dirty="0"/>
+              <a:t> – die </a:t>
+            </a:r>
+            <a:r>
+              <a:rPr dirty="0" err="1"/>
+              <a:t>echten</a:t>
+            </a:r>
+            <a:r>
+              <a:rPr dirty="0"/>
+              <a:t> </a:t>
+            </a:r>
+            <a:r>
+              <a:rPr dirty="0" err="1"/>
+              <a:t>Kurven</a:t>
+            </a:r>
+            <a:r>
+              <a:rPr dirty="0"/>
+              <a:t> </a:t>
+            </a:r>
+            <a:r>
+              <a:rPr dirty="0" err="1"/>
+              <a:t>zeigen</a:t>
+            </a:r>
+            <a:r>
+              <a:rPr dirty="0"/>
+              <a:t> </a:t>
+            </a:r>
+            <a:r>
+              <a:rPr dirty="0" err="1"/>
+              <a:t>wir</a:t>
+            </a:r>
+            <a:r>
+              <a:rPr dirty="0"/>
+              <a:t> </a:t>
+            </a:r>
+            <a:r>
+              <a:rPr dirty="0" err="1"/>
+              <a:t>gleich</a:t>
+            </a:r>
+            <a:r>
+              <a:rPr dirty="0"/>
+              <a:t> live (Fenster </a:t>
+            </a:r>
+            <a:r>
+              <a:rPr dirty="0" err="1"/>
+              <a:t>im</a:t>
+            </a:r>
+            <a:r>
+              <a:rPr dirty="0"/>
+              <a:t> Zeit-/</a:t>
+            </a:r>
+            <a:r>
+              <a:rPr dirty="0" err="1"/>
+              <a:t>Frequenzbereich</a:t>
+            </a:r>
+            <a:r>
+              <a:rPr dirty="0"/>
+              <a:t>).</a:t>
+            </a:r>
+          </a:p>
+          <a:p>
+            <a:endParaRPr dirty="0"/>
+          </a:p>
+          <a:p>
+            <a:r>
+              <a:rPr dirty="0"/>
+              <a:t>• </a:t>
+            </a:r>
+            <a:r>
+              <a:rPr dirty="0" err="1"/>
+              <a:t>Hauptkeule</a:t>
+            </a:r>
+            <a:r>
+              <a:rPr dirty="0"/>
+              <a:t> = der „</a:t>
+            </a:r>
+            <a:r>
+              <a:rPr dirty="0" err="1"/>
+              <a:t>echte</a:t>
+            </a:r>
+            <a:r>
+              <a:rPr dirty="0"/>
+              <a:t>“ Peak; </a:t>
+            </a:r>
+            <a:r>
+              <a:rPr dirty="0" err="1"/>
+              <a:t>schmal</a:t>
+            </a:r>
+            <a:r>
+              <a:rPr dirty="0"/>
+              <a:t> = </a:t>
+            </a:r>
+            <a:r>
+              <a:rPr dirty="0" err="1"/>
+              <a:t>zwei</a:t>
+            </a:r>
+            <a:r>
+              <a:rPr dirty="0"/>
+              <a:t> </a:t>
+            </a:r>
+            <a:r>
+              <a:rPr dirty="0" err="1"/>
+              <a:t>nahe</a:t>
+            </a:r>
+            <a:r>
+              <a:rPr dirty="0"/>
+              <a:t> </a:t>
+            </a:r>
+            <a:r>
+              <a:rPr dirty="0" err="1"/>
+              <a:t>Frequenzen</a:t>
+            </a:r>
+            <a:r>
+              <a:rPr dirty="0"/>
+              <a:t> </a:t>
+            </a:r>
+            <a:r>
+              <a:rPr dirty="0" err="1"/>
+              <a:t>bleiben</a:t>
+            </a:r>
+            <a:r>
+              <a:rPr dirty="0"/>
+              <a:t> </a:t>
+            </a:r>
+            <a:r>
+              <a:rPr dirty="0" err="1"/>
+              <a:t>trennbar</a:t>
+            </a:r>
+            <a:r>
+              <a:rPr dirty="0"/>
+              <a:t>.</a:t>
+            </a:r>
+          </a:p>
+          <a:p>
+            <a:r>
+              <a:rPr dirty="0"/>
+              <a:t>• </a:t>
+            </a:r>
+            <a:r>
+              <a:rPr dirty="0" err="1"/>
+              <a:t>Nebenkeulen</a:t>
+            </a:r>
+            <a:r>
+              <a:rPr dirty="0"/>
+              <a:t> = </a:t>
+            </a:r>
+            <a:r>
+              <a:rPr dirty="0" err="1"/>
+              <a:t>unerwünschtes</a:t>
+            </a:r>
+            <a:r>
+              <a:rPr dirty="0"/>
+              <a:t> </a:t>
+            </a:r>
+            <a:r>
+              <a:rPr dirty="0" err="1"/>
+              <a:t>Auslaufen</a:t>
+            </a:r>
+            <a:r>
+              <a:rPr dirty="0"/>
+              <a:t> = Leakage; </a:t>
+            </a:r>
+            <a:r>
+              <a:rPr dirty="0" err="1"/>
+              <a:t>niedrig</a:t>
+            </a:r>
+            <a:r>
+              <a:rPr dirty="0"/>
+              <a:t> = </a:t>
+            </a:r>
+            <a:r>
+              <a:rPr dirty="0" err="1"/>
+              <a:t>sauber</a:t>
+            </a:r>
+            <a:r>
+              <a:rPr dirty="0"/>
+              <a:t>.</a:t>
+            </a:r>
+          </a:p>
+          <a:p>
+            <a:r>
+              <a:rPr dirty="0"/>
+              <a:t>• </a:t>
+            </a:r>
+            <a:r>
+              <a:rPr dirty="0" err="1"/>
+              <a:t>Naturgesetz</a:t>
+            </a:r>
+            <a:r>
+              <a:rPr dirty="0"/>
+              <a:t>: </a:t>
+            </a:r>
+            <a:r>
+              <a:rPr dirty="0" err="1"/>
+              <a:t>schmaler</a:t>
+            </a:r>
+            <a:r>
+              <a:rPr dirty="0"/>
+              <a:t> </a:t>
+            </a:r>
+            <a:r>
+              <a:rPr dirty="0" err="1"/>
+              <a:t>bedeutet</a:t>
+            </a:r>
+            <a:r>
+              <a:rPr dirty="0"/>
+              <a:t> </a:t>
+            </a:r>
+            <a:r>
+              <a:rPr dirty="0" err="1"/>
+              <a:t>höhere</a:t>
+            </a:r>
+            <a:r>
+              <a:rPr dirty="0"/>
+              <a:t> </a:t>
+            </a:r>
+            <a:r>
+              <a:rPr dirty="0" err="1"/>
+              <a:t>Nebenkeulen</a:t>
+            </a:r>
+            <a:r>
+              <a:rPr dirty="0"/>
+              <a:t> – immer </a:t>
+            </a:r>
+            <a:r>
+              <a:rPr dirty="0" err="1"/>
+              <a:t>ein</a:t>
+            </a:r>
+            <a:r>
+              <a:rPr dirty="0"/>
+              <a:t> </a:t>
+            </a:r>
+            <a:r>
+              <a:rPr dirty="0" err="1"/>
+              <a:t>Kompromiss</a:t>
+            </a:r>
+            <a:r>
+              <a:rPr dirty="0"/>
+              <a:t>.</a:t>
+            </a:r>
+          </a:p>
+          <a:p>
+            <a:r>
+              <a:rPr dirty="0"/>
+              <a:t>• </a:t>
+            </a:r>
+            <a:r>
+              <a:rPr dirty="0" err="1"/>
+              <a:t>Rechteck</a:t>
+            </a:r>
+            <a:r>
+              <a:rPr dirty="0"/>
+              <a:t> = „</a:t>
+            </a:r>
+            <a:r>
+              <a:rPr dirty="0" err="1"/>
+              <a:t>kein</a:t>
+            </a:r>
+            <a:r>
+              <a:rPr dirty="0"/>
+              <a:t> Fenster“ (</a:t>
+            </a:r>
+            <a:r>
+              <a:rPr dirty="0" err="1"/>
+              <a:t>Negativbeispiel</a:t>
+            </a:r>
+            <a:r>
+              <a:rPr dirty="0"/>
+              <a:t>), Flat-Top = </a:t>
+            </a:r>
+            <a:r>
+              <a:rPr dirty="0" err="1"/>
+              <a:t>extrem</a:t>
+            </a:r>
+            <a:r>
+              <a:rPr dirty="0"/>
+              <a:t> </a:t>
+            </a:r>
+            <a:r>
+              <a:rPr dirty="0" err="1"/>
+              <a:t>sauber</a:t>
+            </a:r>
+            <a:r>
+              <a:rPr dirty="0"/>
+              <a:t>, </a:t>
+            </a:r>
+            <a:r>
+              <a:rPr dirty="0" err="1"/>
+              <a:t>aber</a:t>
+            </a:r>
+            <a:r>
+              <a:rPr dirty="0"/>
+              <a:t> </a:t>
+            </a:r>
+            <a:r>
+              <a:rPr dirty="0" err="1"/>
+              <a:t>sehr</a:t>
+            </a:r>
+            <a:r>
+              <a:rPr dirty="0"/>
+              <a:t> </a:t>
+            </a:r>
+            <a:r>
+              <a:rPr dirty="0" err="1"/>
+              <a:t>breit</a:t>
+            </a:r>
+            <a:r>
+              <a:rPr dirty="0"/>
+              <a:t>.</a:t>
+            </a:r>
+          </a:p>
+          <a:p>
+            <a:endParaRPr dirty="0"/>
+          </a:p>
+          <a:p>
+            <a:r>
+              <a:rPr dirty="0" err="1"/>
+              <a:t>Überleitung</a:t>
+            </a:r>
+            <a:r>
+              <a:rPr dirty="0"/>
+              <a:t>: „</a:t>
+            </a:r>
+            <a:r>
+              <a:rPr dirty="0" err="1"/>
+              <a:t>Genug</a:t>
+            </a:r>
+            <a:r>
+              <a:rPr dirty="0"/>
+              <a:t> </a:t>
+            </a:r>
+            <a:r>
+              <a:rPr dirty="0" err="1"/>
+              <a:t>Theorie</a:t>
+            </a:r>
+            <a:r>
+              <a:rPr dirty="0"/>
+              <a:t> – </a:t>
+            </a:r>
+            <a:r>
+              <a:rPr dirty="0" err="1"/>
+              <a:t>schauen</a:t>
+            </a:r>
+            <a:r>
+              <a:rPr dirty="0"/>
+              <a:t> </a:t>
+            </a:r>
+            <a:r>
+              <a:rPr dirty="0" err="1"/>
+              <a:t>wir</a:t>
+            </a:r>
+            <a:r>
+              <a:rPr dirty="0"/>
+              <a:t> es </a:t>
+            </a:r>
+            <a:r>
+              <a:rPr dirty="0" err="1"/>
+              <a:t>uns</a:t>
+            </a:r>
+            <a:r>
+              <a:rPr dirty="0"/>
+              <a:t> </a:t>
+            </a:r>
+            <a:r>
+              <a:rPr dirty="0" err="1"/>
+              <a:t>direkt</a:t>
+            </a:r>
+            <a:r>
+              <a:rPr dirty="0"/>
+              <a:t> in MATLAB an.“</a:t>
             </a:r>
           </a:p>
         </p:txBody>
@@ -808,7 +1396,7 @@
             <a:spLocks noGrp="1"/>
           </p:cNvSpPr>
           <p:nvPr>
-            <p:ph type="sldNum" idx="5" sz="quarter"/>
+            <p:ph type="sldNum" sz="quarter" idx="5"/>
           </p:nvPr>
         </p:nvSpPr>
         <p:spPr/>
@@ -822,7 +1410,7 @@
 </file>
 
 <file path=ppt/notesSlides/notesSlide5.xml><?xml version="1.0" encoding="utf-8"?>
-<p:notes xmlns:a="http://schemas.openxmlformats.org/drawingml/2006/main" xmlns:p="http://schemas.openxmlformats.org/presentationml/2006/main" xmlns:r="http://schemas.openxmlformats.org/officeDocument/2006/relationships">
+<p:notes xmlns:a="http://schemas.openxmlformats.org/drawingml/2006/main" xmlns:r="http://schemas.openxmlformats.org/officeDocument/2006/relationships" xmlns:p="http://schemas.openxmlformats.org/presentationml/2006/main">
   <p:cSld>
     <p:spTree>
       <p:nvGrpSpPr>
@@ -842,7 +1430,7 @@
         <p:nvSpPr>
           <p:cNvPr id="2" name="Slide Image Placeholder 1"/>
           <p:cNvSpPr>
-            <a:spLocks noGrp="1"/>
+            <a:spLocks noGrp="1" noRot="1" noChangeAspect="1"/>
           </p:cNvSpPr>
           <p:nvPr>
             <p:ph type="sldImg" idx="2"/>
@@ -857,7 +1445,7 @@
             <a:spLocks noGrp="1"/>
           </p:cNvSpPr>
           <p:nvPr>
-            <p:ph type="body" idx="3" sz="quarter"/>
+            <p:ph type="body" sz="quarter" idx="3"/>
           </p:nvPr>
         </p:nvSpPr>
         <p:spPr/>
@@ -866,59 +1454,514 @@
           <a:lstStyle/>
           <a:p>
             <a:r>
-              <a:t>(ca. 4:15–6:45) HERZSTÜCK – ca. 2,5 Min. Ruhig und gezielt klicken, nicht hetzen.</a:t>
-            </a:r>
-          </a:p>
-          <a:p/>
-          <a:p>
-            <a:r>
-              <a:t>Roter Faden fuers Publikum:</a:t>
-            </a:r>
-          </a:p>
-          <a:p>
-            <a:r>
-              <a:t>1) Kurz die modulare Struktur (eine Funktion je Pipeline-Schritt).</a:t>
-            </a:r>
-          </a:p>
-          <a:p>
-            <a:r>
-              <a:t>2) Start – während es läuft: Konsolenausgabe kommentieren (fs, Dauer, R-Zacken, Artefakte).</a:t>
-            </a:r>
-          </a:p>
-          <a:p>
-            <a:r>
-              <a:t>3) Vorverarbeitung: Baseline weg, Signal sauber; R-Zacken sitzen genau auf den Spitzen.</a:t>
-            </a:r>
-          </a:p>
-          <a:p>
-            <a:r>
-              <a:t>4) Tachogramm: echte HRV-Dynamik.</a:t>
-            </a:r>
-          </a:p>
-          <a:p>
-            <a:r>
-              <a:t>5) Fensterbilder: Rechteck breite/hohe Nebenkeulen, Flat-Top sehr niedrig aber breit.</a:t>
-            </a:r>
-          </a:p>
-          <a:p>
-            <a:r>
-              <a:t>6) WICHTIGSTE Folie live: dB-Spektrum – Rechteck (blau) liegt oben (Leakage-Boden), Flat-Top (hellblau) unten (sauber).</a:t>
-            </a:r>
-          </a:p>
-          <a:p>
-            <a:r>
-              <a:t>7) Wasserfälle vergleichen – einheitliche Skala betonen.</a:t>
-            </a:r>
-          </a:p>
-          <a:p>
-            <a:r>
-              <a:t>8) Tabelle: auf HF und LF/HF zeigen (Überleitung zur nächsten Folie).</a:t>
-            </a:r>
-          </a:p>
-          <a:p/>
-          <a:p>
-            <a:r>
-              <a:t>FALLBACK: Falls MATLAB zickt – all_figures.pdf offen halten und daraus zeigen.</a:t>
+              <a:rPr dirty="0"/>
+              <a:t>(ca. 4:15–6:45) HERZSTÜCK – ca. 2,5 Min. Ruhig und </a:t>
+            </a:r>
+            <a:r>
+              <a:rPr dirty="0" err="1"/>
+              <a:t>gezielt</a:t>
+            </a:r>
+            <a:r>
+              <a:rPr dirty="0"/>
+              <a:t> </a:t>
+            </a:r>
+            <a:r>
+              <a:rPr dirty="0" err="1"/>
+              <a:t>klicken</a:t>
+            </a:r>
+            <a:r>
+              <a:rPr dirty="0"/>
+              <a:t>, nicht </a:t>
+            </a:r>
+            <a:r>
+              <a:rPr dirty="0" err="1"/>
+              <a:t>hetzen</a:t>
+            </a:r>
+            <a:r>
+              <a:rPr dirty="0"/>
+              <a:t>.</a:t>
+            </a:r>
+          </a:p>
+          <a:p>
+            <a:endParaRPr dirty="0"/>
+          </a:p>
+          <a:p>
+            <a:r>
+              <a:rPr dirty="0"/>
+              <a:t>Roter Faden </a:t>
+            </a:r>
+            <a:r>
+              <a:rPr dirty="0" err="1"/>
+              <a:t>fuers</a:t>
+            </a:r>
+            <a:r>
+              <a:rPr dirty="0"/>
+              <a:t> </a:t>
+            </a:r>
+            <a:r>
+              <a:rPr dirty="0" err="1"/>
+              <a:t>Publikum</a:t>
+            </a:r>
+            <a:r>
+              <a:rPr dirty="0"/>
+              <a:t>:</a:t>
+            </a:r>
+          </a:p>
+          <a:p>
+            <a:r>
+              <a:rPr dirty="0"/>
+              <a:t>1) Kurz die </a:t>
+            </a:r>
+            <a:r>
+              <a:rPr dirty="0" err="1"/>
+              <a:t>modulare</a:t>
+            </a:r>
+            <a:r>
+              <a:rPr dirty="0"/>
+              <a:t> </a:t>
+            </a:r>
+            <a:r>
+              <a:rPr dirty="0" err="1"/>
+              <a:t>Struktur</a:t>
+            </a:r>
+            <a:r>
+              <a:rPr dirty="0"/>
+              <a:t> (</a:t>
+            </a:r>
+            <a:r>
+              <a:rPr dirty="0" err="1"/>
+              <a:t>eine</a:t>
+            </a:r>
+            <a:r>
+              <a:rPr dirty="0"/>
+              <a:t> </a:t>
+            </a:r>
+            <a:r>
+              <a:rPr dirty="0" err="1"/>
+              <a:t>Funktion</a:t>
+            </a:r>
+            <a:r>
+              <a:rPr dirty="0"/>
+              <a:t> je Pipeline-Schritt).</a:t>
+            </a:r>
+          </a:p>
+          <a:p>
+            <a:r>
+              <a:rPr dirty="0"/>
+              <a:t>2) Start – </a:t>
+            </a:r>
+            <a:r>
+              <a:rPr dirty="0" err="1"/>
+              <a:t>während</a:t>
+            </a:r>
+            <a:r>
+              <a:rPr dirty="0"/>
+              <a:t> es </a:t>
+            </a:r>
+            <a:r>
+              <a:rPr dirty="0" err="1"/>
+              <a:t>läuft</a:t>
+            </a:r>
+            <a:r>
+              <a:rPr dirty="0"/>
+              <a:t>: </a:t>
+            </a:r>
+            <a:r>
+              <a:rPr dirty="0" err="1"/>
+              <a:t>Konsolenausgabe</a:t>
+            </a:r>
+            <a:r>
+              <a:rPr dirty="0"/>
+              <a:t> </a:t>
+            </a:r>
+            <a:r>
+              <a:rPr dirty="0" err="1"/>
+              <a:t>kommentieren</a:t>
+            </a:r>
+            <a:r>
+              <a:rPr dirty="0"/>
+              <a:t> (fs, Dauer, R-</a:t>
+            </a:r>
+            <a:r>
+              <a:rPr dirty="0" err="1"/>
+              <a:t>Zacken</a:t>
+            </a:r>
+            <a:r>
+              <a:rPr dirty="0"/>
+              <a:t>, </a:t>
+            </a:r>
+            <a:r>
+              <a:rPr dirty="0" err="1"/>
+              <a:t>Artefakte</a:t>
+            </a:r>
+            <a:r>
+              <a:rPr dirty="0"/>
+              <a:t>).</a:t>
+            </a:r>
+          </a:p>
+          <a:p>
+            <a:r>
+              <a:rPr dirty="0"/>
+              <a:t>3) </a:t>
+            </a:r>
+            <a:r>
+              <a:rPr dirty="0" err="1"/>
+              <a:t>Vorverarbeitung</a:t>
+            </a:r>
+            <a:r>
+              <a:rPr dirty="0"/>
+              <a:t>: Baseline </a:t>
+            </a:r>
+            <a:r>
+              <a:rPr dirty="0" err="1"/>
+              <a:t>weg</a:t>
+            </a:r>
+            <a:r>
+              <a:rPr dirty="0"/>
+              <a:t>, Signal </a:t>
+            </a:r>
+            <a:r>
+              <a:rPr dirty="0" err="1"/>
+              <a:t>sauber</a:t>
+            </a:r>
+            <a:r>
+              <a:rPr dirty="0"/>
+              <a:t>; R-</a:t>
+            </a:r>
+            <a:r>
+              <a:rPr dirty="0" err="1"/>
+              <a:t>Zacken</a:t>
+            </a:r>
+            <a:r>
+              <a:rPr dirty="0"/>
+              <a:t> </a:t>
+            </a:r>
+            <a:r>
+              <a:rPr dirty="0" err="1"/>
+              <a:t>sitzen</a:t>
+            </a:r>
+            <a:r>
+              <a:rPr dirty="0"/>
+              <a:t> </a:t>
+            </a:r>
+            <a:r>
+              <a:rPr dirty="0" err="1"/>
+              <a:t>genau</a:t>
+            </a:r>
+            <a:r>
+              <a:rPr dirty="0"/>
+              <a:t> auf den </a:t>
+            </a:r>
+            <a:r>
+              <a:rPr dirty="0" err="1"/>
+              <a:t>Spitzen</a:t>
+            </a:r>
+            <a:r>
+              <a:rPr dirty="0"/>
+              <a:t>.</a:t>
+            </a:r>
+          </a:p>
+          <a:p>
+            <a:r>
+              <a:rPr dirty="0"/>
+              <a:t>4) </a:t>
+            </a:r>
+            <a:r>
+              <a:rPr dirty="0" err="1"/>
+              <a:t>Tachogramm</a:t>
+            </a:r>
+            <a:r>
+              <a:rPr dirty="0"/>
+              <a:t>: </a:t>
+            </a:r>
+            <a:r>
+              <a:rPr dirty="0" err="1"/>
+              <a:t>echte</a:t>
+            </a:r>
+            <a:r>
+              <a:rPr dirty="0"/>
+              <a:t> HRV-Dynamik.</a:t>
+            </a:r>
+          </a:p>
+          <a:p>
+            <a:r>
+              <a:rPr dirty="0"/>
+              <a:t>5) </a:t>
+            </a:r>
+            <a:r>
+              <a:rPr dirty="0" err="1"/>
+              <a:t>Fensterbilder</a:t>
+            </a:r>
+            <a:r>
+              <a:rPr dirty="0"/>
+              <a:t>: </a:t>
+            </a:r>
+            <a:r>
+              <a:rPr dirty="0" err="1"/>
+              <a:t>Rechteck</a:t>
+            </a:r>
+            <a:r>
+              <a:rPr dirty="0"/>
+              <a:t> </a:t>
+            </a:r>
+            <a:r>
+              <a:rPr dirty="0" err="1"/>
+              <a:t>breite</a:t>
+            </a:r>
+            <a:r>
+              <a:rPr dirty="0"/>
+              <a:t>/</a:t>
+            </a:r>
+            <a:r>
+              <a:rPr dirty="0" err="1"/>
+              <a:t>hohe</a:t>
+            </a:r>
+            <a:r>
+              <a:rPr dirty="0"/>
+              <a:t> </a:t>
+            </a:r>
+            <a:r>
+              <a:rPr dirty="0" err="1"/>
+              <a:t>Nebenkeulen</a:t>
+            </a:r>
+            <a:r>
+              <a:rPr dirty="0"/>
+              <a:t>, Flat-Top </a:t>
+            </a:r>
+            <a:r>
+              <a:rPr dirty="0" err="1"/>
+              <a:t>sehr</a:t>
+            </a:r>
+            <a:r>
+              <a:rPr dirty="0"/>
+              <a:t> </a:t>
+            </a:r>
+            <a:r>
+              <a:rPr dirty="0" err="1"/>
+              <a:t>niedrig</a:t>
+            </a:r>
+            <a:r>
+              <a:rPr dirty="0"/>
+              <a:t> </a:t>
+            </a:r>
+            <a:r>
+              <a:rPr dirty="0" err="1"/>
+              <a:t>aber</a:t>
+            </a:r>
+            <a:r>
+              <a:rPr dirty="0"/>
+              <a:t> </a:t>
+            </a:r>
+            <a:r>
+              <a:rPr dirty="0" err="1"/>
+              <a:t>breit</a:t>
+            </a:r>
+            <a:r>
+              <a:rPr dirty="0"/>
+              <a:t>.</a:t>
+            </a:r>
+          </a:p>
+          <a:p>
+            <a:r>
+              <a:rPr dirty="0"/>
+              <a:t>6) WICHTIGSTE Folie live: dB-Spektrum – </a:t>
+            </a:r>
+            <a:r>
+              <a:rPr dirty="0" err="1"/>
+              <a:t>Rechteck</a:t>
+            </a:r>
+            <a:r>
+              <a:rPr dirty="0"/>
+              <a:t> (</a:t>
+            </a:r>
+            <a:r>
+              <a:rPr dirty="0" err="1"/>
+              <a:t>blau</a:t>
+            </a:r>
+            <a:r>
+              <a:rPr dirty="0"/>
+              <a:t>) </a:t>
+            </a:r>
+            <a:r>
+              <a:rPr dirty="0" err="1"/>
+              <a:t>liegt</a:t>
+            </a:r>
+            <a:r>
+              <a:rPr dirty="0"/>
+              <a:t> </a:t>
+            </a:r>
+            <a:r>
+              <a:rPr dirty="0" err="1"/>
+              <a:t>oben</a:t>
+            </a:r>
+            <a:r>
+              <a:rPr dirty="0"/>
+              <a:t> (Leakage-Boden), Flat-Top (</a:t>
+            </a:r>
+            <a:r>
+              <a:rPr dirty="0" err="1"/>
+              <a:t>hellblau</a:t>
+            </a:r>
+            <a:r>
+              <a:rPr dirty="0"/>
+              <a:t>) </a:t>
+            </a:r>
+            <a:r>
+              <a:rPr dirty="0" err="1"/>
+              <a:t>unten</a:t>
+            </a:r>
+            <a:r>
+              <a:rPr dirty="0"/>
+              <a:t> (</a:t>
+            </a:r>
+            <a:r>
+              <a:rPr dirty="0" err="1"/>
+              <a:t>sauber</a:t>
+            </a:r>
+            <a:r>
+              <a:rPr dirty="0"/>
+              <a:t>).</a:t>
+            </a:r>
+          </a:p>
+          <a:p>
+            <a:r>
+              <a:rPr dirty="0"/>
+              <a:t>7) </a:t>
+            </a:r>
+            <a:r>
+              <a:rPr dirty="0" err="1"/>
+              <a:t>Wasserfälle</a:t>
+            </a:r>
+            <a:r>
+              <a:rPr dirty="0"/>
+              <a:t> </a:t>
+            </a:r>
+            <a:r>
+              <a:rPr dirty="0" err="1"/>
+              <a:t>vergleichen</a:t>
+            </a:r>
+            <a:r>
+              <a:rPr dirty="0"/>
+              <a:t> – </a:t>
+            </a:r>
+            <a:r>
+              <a:rPr dirty="0" err="1"/>
+              <a:t>einheitliche</a:t>
+            </a:r>
+            <a:r>
+              <a:rPr dirty="0"/>
+              <a:t> Skala </a:t>
+            </a:r>
+            <a:r>
+              <a:rPr dirty="0" err="1"/>
+              <a:t>betonen</a:t>
+            </a:r>
+            <a:r>
+              <a:rPr dirty="0"/>
+              <a:t>.</a:t>
+            </a:r>
+          </a:p>
+          <a:p>
+            <a:r>
+              <a:rPr dirty="0"/>
+              <a:t>8) </a:t>
+            </a:r>
+            <a:r>
+              <a:rPr dirty="0" err="1"/>
+              <a:t>Tabelle</a:t>
+            </a:r>
+            <a:r>
+              <a:rPr dirty="0"/>
+              <a:t>: auf HF und LF/HF </a:t>
+            </a:r>
+            <a:r>
+              <a:rPr dirty="0" err="1"/>
+              <a:t>zeigen</a:t>
+            </a:r>
+            <a:r>
+              <a:rPr dirty="0"/>
+              <a:t> (</a:t>
+            </a:r>
+            <a:r>
+              <a:rPr dirty="0" err="1"/>
+              <a:t>Überleitung</a:t>
+            </a:r>
+            <a:r>
+              <a:rPr dirty="0"/>
+              <a:t> </a:t>
+            </a:r>
+            <a:r>
+              <a:rPr dirty="0" err="1"/>
+              <a:t>zur</a:t>
+            </a:r>
+            <a:r>
+              <a:rPr dirty="0"/>
+              <a:t> </a:t>
+            </a:r>
+            <a:r>
+              <a:rPr dirty="0" err="1"/>
+              <a:t>nächsten</a:t>
+            </a:r>
+            <a:r>
+              <a:rPr dirty="0"/>
+              <a:t> Folie).</a:t>
+            </a:r>
+          </a:p>
+          <a:p>
+            <a:endParaRPr dirty="0"/>
+          </a:p>
+          <a:p>
+            <a:r>
+              <a:rPr dirty="0"/>
+              <a:t>FALLBACK: Falls MATLAB </a:t>
+            </a:r>
+            <a:r>
+              <a:rPr dirty="0" err="1"/>
+              <a:t>zickt</a:t>
+            </a:r>
+            <a:r>
+              <a:rPr dirty="0"/>
+              <a:t> – </a:t>
+            </a:r>
+            <a:r>
+              <a:rPr dirty="0" err="1"/>
+              <a:t>all_figures.pdf</a:t>
+            </a:r>
+            <a:r>
+              <a:rPr dirty="0"/>
+              <a:t> </a:t>
+            </a:r>
+            <a:r>
+              <a:rPr dirty="0" err="1"/>
+              <a:t>offen</a:t>
+            </a:r>
+            <a:r>
+              <a:rPr dirty="0"/>
+              <a:t> </a:t>
+            </a:r>
+            <a:r>
+              <a:rPr dirty="0" err="1"/>
+              <a:t>halten</a:t>
+            </a:r>
+            <a:r>
+              <a:rPr dirty="0"/>
+              <a:t> und </a:t>
+            </a:r>
+            <a:r>
+              <a:rPr dirty="0" err="1"/>
+              <a:t>daraus</a:t>
+            </a:r>
+            <a:r>
+              <a:rPr dirty="0"/>
+              <a:t> </a:t>
+            </a:r>
+            <a:r>
+              <a:rPr dirty="0" err="1"/>
+              <a:t>zeigen</a:t>
+            </a:r>
+            <a:r>
+              <a:rPr dirty="0"/>
+              <a:t>.</a:t>
             </a:r>
           </a:p>
         </p:txBody>
@@ -930,7 +1973,7 @@
             <a:spLocks noGrp="1"/>
           </p:cNvSpPr>
           <p:nvPr>
-            <p:ph type="sldNum" idx="5" sz="quarter"/>
+            <p:ph type="sldNum" sz="quarter" idx="5"/>
           </p:nvPr>
         </p:nvSpPr>
         <p:spPr/>
@@ -944,7 +1987,7 @@
 </file>
 
 <file path=ppt/notesSlides/notesSlide6.xml><?xml version="1.0" encoding="utf-8"?>
-<p:notes xmlns:a="http://schemas.openxmlformats.org/drawingml/2006/main" xmlns:p="http://schemas.openxmlformats.org/presentationml/2006/main" xmlns:r="http://schemas.openxmlformats.org/officeDocument/2006/relationships">
+<p:notes xmlns:a="http://schemas.openxmlformats.org/drawingml/2006/main" xmlns:r="http://schemas.openxmlformats.org/officeDocument/2006/relationships" xmlns:p="http://schemas.openxmlformats.org/presentationml/2006/main">
   <p:cSld>
     <p:spTree>
       <p:nvGrpSpPr>
@@ -964,7 +2007,7 @@
         <p:nvSpPr>
           <p:cNvPr id="2" name="Slide Image Placeholder 1"/>
           <p:cNvSpPr>
-            <a:spLocks noGrp="1"/>
+            <a:spLocks noGrp="1" noRot="1" noChangeAspect="1"/>
           </p:cNvSpPr>
           <p:nvPr>
             <p:ph type="sldImg" idx="2"/>
@@ -979,7 +2022,7 @@
             <a:spLocks noGrp="1"/>
           </p:cNvSpPr>
           <p:nvPr>
-            <p:ph type="body" idx="3" sz="quarter"/>
+            <p:ph type="body" sz="quarter" idx="3"/>
           </p:nvPr>
         </p:nvSpPr>
         <p:spPr/>
@@ -991,7 +2034,9 @@
               <a:t>(ca. 6:45–7:30) Die Kernaussage in einem Satz.</a:t>
             </a:r>
           </a:p>
-          <a:p/>
+          <a:p>
+            <a:endParaRPr/>
+          </a:p>
           <a:p>
             <a:r>
               <a:t>• Das HRV-Signal hat starke langsame und nur schwache schnelle Anteile.</a:t>
@@ -1021,7 +2066,7 @@
             <a:spLocks noGrp="1"/>
           </p:cNvSpPr>
           <p:nvPr>
-            <p:ph type="sldNum" idx="5" sz="quarter"/>
+            <p:ph type="sldNum" sz="quarter" idx="5"/>
           </p:nvPr>
         </p:nvSpPr>
         <p:spPr/>
@@ -1035,7 +2080,7 @@
 </file>
 
 <file path=ppt/notesSlides/notesSlide7.xml><?xml version="1.0" encoding="utf-8"?>
-<p:notes xmlns:a="http://schemas.openxmlformats.org/drawingml/2006/main" xmlns:p="http://schemas.openxmlformats.org/presentationml/2006/main" xmlns:r="http://schemas.openxmlformats.org/officeDocument/2006/relationships">
+<p:notes xmlns:a="http://schemas.openxmlformats.org/drawingml/2006/main" xmlns:r="http://schemas.openxmlformats.org/officeDocument/2006/relationships" xmlns:p="http://schemas.openxmlformats.org/presentationml/2006/main">
   <p:cSld>
     <p:spTree>
       <p:nvGrpSpPr>
@@ -1055,7 +2100,7 @@
         <p:nvSpPr>
           <p:cNvPr id="2" name="Slide Image Placeholder 1"/>
           <p:cNvSpPr>
-            <a:spLocks noGrp="1"/>
+            <a:spLocks noGrp="1" noRot="1" noChangeAspect="1"/>
           </p:cNvSpPr>
           <p:nvPr>
             <p:ph type="sldImg" idx="2"/>
@@ -1070,7 +2115,7 @@
             <a:spLocks noGrp="1"/>
           </p:cNvSpPr>
           <p:nvPr>
-            <p:ph type="body" idx="3" sz="quarter"/>
+            <p:ph type="body" sz="quarter" idx="3"/>
           </p:nvPr>
         </p:nvSpPr>
         <p:spPr/>
@@ -1079,13 +2124,117 @@
           <a:lstStyle/>
           <a:p>
             <a:r>
-              <a:t>(ca. 7:30–7:50) Klare Empfehlung, kurz halten.</a:t>
-            </a:r>
-          </a:p>
-          <a:p/>
-          <a:p>
-            <a:r>
-              <a:t>Antwort auf die Leitfrage von Folie 2: Hann. Kurz begründen (Kompromiss), die anderen nur in einem Halbsatz einordnen. Dann zur Dank-Folie.</a:t>
+              <a:rPr dirty="0"/>
+              <a:t>(ca. 7:30–7:50) Klare </a:t>
+            </a:r>
+            <a:r>
+              <a:rPr dirty="0" err="1"/>
+              <a:t>Empfehlung</a:t>
+            </a:r>
+            <a:r>
+              <a:rPr dirty="0"/>
+              <a:t>, </a:t>
+            </a:r>
+            <a:r>
+              <a:rPr dirty="0" err="1"/>
+              <a:t>kurz</a:t>
+            </a:r>
+            <a:r>
+              <a:rPr dirty="0"/>
+              <a:t> </a:t>
+            </a:r>
+            <a:r>
+              <a:rPr dirty="0" err="1"/>
+              <a:t>halten</a:t>
+            </a:r>
+            <a:r>
+              <a:rPr dirty="0"/>
+              <a:t>.</a:t>
+            </a:r>
+          </a:p>
+          <a:p>
+            <a:endParaRPr dirty="0"/>
+          </a:p>
+          <a:p>
+            <a:r>
+              <a:rPr dirty="0" err="1"/>
+              <a:t>Antwort</a:t>
+            </a:r>
+            <a:r>
+              <a:rPr dirty="0"/>
+              <a:t> auf die </a:t>
+            </a:r>
+            <a:r>
+              <a:rPr dirty="0" err="1"/>
+              <a:t>Leitfrage</a:t>
+            </a:r>
+            <a:r>
+              <a:rPr dirty="0"/>
+              <a:t> von Folie 2: Hann. Kurz </a:t>
+            </a:r>
+            <a:r>
+              <a:rPr dirty="0" err="1"/>
+              <a:t>begründen</a:t>
+            </a:r>
+            <a:r>
+              <a:rPr dirty="0"/>
+              <a:t> (</a:t>
+            </a:r>
+            <a:r>
+              <a:rPr dirty="0" err="1"/>
+              <a:t>Kompromiss</a:t>
+            </a:r>
+            <a:r>
+              <a:rPr dirty="0"/>
+              <a:t>), die </a:t>
+            </a:r>
+            <a:r>
+              <a:rPr dirty="0" err="1"/>
+              <a:t>anderen</a:t>
+            </a:r>
+            <a:r>
+              <a:rPr dirty="0"/>
+              <a:t> </a:t>
+            </a:r>
+            <a:r>
+              <a:rPr dirty="0" err="1"/>
+              <a:t>nur</a:t>
+            </a:r>
+            <a:r>
+              <a:rPr dirty="0"/>
+              <a:t> in </a:t>
+            </a:r>
+            <a:r>
+              <a:rPr dirty="0" err="1"/>
+              <a:t>einem</a:t>
+            </a:r>
+            <a:r>
+              <a:rPr dirty="0"/>
+              <a:t> </a:t>
+            </a:r>
+            <a:r>
+              <a:rPr dirty="0" err="1"/>
+              <a:t>Halbsatz</a:t>
+            </a:r>
+            <a:r>
+              <a:rPr dirty="0"/>
+              <a:t> </a:t>
+            </a:r>
+            <a:r>
+              <a:rPr dirty="0" err="1"/>
+              <a:t>einordnen</a:t>
+            </a:r>
+            <a:r>
+              <a:rPr dirty="0"/>
+              <a:t>. Dann </a:t>
+            </a:r>
+            <a:r>
+              <a:rPr dirty="0" err="1"/>
+              <a:t>zur</a:t>
+            </a:r>
+            <a:r>
+              <a:rPr dirty="0"/>
+              <a:t> Dank-Folie.</a:t>
             </a:r>
           </a:p>
         </p:txBody>
@@ -1097,7 +2246,7 @@
             <a:spLocks noGrp="1"/>
           </p:cNvSpPr>
           <p:nvPr>
-            <p:ph type="sldNum" idx="5" sz="quarter"/>
+            <p:ph type="sldNum" sz="quarter" idx="5"/>
           </p:nvPr>
         </p:nvSpPr>
         <p:spPr/>
@@ -1111,7 +2260,7 @@
 </file>
 
 <file path=ppt/notesSlides/notesSlide8.xml><?xml version="1.0" encoding="utf-8"?>
-<p:notes xmlns:a="http://schemas.openxmlformats.org/drawingml/2006/main" xmlns:p="http://schemas.openxmlformats.org/presentationml/2006/main" xmlns:r="http://schemas.openxmlformats.org/officeDocument/2006/relationships">
+<p:notes xmlns:a="http://schemas.openxmlformats.org/drawingml/2006/main" xmlns:r="http://schemas.openxmlformats.org/officeDocument/2006/relationships" xmlns:p="http://schemas.openxmlformats.org/presentationml/2006/main">
   <p:cSld>
     <p:spTree>
       <p:nvGrpSpPr>
@@ -1131,7 +2280,7 @@
         <p:nvSpPr>
           <p:cNvPr id="2" name="Slide Image Placeholder 1"/>
           <p:cNvSpPr>
-            <a:spLocks noGrp="1"/>
+            <a:spLocks noGrp="1" noRot="1" noChangeAspect="1"/>
           </p:cNvSpPr>
           <p:nvPr>
             <p:ph type="sldImg" idx="2"/>
@@ -1146,7 +2295,7 @@
             <a:spLocks noGrp="1"/>
           </p:cNvSpPr>
           <p:nvPr>
-            <p:ph type="body" idx="3" sz="quarter"/>
+            <p:ph type="body" sz="quarter" idx="3"/>
           </p:nvPr>
         </p:nvSpPr>
         <p:spPr/>
@@ -1155,13 +2304,129 @@
           <a:lstStyle/>
           <a:p>
             <a:r>
-              <a:t>(ca. 7:50–8:00) Bedanken, in die Fragerunde übergeben.</a:t>
-            </a:r>
-          </a:p>
-          <a:p/>
-          <a:p>
-            <a:r>
-              <a:t>Backup fuer Fragen: Datensatz ist ~40 min (Anforderung ≥1 h beachten); Segmentlänge 5 min, 50 % Überlappung (Welch-Mittelung senkt die Varianz); Bandgrenzen nach Task Force 1996.</a:t>
+              <a:rPr dirty="0"/>
+              <a:t>(ca. 7:50–8:00) </a:t>
+            </a:r>
+            <a:r>
+              <a:rPr dirty="0" err="1"/>
+              <a:t>Bedanken</a:t>
+            </a:r>
+            <a:r>
+              <a:rPr dirty="0"/>
+              <a:t>, in die </a:t>
+            </a:r>
+            <a:r>
+              <a:rPr dirty="0" err="1"/>
+              <a:t>Fragerunde</a:t>
+            </a:r>
+            <a:r>
+              <a:rPr dirty="0"/>
+              <a:t> </a:t>
+            </a:r>
+            <a:r>
+              <a:rPr dirty="0" err="1"/>
+              <a:t>übergeben</a:t>
+            </a:r>
+            <a:r>
+              <a:rPr dirty="0"/>
+              <a:t>.</a:t>
+            </a:r>
+          </a:p>
+          <a:p>
+            <a:endParaRPr dirty="0"/>
+          </a:p>
+          <a:p>
+            <a:r>
+              <a:rPr dirty="0"/>
+              <a:t>Backup </a:t>
+            </a:r>
+            <a:r>
+              <a:rPr dirty="0" err="1"/>
+              <a:t>fuer</a:t>
+            </a:r>
+            <a:r>
+              <a:rPr dirty="0"/>
+              <a:t> Fragen: </a:t>
+            </a:r>
+            <a:r>
+              <a:rPr dirty="0" err="1"/>
+              <a:t>Datensatz</a:t>
+            </a:r>
+            <a:r>
+              <a:rPr dirty="0"/>
+              <a:t> </a:t>
+            </a:r>
+            <a:r>
+              <a:rPr dirty="0" err="1"/>
+              <a:t>ist</a:t>
+            </a:r>
+            <a:r>
+              <a:rPr dirty="0"/>
+              <a:t> ~40 min (</a:t>
+            </a:r>
+            <a:r>
+              <a:rPr dirty="0" err="1"/>
+              <a:t>Anforderung</a:t>
+            </a:r>
+            <a:r>
+              <a:rPr dirty="0"/>
+              <a:t> ≥1 h </a:t>
+            </a:r>
+            <a:r>
+              <a:rPr dirty="0" err="1"/>
+              <a:t>beachten</a:t>
+            </a:r>
+            <a:r>
+              <a:rPr dirty="0"/>
+              <a:t>); </a:t>
+            </a:r>
+            <a:r>
+              <a:rPr dirty="0" err="1"/>
+              <a:t>Segmentlänge</a:t>
+            </a:r>
+            <a:r>
+              <a:rPr dirty="0"/>
+              <a:t> 5 min, 50 % </a:t>
+            </a:r>
+            <a:r>
+              <a:rPr dirty="0" err="1"/>
+              <a:t>Überlappung</a:t>
+            </a:r>
+            <a:r>
+              <a:rPr dirty="0"/>
+              <a:t> (Welch-Mittelung </a:t>
+            </a:r>
+            <a:r>
+              <a:rPr dirty="0" err="1"/>
+              <a:t>senkt</a:t>
+            </a:r>
+            <a:r>
+              <a:rPr dirty="0"/>
+              <a:t> die </a:t>
+            </a:r>
+            <a:r>
+              <a:rPr dirty="0" err="1"/>
+              <a:t>Varianz</a:t>
+            </a:r>
+            <a:r>
+              <a:rPr dirty="0"/>
+              <a:t>); </a:t>
+            </a:r>
+            <a:r>
+              <a:rPr dirty="0" err="1"/>
+              <a:t>Bandgrenzen</a:t>
+            </a:r>
+            <a:r>
+              <a:rPr dirty="0"/>
+              <a:t> </a:t>
+            </a:r>
+            <a:r>
+              <a:rPr dirty="0" err="1"/>
+              <a:t>nach</a:t>
+            </a:r>
+            <a:r>
+              <a:rPr dirty="0"/>
+              <a:t> Task Force 1996.</a:t>
             </a:r>
           </a:p>
         </p:txBody>
@@ -1173,7 +2438,7 @@
             <a:spLocks noGrp="1"/>
           </p:cNvSpPr>
           <p:nvPr>
-            <p:ph type="sldNum" idx="5" sz="quarter"/>
+            <p:ph type="sldNum" sz="quarter" idx="5"/>
           </p:nvPr>
         </p:nvSpPr>
         <p:spPr/>
@@ -1224,10 +2489,9 @@
           <a:lstStyle/>
           <a:p>
             <a:r>
-              <a:rPr lang="en-US" smtClean="0"/>
+              <a:rPr lang="en-US"/>
               <a:t>Click to edit Master title style</a:t>
             </a:r>
-            <a:endParaRPr lang="en-US"/>
           </a:p>
         </p:txBody>
       </p:sp>
@@ -1343,10 +2607,9 @@
           </a:lstStyle>
           <a:p>
             <a:r>
-              <a:rPr lang="en-US" smtClean="0"/>
+              <a:rPr lang="en-US"/>
               <a:t>Click to edit Master subtitle style</a:t>
             </a:r>
-            <a:endParaRPr lang="en-US"/>
           </a:p>
         </p:txBody>
       </p:sp>
@@ -1367,7 +2630,7 @@
           <a:p>
             <a:fld id="{5BCAD085-E8A6-8845-BD4E-CB4CCA059FC4}" type="datetimeFigureOut">
               <a:rPr lang="en-US" smtClean="0"/>
-              <a:t>1/27/13</a:t>
+              <a:t>7/13/26</a:t>
             </a:fld>
             <a:endParaRPr lang="en-US"/>
           </a:p>
@@ -1409,7 +2672,7 @@
           <a:p>
             <a:fld id="{C1FF6DA9-008F-8B48-92A6-B652298478BF}" type="slidenum">
               <a:rPr lang="en-US" smtClean="0"/>
-              <a:t>‹#›</a:t>
+              <a:t>‹Nr.›</a:t>
             </a:fld>
             <a:endParaRPr lang="en-US"/>
           </a:p>
@@ -1461,10 +2724,9 @@
           <a:lstStyle/>
           <a:p>
             <a:r>
-              <a:rPr lang="en-US" smtClean="0"/>
+              <a:rPr lang="en-US"/>
               <a:t>Click to edit Master title style</a:t>
             </a:r>
-            <a:endParaRPr lang="en-US"/>
           </a:p>
         </p:txBody>
       </p:sp>
@@ -1485,38 +2747,37 @@
           <a:p>
             <a:pPr lvl="0"/>
             <a:r>
-              <a:rPr lang="en-US" smtClean="0"/>
+              <a:rPr lang="en-US"/>
               <a:t>Click to edit Master text styles</a:t>
             </a:r>
           </a:p>
           <a:p>
             <a:pPr lvl="1"/>
             <a:r>
-              <a:rPr lang="en-US" smtClean="0"/>
+              <a:rPr lang="en-US"/>
               <a:t>Second level</a:t>
             </a:r>
           </a:p>
           <a:p>
             <a:pPr lvl="2"/>
             <a:r>
-              <a:rPr lang="en-US" smtClean="0"/>
+              <a:rPr lang="en-US"/>
               <a:t>Third level</a:t>
             </a:r>
           </a:p>
           <a:p>
             <a:pPr lvl="3"/>
             <a:r>
-              <a:rPr lang="en-US" smtClean="0"/>
+              <a:rPr lang="en-US"/>
               <a:t>Fourth level</a:t>
             </a:r>
           </a:p>
           <a:p>
             <a:pPr lvl="4"/>
             <a:r>
-              <a:rPr lang="en-US" smtClean="0"/>
+              <a:rPr lang="en-US"/>
               <a:t>Fifth level</a:t>
             </a:r>
-            <a:endParaRPr lang="en-US"/>
           </a:p>
         </p:txBody>
       </p:sp>
@@ -1537,7 +2798,7 @@
           <a:p>
             <a:fld id="{5BCAD085-E8A6-8845-BD4E-CB4CCA059FC4}" type="datetimeFigureOut">
               <a:rPr lang="en-US" smtClean="0"/>
-              <a:t>1/27/13</a:t>
+              <a:t>7/13/26</a:t>
             </a:fld>
             <a:endParaRPr lang="en-US"/>
           </a:p>
@@ -1579,7 +2840,7 @@
           <a:p>
             <a:fld id="{C1FF6DA9-008F-8B48-92A6-B652298478BF}" type="slidenum">
               <a:rPr lang="en-US" smtClean="0"/>
-              <a:t>‹#›</a:t>
+              <a:t>‹Nr.›</a:t>
             </a:fld>
             <a:endParaRPr lang="en-US"/>
           </a:p>
@@ -1636,10 +2897,9 @@
           <a:lstStyle/>
           <a:p>
             <a:r>
-              <a:rPr lang="en-US" smtClean="0"/>
+              <a:rPr lang="en-US"/>
               <a:t>Click to edit Master title style</a:t>
             </a:r>
-            <a:endParaRPr lang="en-US"/>
           </a:p>
         </p:txBody>
       </p:sp>
@@ -1665,38 +2925,37 @@
           <a:p>
             <a:pPr lvl="0"/>
             <a:r>
-              <a:rPr lang="en-US" smtClean="0"/>
+              <a:rPr lang="en-US"/>
               <a:t>Click to edit Master text styles</a:t>
             </a:r>
           </a:p>
           <a:p>
             <a:pPr lvl="1"/>
             <a:r>
-              <a:rPr lang="en-US" smtClean="0"/>
+              <a:rPr lang="en-US"/>
               <a:t>Second level</a:t>
             </a:r>
           </a:p>
           <a:p>
             <a:pPr lvl="2"/>
             <a:r>
-              <a:rPr lang="en-US" smtClean="0"/>
+              <a:rPr lang="en-US"/>
               <a:t>Third level</a:t>
             </a:r>
           </a:p>
           <a:p>
             <a:pPr lvl="3"/>
             <a:r>
-              <a:rPr lang="en-US" smtClean="0"/>
+              <a:rPr lang="en-US"/>
               <a:t>Fourth level</a:t>
             </a:r>
           </a:p>
           <a:p>
             <a:pPr lvl="4"/>
             <a:r>
-              <a:rPr lang="en-US" smtClean="0"/>
+              <a:rPr lang="en-US"/>
               <a:t>Fifth level</a:t>
             </a:r>
-            <a:endParaRPr lang="en-US"/>
           </a:p>
         </p:txBody>
       </p:sp>
@@ -1717,7 +2976,7 @@
           <a:p>
             <a:fld id="{5BCAD085-E8A6-8845-BD4E-CB4CCA059FC4}" type="datetimeFigureOut">
               <a:rPr lang="en-US" smtClean="0"/>
-              <a:t>1/27/13</a:t>
+              <a:t>7/13/26</a:t>
             </a:fld>
             <a:endParaRPr lang="en-US"/>
           </a:p>
@@ -1759,7 +3018,7 @@
           <a:p>
             <a:fld id="{C1FF6DA9-008F-8B48-92A6-B652298478BF}" type="slidenum">
               <a:rPr lang="en-US" smtClean="0"/>
-              <a:t>‹#›</a:t>
+              <a:t>‹Nr.›</a:t>
             </a:fld>
             <a:endParaRPr lang="en-US"/>
           </a:p>
@@ -1811,10 +3070,9 @@
           <a:lstStyle/>
           <a:p>
             <a:r>
-              <a:rPr lang="en-US" smtClean="0"/>
+              <a:rPr lang="en-US"/>
               <a:t>Click to edit Master title style</a:t>
             </a:r>
-            <a:endParaRPr lang="en-US"/>
           </a:p>
         </p:txBody>
       </p:sp>
@@ -1835,38 +3093,37 @@
           <a:p>
             <a:pPr lvl="0"/>
             <a:r>
-              <a:rPr lang="en-US" smtClean="0"/>
+              <a:rPr lang="en-US"/>
               <a:t>Click to edit Master text styles</a:t>
             </a:r>
           </a:p>
           <a:p>
             <a:pPr lvl="1"/>
             <a:r>
-              <a:rPr lang="en-US" smtClean="0"/>
+              <a:rPr lang="en-US"/>
               <a:t>Second level</a:t>
             </a:r>
           </a:p>
           <a:p>
             <a:pPr lvl="2"/>
             <a:r>
-              <a:rPr lang="en-US" smtClean="0"/>
+              <a:rPr lang="en-US"/>
               <a:t>Third level</a:t>
             </a:r>
           </a:p>
           <a:p>
             <a:pPr lvl="3"/>
             <a:r>
-              <a:rPr lang="en-US" smtClean="0"/>
+              <a:rPr lang="en-US"/>
               <a:t>Fourth level</a:t>
             </a:r>
           </a:p>
           <a:p>
             <a:pPr lvl="4"/>
             <a:r>
-              <a:rPr lang="en-US" smtClean="0"/>
+              <a:rPr lang="en-US"/>
               <a:t>Fifth level</a:t>
             </a:r>
-            <a:endParaRPr lang="en-US"/>
           </a:p>
         </p:txBody>
       </p:sp>
@@ -1887,7 +3144,7 @@
           <a:p>
             <a:fld id="{5BCAD085-E8A6-8845-BD4E-CB4CCA059FC4}" type="datetimeFigureOut">
               <a:rPr lang="en-US" smtClean="0"/>
-              <a:t>1/27/13</a:t>
+              <a:t>7/13/26</a:t>
             </a:fld>
             <a:endParaRPr lang="en-US"/>
           </a:p>
@@ -1929,7 +3186,7 @@
           <a:p>
             <a:fld id="{C1FF6DA9-008F-8B48-92A6-B652298478BF}" type="slidenum">
               <a:rPr lang="en-US" smtClean="0"/>
-              <a:t>‹#›</a:t>
+              <a:t>‹Nr.›</a:t>
             </a:fld>
             <a:endParaRPr lang="en-US"/>
           </a:p>
@@ -1990,10 +3247,9 @@
           </a:lstStyle>
           <a:p>
             <a:r>
-              <a:rPr lang="en-US" smtClean="0"/>
+              <a:rPr lang="en-US"/>
               <a:t>Click to edit Master title style</a:t>
             </a:r>
-            <a:endParaRPr lang="en-US"/>
           </a:p>
         </p:txBody>
       </p:sp>
@@ -2110,7 +3366,7 @@
           <a:p>
             <a:pPr lvl="0"/>
             <a:r>
-              <a:rPr lang="en-US" smtClean="0"/>
+              <a:rPr lang="en-US"/>
               <a:t>Click to edit Master text styles</a:t>
             </a:r>
           </a:p>
@@ -2133,7 +3389,7 @@
           <a:p>
             <a:fld id="{5BCAD085-E8A6-8845-BD4E-CB4CCA059FC4}" type="datetimeFigureOut">
               <a:rPr lang="en-US" smtClean="0"/>
-              <a:t>1/27/13</a:t>
+              <a:t>7/13/26</a:t>
             </a:fld>
             <a:endParaRPr lang="en-US"/>
           </a:p>
@@ -2175,7 +3431,7 @@
           <a:p>
             <a:fld id="{C1FF6DA9-008F-8B48-92A6-B652298478BF}" type="slidenum">
               <a:rPr lang="en-US" smtClean="0"/>
-              <a:t>‹#›</a:t>
+              <a:t>‹Nr.›</a:t>
             </a:fld>
             <a:endParaRPr lang="en-US"/>
           </a:p>
@@ -2227,10 +3483,9 @@
           <a:lstStyle/>
           <a:p>
             <a:r>
-              <a:rPr lang="en-US" smtClean="0"/>
+              <a:rPr lang="en-US"/>
               <a:t>Click to edit Master title style</a:t>
             </a:r>
-            <a:endParaRPr lang="en-US"/>
           </a:p>
         </p:txBody>
       </p:sp>
@@ -2284,38 +3539,37 @@
           <a:p>
             <a:pPr lvl="0"/>
             <a:r>
-              <a:rPr lang="en-US" smtClean="0"/>
+              <a:rPr lang="en-US"/>
               <a:t>Click to edit Master text styles</a:t>
             </a:r>
           </a:p>
           <a:p>
             <a:pPr lvl="1"/>
             <a:r>
-              <a:rPr lang="en-US" smtClean="0"/>
+              <a:rPr lang="en-US"/>
               <a:t>Second level</a:t>
             </a:r>
           </a:p>
           <a:p>
             <a:pPr lvl="2"/>
             <a:r>
-              <a:rPr lang="en-US" smtClean="0"/>
+              <a:rPr lang="en-US"/>
               <a:t>Third level</a:t>
             </a:r>
           </a:p>
           <a:p>
             <a:pPr lvl="3"/>
             <a:r>
-              <a:rPr lang="en-US" smtClean="0"/>
+              <a:rPr lang="en-US"/>
               <a:t>Fourth level</a:t>
             </a:r>
           </a:p>
           <a:p>
             <a:pPr lvl="4"/>
             <a:r>
-              <a:rPr lang="en-US" smtClean="0"/>
+              <a:rPr lang="en-US"/>
               <a:t>Fifth level</a:t>
             </a:r>
-            <a:endParaRPr lang="en-US"/>
           </a:p>
         </p:txBody>
       </p:sp>
@@ -2369,38 +3623,37 @@
           <a:p>
             <a:pPr lvl="0"/>
             <a:r>
-              <a:rPr lang="en-US" smtClean="0"/>
+              <a:rPr lang="en-US"/>
               <a:t>Click to edit Master text styles</a:t>
             </a:r>
           </a:p>
           <a:p>
             <a:pPr lvl="1"/>
             <a:r>
-              <a:rPr lang="en-US" smtClean="0"/>
+              <a:rPr lang="en-US"/>
               <a:t>Second level</a:t>
             </a:r>
           </a:p>
           <a:p>
             <a:pPr lvl="2"/>
             <a:r>
-              <a:rPr lang="en-US" smtClean="0"/>
+              <a:rPr lang="en-US"/>
               <a:t>Third level</a:t>
             </a:r>
           </a:p>
           <a:p>
             <a:pPr lvl="3"/>
             <a:r>
-              <a:rPr lang="en-US" smtClean="0"/>
+              <a:rPr lang="en-US"/>
               <a:t>Fourth level</a:t>
             </a:r>
           </a:p>
           <a:p>
             <a:pPr lvl="4"/>
             <a:r>
-              <a:rPr lang="en-US" smtClean="0"/>
+              <a:rPr lang="en-US"/>
               <a:t>Fifth level</a:t>
             </a:r>
-            <a:endParaRPr lang="en-US"/>
           </a:p>
         </p:txBody>
       </p:sp>
@@ -2421,7 +3674,7 @@
           <a:p>
             <a:fld id="{5BCAD085-E8A6-8845-BD4E-CB4CCA059FC4}" type="datetimeFigureOut">
               <a:rPr lang="en-US" smtClean="0"/>
-              <a:t>1/27/13</a:t>
+              <a:t>7/13/26</a:t>
             </a:fld>
             <a:endParaRPr lang="en-US"/>
           </a:p>
@@ -2463,7 +3716,7 @@
           <a:p>
             <a:fld id="{C1FF6DA9-008F-8B48-92A6-B652298478BF}" type="slidenum">
               <a:rPr lang="en-US" smtClean="0"/>
-              <a:t>‹#›</a:t>
+              <a:t>‹Nr.›</a:t>
             </a:fld>
             <a:endParaRPr lang="en-US"/>
           </a:p>
@@ -2519,10 +3772,9 @@
           </a:lstStyle>
           <a:p>
             <a:r>
-              <a:rPr lang="en-US" smtClean="0"/>
+              <a:rPr lang="en-US"/>
               <a:t>Click to edit Master title style</a:t>
             </a:r>
-            <a:endParaRPr lang="en-US"/>
           </a:p>
         </p:txBody>
       </p:sp>
@@ -2585,7 +3837,7 @@
           <a:p>
             <a:pPr lvl="0"/>
             <a:r>
-              <a:rPr lang="en-US" smtClean="0"/>
+              <a:rPr lang="en-US"/>
               <a:t>Click to edit Master text styles</a:t>
             </a:r>
           </a:p>
@@ -2641,38 +3893,37 @@
           <a:p>
             <a:pPr lvl="0"/>
             <a:r>
-              <a:rPr lang="en-US" smtClean="0"/>
+              <a:rPr lang="en-US"/>
               <a:t>Click to edit Master text styles</a:t>
             </a:r>
           </a:p>
           <a:p>
             <a:pPr lvl="1"/>
             <a:r>
-              <a:rPr lang="en-US" smtClean="0"/>
+              <a:rPr lang="en-US"/>
               <a:t>Second level</a:t>
             </a:r>
           </a:p>
           <a:p>
             <a:pPr lvl="2"/>
             <a:r>
-              <a:rPr lang="en-US" smtClean="0"/>
+              <a:rPr lang="en-US"/>
               <a:t>Third level</a:t>
             </a:r>
           </a:p>
           <a:p>
             <a:pPr lvl="3"/>
             <a:r>
-              <a:rPr lang="en-US" smtClean="0"/>
+              <a:rPr lang="en-US"/>
               <a:t>Fourth level</a:t>
             </a:r>
           </a:p>
           <a:p>
             <a:pPr lvl="4"/>
             <a:r>
-              <a:rPr lang="en-US" smtClean="0"/>
+              <a:rPr lang="en-US"/>
               <a:t>Fifth level</a:t>
             </a:r>
-            <a:endParaRPr lang="en-US"/>
           </a:p>
         </p:txBody>
       </p:sp>
@@ -2735,7 +3986,7 @@
           <a:p>
             <a:pPr lvl="0"/>
             <a:r>
-              <a:rPr lang="en-US" smtClean="0"/>
+              <a:rPr lang="en-US"/>
               <a:t>Click to edit Master text styles</a:t>
             </a:r>
           </a:p>
@@ -2791,38 +4042,37 @@
           <a:p>
             <a:pPr lvl="0"/>
             <a:r>
-              <a:rPr lang="en-US" smtClean="0"/>
+              <a:rPr lang="en-US"/>
               <a:t>Click to edit Master text styles</a:t>
             </a:r>
           </a:p>
           <a:p>
             <a:pPr lvl="1"/>
             <a:r>
-              <a:rPr lang="en-US" smtClean="0"/>
+              <a:rPr lang="en-US"/>
               <a:t>Second level</a:t>
             </a:r>
           </a:p>
           <a:p>
             <a:pPr lvl="2"/>
             <a:r>
-              <a:rPr lang="en-US" smtClean="0"/>
+              <a:rPr lang="en-US"/>
               <a:t>Third level</a:t>
             </a:r>
           </a:p>
           <a:p>
             <a:pPr lvl="3"/>
             <a:r>
-              <a:rPr lang="en-US" smtClean="0"/>
+              <a:rPr lang="en-US"/>
               <a:t>Fourth level</a:t>
             </a:r>
           </a:p>
           <a:p>
             <a:pPr lvl="4"/>
             <a:r>
-              <a:rPr lang="en-US" smtClean="0"/>
+              <a:rPr lang="en-US"/>
               <a:t>Fifth level</a:t>
             </a:r>
-            <a:endParaRPr lang="en-US"/>
           </a:p>
         </p:txBody>
       </p:sp>
@@ -2843,7 +4093,7 @@
           <a:p>
             <a:fld id="{5BCAD085-E8A6-8845-BD4E-CB4CCA059FC4}" type="datetimeFigureOut">
               <a:rPr lang="en-US" smtClean="0"/>
-              <a:t>1/27/13</a:t>
+              <a:t>7/13/26</a:t>
             </a:fld>
             <a:endParaRPr lang="en-US"/>
           </a:p>
@@ -2885,7 +4135,7 @@
           <a:p>
             <a:fld id="{C1FF6DA9-008F-8B48-92A6-B652298478BF}" type="slidenum">
               <a:rPr lang="en-US" smtClean="0"/>
-              <a:t>‹#›</a:t>
+              <a:t>‹Nr.›</a:t>
             </a:fld>
             <a:endParaRPr lang="en-US"/>
           </a:p>
@@ -2937,10 +4187,9 @@
           <a:lstStyle/>
           <a:p>
             <a:r>
-              <a:rPr lang="en-US" smtClean="0"/>
+              <a:rPr lang="en-US"/>
               <a:t>Click to edit Master title style</a:t>
             </a:r>
-            <a:endParaRPr lang="en-US"/>
           </a:p>
         </p:txBody>
       </p:sp>
@@ -2961,7 +4210,7 @@
           <a:p>
             <a:fld id="{5BCAD085-E8A6-8845-BD4E-CB4CCA059FC4}" type="datetimeFigureOut">
               <a:rPr lang="en-US" smtClean="0"/>
-              <a:t>1/27/13</a:t>
+              <a:t>7/13/26</a:t>
             </a:fld>
             <a:endParaRPr lang="en-US"/>
           </a:p>
@@ -3003,7 +4252,7 @@
           <a:p>
             <a:fld id="{C1FF6DA9-008F-8B48-92A6-B652298478BF}" type="slidenum">
               <a:rPr lang="en-US" smtClean="0"/>
-              <a:t>‹#›</a:t>
+              <a:t>‹Nr.›</a:t>
             </a:fld>
             <a:endParaRPr lang="en-US"/>
           </a:p>
@@ -3056,7 +4305,7 @@
           <a:p>
             <a:fld id="{5BCAD085-E8A6-8845-BD4E-CB4CCA059FC4}" type="datetimeFigureOut">
               <a:rPr lang="en-US" smtClean="0"/>
-              <a:t>1/27/13</a:t>
+              <a:t>7/13/26</a:t>
             </a:fld>
             <a:endParaRPr lang="en-US"/>
           </a:p>
@@ -3098,7 +4347,7 @@
           <a:p>
             <a:fld id="{C1FF6DA9-008F-8B48-92A6-B652298478BF}" type="slidenum">
               <a:rPr lang="en-US" smtClean="0"/>
-              <a:t>‹#›</a:t>
+              <a:t>‹Nr.›</a:t>
             </a:fld>
             <a:endParaRPr lang="en-US"/>
           </a:p>
@@ -3159,10 +4408,9 @@
           </a:lstStyle>
           <a:p>
             <a:r>
-              <a:rPr lang="en-US" smtClean="0"/>
+              <a:rPr lang="en-US"/>
               <a:t>Click to edit Master title style</a:t>
             </a:r>
-            <a:endParaRPr lang="en-US"/>
           </a:p>
         </p:txBody>
       </p:sp>
@@ -3216,38 +4464,37 @@
           <a:p>
             <a:pPr lvl="0"/>
             <a:r>
-              <a:rPr lang="en-US" smtClean="0"/>
+              <a:rPr lang="en-US"/>
               <a:t>Click to edit Master text styles</a:t>
             </a:r>
           </a:p>
           <a:p>
             <a:pPr lvl="1"/>
             <a:r>
-              <a:rPr lang="en-US" smtClean="0"/>
+              <a:rPr lang="en-US"/>
               <a:t>Second level</a:t>
             </a:r>
           </a:p>
           <a:p>
             <a:pPr lvl="2"/>
             <a:r>
-              <a:rPr lang="en-US" smtClean="0"/>
+              <a:rPr lang="en-US"/>
               <a:t>Third level</a:t>
             </a:r>
           </a:p>
           <a:p>
             <a:pPr lvl="3"/>
             <a:r>
-              <a:rPr lang="en-US" smtClean="0"/>
+              <a:rPr lang="en-US"/>
               <a:t>Fourth level</a:t>
             </a:r>
           </a:p>
           <a:p>
             <a:pPr lvl="4"/>
             <a:r>
-              <a:rPr lang="en-US" smtClean="0"/>
+              <a:rPr lang="en-US"/>
               <a:t>Fifth level</a:t>
             </a:r>
-            <a:endParaRPr lang="en-US"/>
           </a:p>
         </p:txBody>
       </p:sp>
@@ -3310,7 +4557,7 @@
           <a:p>
             <a:pPr lvl="0"/>
             <a:r>
-              <a:rPr lang="en-US" smtClean="0"/>
+              <a:rPr lang="en-US"/>
               <a:t>Click to edit Master text styles</a:t>
             </a:r>
           </a:p>
@@ -3333,7 +4580,7 @@
           <a:p>
             <a:fld id="{5BCAD085-E8A6-8845-BD4E-CB4CCA059FC4}" type="datetimeFigureOut">
               <a:rPr lang="en-US" smtClean="0"/>
-              <a:t>1/27/13</a:t>
+              <a:t>7/13/26</a:t>
             </a:fld>
             <a:endParaRPr lang="en-US"/>
           </a:p>
@@ -3375,7 +4622,7 @@
           <a:p>
             <a:fld id="{C1FF6DA9-008F-8B48-92A6-B652298478BF}" type="slidenum">
               <a:rPr lang="en-US" smtClean="0"/>
-              <a:t>‹#›</a:t>
+              <a:t>‹Nr.›</a:t>
             </a:fld>
             <a:endParaRPr lang="en-US"/>
           </a:p>
@@ -3436,10 +4683,9 @@
           </a:lstStyle>
           <a:p>
             <a:r>
-              <a:rPr lang="en-US" smtClean="0"/>
+              <a:rPr lang="en-US"/>
               <a:t>Click to edit Master title style</a:t>
             </a:r>
-            <a:endParaRPr lang="en-US"/>
           </a:p>
         </p:txBody>
       </p:sp>
@@ -3563,7 +4809,7 @@
           <a:p>
             <a:pPr lvl="0"/>
             <a:r>
-              <a:rPr lang="en-US" smtClean="0"/>
+              <a:rPr lang="en-US"/>
               <a:t>Click to edit Master text styles</a:t>
             </a:r>
           </a:p>
@@ -3586,7 +4832,7 @@
           <a:p>
             <a:fld id="{5BCAD085-E8A6-8845-BD4E-CB4CCA059FC4}" type="datetimeFigureOut">
               <a:rPr lang="en-US" smtClean="0"/>
-              <a:t>1/27/13</a:t>
+              <a:t>7/13/26</a:t>
             </a:fld>
             <a:endParaRPr lang="en-US"/>
           </a:p>
@@ -3628,7 +4874,7 @@
           <a:p>
             <a:fld id="{C1FF6DA9-008F-8B48-92A6-B652298478BF}" type="slidenum">
               <a:rPr lang="en-US" smtClean="0"/>
-              <a:t>‹#›</a:t>
+              <a:t>‹Nr.›</a:t>
             </a:fld>
             <a:endParaRPr lang="en-US"/>
           </a:p>
@@ -3695,10 +4941,9 @@
           <a:lstStyle/>
           <a:p>
             <a:r>
-              <a:rPr lang="en-US" smtClean="0"/>
+              <a:rPr lang="en-US"/>
               <a:t>Click to edit Master title style</a:t>
             </a:r>
-            <a:endParaRPr lang="en-US"/>
           </a:p>
         </p:txBody>
       </p:sp>
@@ -3729,38 +4974,37 @@
           <a:p>
             <a:pPr lvl="0"/>
             <a:r>
-              <a:rPr lang="en-US" smtClean="0"/>
+              <a:rPr lang="en-US"/>
               <a:t>Click to edit Master text styles</a:t>
             </a:r>
           </a:p>
           <a:p>
             <a:pPr lvl="1"/>
             <a:r>
-              <a:rPr lang="en-US" smtClean="0"/>
+              <a:rPr lang="en-US"/>
               <a:t>Second level</a:t>
             </a:r>
           </a:p>
           <a:p>
             <a:pPr lvl="2"/>
             <a:r>
-              <a:rPr lang="en-US" smtClean="0"/>
+              <a:rPr lang="en-US"/>
               <a:t>Third level</a:t>
             </a:r>
           </a:p>
           <a:p>
             <a:pPr lvl="3"/>
             <a:r>
-              <a:rPr lang="en-US" smtClean="0"/>
+              <a:rPr lang="en-US"/>
               <a:t>Fourth level</a:t>
             </a:r>
           </a:p>
           <a:p>
             <a:pPr lvl="4"/>
             <a:r>
-              <a:rPr lang="en-US" smtClean="0"/>
+              <a:rPr lang="en-US"/>
               <a:t>Fifth level</a:t>
             </a:r>
-            <a:endParaRPr lang="en-US"/>
           </a:p>
         </p:txBody>
       </p:sp>
@@ -3799,7 +5043,7 @@
           <a:p>
             <a:fld id="{5BCAD085-E8A6-8845-BD4E-CB4CCA059FC4}" type="datetimeFigureOut">
               <a:rPr lang="en-US" smtClean="0"/>
-              <a:t>1/27/13</a:t>
+              <a:t>7/13/26</a:t>
             </a:fld>
             <a:endParaRPr lang="en-US"/>
           </a:p>
@@ -3877,7 +5121,7 @@
           <a:p>
             <a:fld id="{C1FF6DA9-008F-8B48-92A6-B652298478BF}" type="slidenum">
               <a:rPr lang="en-US" smtClean="0"/>
-              <a:t>‹#›</a:t>
+              <a:t>‹Nr.›</a:t>
             </a:fld>
             <a:endParaRPr lang="en-US"/>
           </a:p>
@@ -4158,7 +5402,7 @@
 </file>
 
 <file path=ppt/slides/slide1.xml><?xml version="1.0" encoding="utf-8"?>
-<p:sld xmlns:a="http://schemas.openxmlformats.org/drawingml/2006/main" xmlns:p="http://schemas.openxmlformats.org/presentationml/2006/main" xmlns:r="http://schemas.openxmlformats.org/officeDocument/2006/relationships">
+<p:sld xmlns:a="http://schemas.openxmlformats.org/drawingml/2006/main" xmlns:r="http://schemas.openxmlformats.org/officeDocument/2006/relationships" xmlns:p="http://schemas.openxmlformats.org/presentationml/2006/main">
   <p:cSld>
     <p:bg>
       <p:bgPr>
@@ -4174,7 +5418,14 @@
         <p:cNvGrpSpPr/>
         <p:nvPr/>
       </p:nvGrpSpPr>
-      <p:grpSpPr/>
+      <p:grpSpPr>
+        <a:xfrm>
+          <a:off x="0" y="0"/>
+          <a:ext cx="0" cy="0"/>
+          <a:chOff x="0" y="0"/>
+          <a:chExt cx="0" cy="0"/>
+        </a:xfrm>
+      </p:grpSpPr>
       <p:sp>
         <p:nvSpPr>
           <p:cNvPr id="2" name="Rectangle 1"/>
@@ -4216,6 +5467,7 @@
           <a:lstStyle/>
           <a:p>
             <a:pPr algn="ctr"/>
+            <a:endParaRPr/>
           </a:p>
         </p:txBody>
       </p:sp>
@@ -4236,7 +5488,7 @@
           <a:noFill/>
         </p:spPr>
         <p:txBody>
-          <a:bodyPr wrap="square" anchor="t" lIns="0" rIns="0" tIns="0" bIns="0">
+          <a:bodyPr wrap="square" lIns="0" tIns="0" rIns="0" bIns="0" anchor="t">
             <a:spAutoFit/>
           </a:bodyPr>
           <a:lstStyle/>
@@ -4308,7 +5560,7 @@
         <p:spPr>
           <a:xfrm>
             <a:off x="822960" y="5074920"/>
-            <a:ext cx="10515600" cy="1097280"/>
+            <a:ext cx="10515600" cy="471924"/>
           </a:xfrm>
           <a:prstGeom prst="rect">
             <a:avLst/>
@@ -4316,7 +5568,7 @@
           <a:noFill/>
         </p:spPr>
         <p:txBody>
-          <a:bodyPr wrap="square" anchor="t" lIns="0" rIns="0" tIns="0" bIns="0">
+          <a:bodyPr wrap="square" lIns="0" tIns="0" rIns="0" bIns="0" anchor="t">
             <a:spAutoFit/>
           </a:bodyPr>
           <a:lstStyle/>
@@ -4330,14 +5582,29 @@
               </a:spcAft>
             </a:pPr>
             <a:r>
-              <a:rPr sz="1600" b="1" i="0">
+              <a:rPr sz="1600" b="1" i="0" dirty="0">
                 <a:solidFill>
                   <a:srgbClr val="1A2332"/>
                 </a:solidFill>
                 <a:latin typeface="Arial"/>
               </a:rPr>
-              <a:t>Jannik Oeschger  ·  [Teammitglied]</a:t>
-            </a:r>
+              <a:t>Jannik Oeschger  ·  </a:t>
+            </a:r>
+            <a:r>
+              <a:rPr lang="de-DE" sz="1600" b="1" dirty="0">
+                <a:solidFill>
+                  <a:srgbClr val="1A2332"/>
+                </a:solidFill>
+                <a:latin typeface="Arial"/>
+              </a:rPr>
+              <a:t>Arvid Haase</a:t>
+            </a:r>
+            <a:endParaRPr sz="1600" b="1" i="0" dirty="0">
+              <a:solidFill>
+                <a:srgbClr val="1A2332"/>
+              </a:solidFill>
+              <a:latin typeface="Arial"/>
+            </a:endParaRPr>
           </a:p>
           <a:p>
             <a:pPr algn="l">
@@ -4349,13 +5616,31 @@
               </a:spcAft>
             </a:pPr>
             <a:r>
-              <a:rPr sz="1300" b="0" i="0">
+              <a:rPr sz="1300" b="0" i="0" dirty="0">
                 <a:solidFill>
                   <a:srgbClr val="6C7A89"/>
                 </a:solidFill>
                 <a:latin typeface="Arial"/>
               </a:rPr>
-              <a:t>DHBW  ·  MATLAB-Projekt „Thema 2“  ·  Sommersemester 2026</a:t>
+              <a:t>DHBW  ·  MATLAB   ·  </a:t>
+            </a:r>
+            <a:r>
+              <a:rPr sz="1300" b="0" i="0" dirty="0" err="1">
+                <a:solidFill>
+                  <a:srgbClr val="6C7A89"/>
+                </a:solidFill>
+                <a:latin typeface="Arial"/>
+              </a:rPr>
+              <a:t>Sommersemester</a:t>
+            </a:r>
+            <a:r>
+              <a:rPr sz="1300" b="0" i="0" dirty="0">
+                <a:solidFill>
+                  <a:srgbClr val="6C7A89"/>
+                </a:solidFill>
+                <a:latin typeface="Arial"/>
+              </a:rPr>
+              <a:t> 2026</a:t>
             </a:r>
           </a:p>
         </p:txBody>
@@ -8329,7 +9614,7 @@
 </file>
 
 <file path=ppt/slides/slide2.xml><?xml version="1.0" encoding="utf-8"?>
-<p:sld xmlns:a="http://schemas.openxmlformats.org/drawingml/2006/main" xmlns:p="http://schemas.openxmlformats.org/presentationml/2006/main" xmlns:r="http://schemas.openxmlformats.org/officeDocument/2006/relationships">
+<p:sld xmlns:a="http://schemas.openxmlformats.org/drawingml/2006/main" xmlns:r="http://schemas.openxmlformats.org/officeDocument/2006/relationships" xmlns:p="http://schemas.openxmlformats.org/presentationml/2006/main">
   <p:cSld>
     <p:bg>
       <p:bgPr>
@@ -8345,7 +9630,14 @@
         <p:cNvGrpSpPr/>
         <p:nvPr/>
       </p:nvGrpSpPr>
-      <p:grpSpPr/>
+      <p:grpSpPr>
+        <a:xfrm>
+          <a:off x="0" y="0"/>
+          <a:ext cx="0" cy="0"/>
+          <a:chOff x="0" y="0"/>
+          <a:chExt cx="0" cy="0"/>
+        </a:xfrm>
+      </p:grpSpPr>
       <p:sp>
         <p:nvSpPr>
           <p:cNvPr id="2" name="TextBox 1"/>
@@ -8363,7 +9655,7 @@
           <a:noFill/>
         </p:spPr>
         <p:txBody>
-          <a:bodyPr wrap="square" anchor="t" lIns="0" rIns="0" tIns="0" bIns="0">
+          <a:bodyPr wrap="square" lIns="0" tIns="0" rIns="0" bIns="0" anchor="t">
             <a:spAutoFit/>
           </a:bodyPr>
           <a:lstStyle/>
@@ -8429,6 +9721,7 @@
           <a:lstStyle/>
           <a:p>
             <a:pPr algn="ctr"/>
+            <a:endParaRPr/>
           </a:p>
         </p:txBody>
       </p:sp>
@@ -8441,7 +9734,7 @@
         <p:spPr>
           <a:xfrm>
             <a:off x="822960" y="1920240"/>
-            <a:ext cx="10607040" cy="3840480"/>
+            <a:ext cx="10607040" cy="2569934"/>
           </a:xfrm>
           <a:prstGeom prst="rect">
             <a:avLst/>
@@ -8449,7 +9742,7 @@
           <a:noFill/>
         </p:spPr>
         <p:txBody>
-          <a:bodyPr wrap="square" anchor="t" lIns="0" rIns="0" tIns="0" bIns="0">
+          <a:bodyPr wrap="square" lIns="0" tIns="0" rIns="0" bIns="0" anchor="t">
             <a:spAutoFit/>
           </a:bodyPr>
           <a:lstStyle/>
@@ -8463,13 +9756,238 @@
               </a:spcAft>
             </a:pPr>
             <a:r>
-              <a:rPr sz="2100" b="0" i="0">
+              <a:rPr sz="2100" b="0" i="0" dirty="0">
                 <a:solidFill>
                   <a:srgbClr val="1A2332"/>
                 </a:solidFill>
                 <a:latin typeface="Arial"/>
               </a:rPr>
-              <a:t>Das Herz schlägt nie exakt gleichmäßig – in den kleinen Schwankungen der Schlagabstände stecken Rhythmen (Atmung, Blutdruck­regelung).</a:t>
+              <a:t>Das Herz </a:t>
+            </a:r>
+            <a:r>
+              <a:rPr sz="2100" b="0" i="0" dirty="0" err="1">
+                <a:solidFill>
+                  <a:srgbClr val="1A2332"/>
+                </a:solidFill>
+                <a:latin typeface="Arial"/>
+              </a:rPr>
+              <a:t>schlägt</a:t>
+            </a:r>
+            <a:r>
+              <a:rPr sz="2100" b="0" i="0" dirty="0">
+                <a:solidFill>
+                  <a:srgbClr val="1A2332"/>
+                </a:solidFill>
+                <a:latin typeface="Arial"/>
+              </a:rPr>
+              <a:t> </a:t>
+            </a:r>
+            <a:r>
+              <a:rPr sz="2100" b="0" i="0" dirty="0" err="1">
+                <a:solidFill>
+                  <a:srgbClr val="1A2332"/>
+                </a:solidFill>
+                <a:latin typeface="Arial"/>
+              </a:rPr>
+              <a:t>nie</a:t>
+            </a:r>
+            <a:r>
+              <a:rPr sz="2100" b="0" i="0" dirty="0">
+                <a:solidFill>
+                  <a:srgbClr val="1A2332"/>
+                </a:solidFill>
+                <a:latin typeface="Arial"/>
+              </a:rPr>
+              <a:t> </a:t>
+            </a:r>
+            <a:r>
+              <a:rPr sz="2100" b="0" i="0" dirty="0" err="1">
+                <a:solidFill>
+                  <a:srgbClr val="1A2332"/>
+                </a:solidFill>
+                <a:latin typeface="Arial"/>
+              </a:rPr>
+              <a:t>exakt</a:t>
+            </a:r>
+            <a:r>
+              <a:rPr sz="2100" b="0" i="0" dirty="0">
+                <a:solidFill>
+                  <a:srgbClr val="1A2332"/>
+                </a:solidFill>
+                <a:latin typeface="Arial"/>
+              </a:rPr>
+              <a:t> </a:t>
+            </a:r>
+            <a:r>
+              <a:rPr sz="2100" b="0" i="0" dirty="0" err="1">
+                <a:solidFill>
+                  <a:srgbClr val="1A2332"/>
+                </a:solidFill>
+                <a:latin typeface="Arial"/>
+              </a:rPr>
+              <a:t>gleichmäßig</a:t>
+            </a:r>
+            <a:r>
+              <a:rPr lang="de-DE" sz="2100" b="0" i="0" dirty="0">
+                <a:solidFill>
+                  <a:srgbClr val="1A2332"/>
+                </a:solidFill>
+                <a:latin typeface="Arial"/>
+              </a:rPr>
+              <a:t>.</a:t>
+            </a:r>
+            <a:r>
+              <a:rPr sz="2100" b="0" i="0" dirty="0">
+                <a:solidFill>
+                  <a:srgbClr val="1A2332"/>
+                </a:solidFill>
+                <a:latin typeface="Arial"/>
+              </a:rPr>
+              <a:t> </a:t>
+            </a:r>
+            <a:r>
+              <a:rPr lang="de-DE" sz="2100" dirty="0">
+                <a:solidFill>
+                  <a:srgbClr val="1A2332"/>
+                </a:solidFill>
+                <a:latin typeface="Arial"/>
+              </a:rPr>
+              <a:t>I</a:t>
+            </a:r>
+            <a:r>
+              <a:rPr sz="2100" b="0" i="0" dirty="0">
+                <a:solidFill>
+                  <a:srgbClr val="1A2332"/>
+                </a:solidFill>
+                <a:latin typeface="Arial"/>
+              </a:rPr>
+              <a:t>n den </a:t>
+            </a:r>
+            <a:r>
+              <a:rPr sz="2100" b="0" i="0" dirty="0" err="1">
+                <a:solidFill>
+                  <a:srgbClr val="1A2332"/>
+                </a:solidFill>
+                <a:latin typeface="Arial"/>
+              </a:rPr>
+              <a:t>kleinen</a:t>
+            </a:r>
+            <a:r>
+              <a:rPr sz="2100" b="0" i="0" dirty="0">
+                <a:solidFill>
+                  <a:srgbClr val="1A2332"/>
+                </a:solidFill>
+                <a:latin typeface="Arial"/>
+              </a:rPr>
+              <a:t> </a:t>
+            </a:r>
+            <a:r>
+              <a:rPr sz="2100" b="0" i="0" dirty="0" err="1">
+                <a:solidFill>
+                  <a:srgbClr val="1A2332"/>
+                </a:solidFill>
+                <a:latin typeface="Arial"/>
+              </a:rPr>
+              <a:t>Schwankungen</a:t>
+            </a:r>
+            <a:r>
+              <a:rPr sz="2100" b="0" i="0" dirty="0">
+                <a:solidFill>
+                  <a:srgbClr val="1A2332"/>
+                </a:solidFill>
+                <a:latin typeface="Arial"/>
+              </a:rPr>
+              <a:t> der </a:t>
+            </a:r>
+            <a:r>
+              <a:rPr sz="2100" b="0" i="0" dirty="0" err="1">
+                <a:solidFill>
+                  <a:srgbClr val="1A2332"/>
+                </a:solidFill>
+                <a:latin typeface="Arial"/>
+              </a:rPr>
+              <a:t>Schlagabstände</a:t>
+            </a:r>
+            <a:r>
+              <a:rPr sz="2100" b="0" i="0" dirty="0">
+                <a:solidFill>
+                  <a:srgbClr val="1A2332"/>
+                </a:solidFill>
+                <a:latin typeface="Arial"/>
+              </a:rPr>
+              <a:t> </a:t>
+            </a:r>
+            <a:r>
+              <a:rPr sz="2100" b="0" i="0" dirty="0" err="1">
+                <a:solidFill>
+                  <a:srgbClr val="1A2332"/>
+                </a:solidFill>
+                <a:latin typeface="Arial"/>
+              </a:rPr>
+              <a:t>stecken</a:t>
+            </a:r>
+            <a:r>
+              <a:rPr sz="2100" b="0" i="0" dirty="0">
+                <a:solidFill>
+                  <a:srgbClr val="1A2332"/>
+                </a:solidFill>
+                <a:latin typeface="Arial"/>
+              </a:rPr>
+              <a:t> </a:t>
+            </a:r>
+            <a:r>
+              <a:rPr sz="2100" b="0" i="0" dirty="0" err="1">
+                <a:solidFill>
+                  <a:srgbClr val="1A2332"/>
+                </a:solidFill>
+                <a:latin typeface="Arial"/>
+              </a:rPr>
+              <a:t>Rhythmen</a:t>
+            </a:r>
+            <a:r>
+              <a:rPr sz="2100" b="0" i="0" dirty="0">
+                <a:solidFill>
+                  <a:srgbClr val="1A2332"/>
+                </a:solidFill>
+                <a:latin typeface="Arial"/>
+              </a:rPr>
+              <a:t> (</a:t>
+            </a:r>
+            <a:r>
+              <a:rPr sz="2100" b="0" i="0" dirty="0" err="1">
+                <a:solidFill>
+                  <a:srgbClr val="1A2332"/>
+                </a:solidFill>
+                <a:latin typeface="Arial"/>
+              </a:rPr>
+              <a:t>Atmung</a:t>
+            </a:r>
+            <a:r>
+              <a:rPr sz="2100" b="0" i="0" dirty="0">
+                <a:solidFill>
+                  <a:srgbClr val="1A2332"/>
+                </a:solidFill>
+                <a:latin typeface="Arial"/>
+              </a:rPr>
+              <a:t>, </a:t>
+            </a:r>
+            <a:r>
+              <a:rPr sz="2100" b="0" i="0" dirty="0" err="1">
+                <a:solidFill>
+                  <a:srgbClr val="1A2332"/>
+                </a:solidFill>
+                <a:latin typeface="Arial"/>
+              </a:rPr>
+              <a:t>Blutdruck­regelung</a:t>
+            </a:r>
+            <a:r>
+              <a:rPr sz="2100" b="0" i="0" dirty="0">
+                <a:solidFill>
+                  <a:srgbClr val="1A2332"/>
+                </a:solidFill>
+                <a:latin typeface="Arial"/>
+              </a:rPr>
+              <a:t>).</a:t>
             </a:r>
           </a:p>
           <a:p>
@@ -8482,13 +10000,256 @@
               </a:spcAft>
             </a:pPr>
             <a:r>
-              <a:rPr sz="2100" b="0" i="0">
+              <a:rPr sz="2100" b="0" i="0" dirty="0">
                 <a:solidFill>
                   <a:srgbClr val="1A2332"/>
                 </a:solidFill>
                 <a:latin typeface="Arial"/>
               </a:rPr>
-              <a:t>Die FFT macht diese Rhythmen als Frequenzen sichtbar – aber ein endlicher Signalausschnitt erzeugt „Spectral Leakage“, das die Werte verfälscht.</a:t>
+              <a:t>Die FFT </a:t>
+            </a:r>
+            <a:r>
+              <a:rPr sz="2100" b="0" i="0" dirty="0" err="1">
+                <a:solidFill>
+                  <a:srgbClr val="1A2332"/>
+                </a:solidFill>
+                <a:latin typeface="Arial"/>
+              </a:rPr>
+              <a:t>macht</a:t>
+            </a:r>
+            <a:r>
+              <a:rPr sz="2100" b="0" i="0" dirty="0">
+                <a:solidFill>
+                  <a:srgbClr val="1A2332"/>
+                </a:solidFill>
+                <a:latin typeface="Arial"/>
+              </a:rPr>
+              <a:t> </a:t>
+            </a:r>
+            <a:r>
+              <a:rPr sz="2100" b="0" i="0" dirty="0" err="1">
+                <a:solidFill>
+                  <a:srgbClr val="1A2332"/>
+                </a:solidFill>
+                <a:latin typeface="Arial"/>
+              </a:rPr>
+              <a:t>diese</a:t>
+            </a:r>
+            <a:r>
+              <a:rPr sz="2100" b="0" i="0" dirty="0">
+                <a:solidFill>
+                  <a:srgbClr val="1A2332"/>
+                </a:solidFill>
+                <a:latin typeface="Arial"/>
+              </a:rPr>
+              <a:t> </a:t>
+            </a:r>
+            <a:r>
+              <a:rPr sz="2100" b="0" i="0" dirty="0" err="1">
+                <a:solidFill>
+                  <a:srgbClr val="1A2332"/>
+                </a:solidFill>
+                <a:latin typeface="Arial"/>
+              </a:rPr>
+              <a:t>Rhythmen</a:t>
+            </a:r>
+            <a:r>
+              <a:rPr sz="2100" b="0" i="0" dirty="0">
+                <a:solidFill>
+                  <a:srgbClr val="1A2332"/>
+                </a:solidFill>
+                <a:latin typeface="Arial"/>
+              </a:rPr>
+              <a:t> </a:t>
+            </a:r>
+            <a:r>
+              <a:rPr sz="2100" b="0" i="0" dirty="0" err="1">
+                <a:solidFill>
+                  <a:srgbClr val="1A2332"/>
+                </a:solidFill>
+                <a:latin typeface="Arial"/>
+              </a:rPr>
+              <a:t>als</a:t>
+            </a:r>
+            <a:r>
+              <a:rPr sz="2100" b="0" i="0" dirty="0">
+                <a:solidFill>
+                  <a:srgbClr val="1A2332"/>
+                </a:solidFill>
+                <a:latin typeface="Arial"/>
+              </a:rPr>
+              <a:t> </a:t>
+            </a:r>
+            <a:r>
+              <a:rPr sz="2100" b="0" i="0" dirty="0" err="1">
+                <a:solidFill>
+                  <a:srgbClr val="1A2332"/>
+                </a:solidFill>
+                <a:latin typeface="Arial"/>
+              </a:rPr>
+              <a:t>Frequenzen</a:t>
+            </a:r>
+            <a:r>
+              <a:rPr sz="2100" b="0" i="0" dirty="0">
+                <a:solidFill>
+                  <a:srgbClr val="1A2332"/>
+                </a:solidFill>
+                <a:latin typeface="Arial"/>
+              </a:rPr>
+              <a:t> </a:t>
+            </a:r>
+            <a:r>
+              <a:rPr sz="2100" b="0" i="0" dirty="0" err="1">
+                <a:solidFill>
+                  <a:srgbClr val="1A2332"/>
+                </a:solidFill>
+                <a:latin typeface="Arial"/>
+              </a:rPr>
+              <a:t>sichtbar</a:t>
+            </a:r>
+            <a:r>
+              <a:rPr lang="de-DE" sz="2100" dirty="0">
+                <a:solidFill>
+                  <a:srgbClr val="1A2332"/>
+                </a:solidFill>
+                <a:latin typeface="Arial"/>
+              </a:rPr>
+              <a:t>,</a:t>
+            </a:r>
+            <a:r>
+              <a:rPr sz="2100" b="0" i="0" dirty="0">
+                <a:solidFill>
+                  <a:srgbClr val="1A2332"/>
+                </a:solidFill>
+                <a:latin typeface="Arial"/>
+              </a:rPr>
+              <a:t> </a:t>
+            </a:r>
+            <a:r>
+              <a:rPr sz="2100" b="0" i="0" dirty="0" err="1">
+                <a:solidFill>
+                  <a:srgbClr val="1A2332"/>
+                </a:solidFill>
+                <a:latin typeface="Arial"/>
+              </a:rPr>
+              <a:t>aber</a:t>
+            </a:r>
+            <a:r>
+              <a:rPr sz="2100" b="0" i="0" dirty="0">
+                <a:solidFill>
+                  <a:srgbClr val="1A2332"/>
+                </a:solidFill>
+                <a:latin typeface="Arial"/>
+              </a:rPr>
+              <a:t> </a:t>
+            </a:r>
+            <a:r>
+              <a:rPr sz="2100" b="0" i="0" dirty="0" err="1">
+                <a:solidFill>
+                  <a:srgbClr val="1A2332"/>
+                </a:solidFill>
+                <a:latin typeface="Arial"/>
+              </a:rPr>
+              <a:t>ein</a:t>
+            </a:r>
+            <a:r>
+              <a:rPr sz="2100" b="0" i="0" dirty="0">
+                <a:solidFill>
+                  <a:srgbClr val="1A2332"/>
+                </a:solidFill>
+                <a:latin typeface="Arial"/>
+              </a:rPr>
+              <a:t> </a:t>
+            </a:r>
+            <a:r>
+              <a:rPr sz="2100" b="0" i="0" dirty="0" err="1">
+                <a:solidFill>
+                  <a:srgbClr val="1A2332"/>
+                </a:solidFill>
+                <a:latin typeface="Arial"/>
+              </a:rPr>
+              <a:t>endlicher</a:t>
+            </a:r>
+            <a:r>
+              <a:rPr sz="2100" b="0" i="0" dirty="0">
+                <a:solidFill>
+                  <a:srgbClr val="1A2332"/>
+                </a:solidFill>
+                <a:latin typeface="Arial"/>
+              </a:rPr>
+              <a:t> </a:t>
+            </a:r>
+            <a:r>
+              <a:rPr sz="2100" b="0" i="0" dirty="0" err="1">
+                <a:solidFill>
+                  <a:srgbClr val="1A2332"/>
+                </a:solidFill>
+                <a:latin typeface="Arial"/>
+              </a:rPr>
+              <a:t>Signalausschnitt</a:t>
+            </a:r>
+            <a:r>
+              <a:rPr sz="2100" b="0" i="0" dirty="0">
+                <a:solidFill>
+                  <a:srgbClr val="1A2332"/>
+                </a:solidFill>
+                <a:latin typeface="Arial"/>
+              </a:rPr>
+              <a:t> </a:t>
+            </a:r>
+            <a:r>
+              <a:rPr sz="2100" b="0" i="0" dirty="0" err="1">
+                <a:solidFill>
+                  <a:srgbClr val="1A2332"/>
+                </a:solidFill>
+                <a:latin typeface="Arial"/>
+              </a:rPr>
+              <a:t>erzeugt</a:t>
+            </a:r>
+            <a:r>
+              <a:rPr sz="2100" b="0" i="0" dirty="0">
+                <a:solidFill>
+                  <a:srgbClr val="1A2332"/>
+                </a:solidFill>
+                <a:latin typeface="Arial"/>
+              </a:rPr>
+              <a:t> „Spectral Leakage“, das die </a:t>
+            </a:r>
+            <a:r>
+              <a:rPr sz="2100" b="0" i="0" dirty="0" err="1">
+                <a:solidFill>
+                  <a:srgbClr val="1A2332"/>
+                </a:solidFill>
+                <a:latin typeface="Arial"/>
+              </a:rPr>
+              <a:t>Werte</a:t>
+            </a:r>
+            <a:r>
+              <a:rPr sz="2100" b="0" i="0" dirty="0">
+                <a:solidFill>
+                  <a:srgbClr val="1A2332"/>
+                </a:solidFill>
+                <a:latin typeface="Arial"/>
+              </a:rPr>
+              <a:t> </a:t>
+            </a:r>
+            <a:r>
+              <a:rPr sz="2100" b="0" i="0" dirty="0" err="1">
+                <a:solidFill>
+                  <a:srgbClr val="1A2332"/>
+                </a:solidFill>
+                <a:latin typeface="Arial"/>
+              </a:rPr>
+              <a:t>verfälscht</a:t>
+            </a:r>
+            <a:r>
+              <a:rPr sz="2100" b="0" i="0" dirty="0">
+                <a:solidFill>
+                  <a:srgbClr val="1A2332"/>
+                </a:solidFill>
+                <a:latin typeface="Arial"/>
+              </a:rPr>
+              <a:t>.</a:t>
             </a:r>
           </a:p>
           <a:p>
@@ -8501,13 +10262,40 @@
               </a:spcAft>
             </a:pPr>
             <a:r>
-              <a:rPr sz="2100" b="0" i="0">
+              <a:rPr sz="2100" b="0" i="0" dirty="0" err="1">
                 <a:solidFill>
                   <a:srgbClr val="1A2332"/>
                 </a:solidFill>
                 <a:latin typeface="Arial"/>
               </a:rPr>
-              <a:t>Fensterfunktionen dämpfen dieses Leakage.</a:t>
+              <a:t>Fensterfunktionen</a:t>
+            </a:r>
+            <a:r>
+              <a:rPr sz="2100" b="0" i="0" dirty="0">
+                <a:solidFill>
+                  <a:srgbClr val="1A2332"/>
+                </a:solidFill>
+                <a:latin typeface="Arial"/>
+              </a:rPr>
+              <a:t> </a:t>
+            </a:r>
+            <a:r>
+              <a:rPr sz="2100" b="0" i="0" dirty="0" err="1">
+                <a:solidFill>
+                  <a:srgbClr val="1A2332"/>
+                </a:solidFill>
+                <a:latin typeface="Arial"/>
+              </a:rPr>
+              <a:t>dämpfen</a:t>
+            </a:r>
+            <a:r>
+              <a:rPr sz="2100" b="0" i="0" dirty="0">
+                <a:solidFill>
+                  <a:srgbClr val="1A2332"/>
+                </a:solidFill>
+                <a:latin typeface="Arial"/>
+              </a:rPr>
+              <a:t> dieses Leakage.</a:t>
             </a:r>
           </a:p>
           <a:p>
@@ -8520,13 +10308,85 @@
               </a:spcAft>
             </a:pPr>
             <a:r>
-              <a:rPr sz="2200" b="1" i="0">
+              <a:rPr sz="2200" b="1" i="0" dirty="0">
                 <a:solidFill>
                   <a:srgbClr val="D62828"/>
                 </a:solidFill>
                 <a:latin typeface="Arial"/>
               </a:rPr>
-              <a:t>→  Unsere Frage: Welches Fenster ist der beste Kompromiss?</a:t>
+              <a:t>→  </a:t>
+            </a:r>
+            <a:r>
+              <a:rPr lang="de-DE" sz="2200" b="1" i="0" dirty="0">
+                <a:solidFill>
+                  <a:srgbClr val="D62828"/>
+                </a:solidFill>
+                <a:latin typeface="Arial"/>
+              </a:rPr>
+              <a:t>Aufgabenstellung</a:t>
+            </a:r>
+            <a:r>
+              <a:rPr sz="2200" b="1" i="0" dirty="0">
+                <a:solidFill>
+                  <a:srgbClr val="D62828"/>
+                </a:solidFill>
+                <a:latin typeface="Arial"/>
+              </a:rPr>
+              <a:t>: Welches Fenster </a:t>
+            </a:r>
+            <a:r>
+              <a:rPr sz="2200" b="1" i="0" dirty="0" err="1">
+                <a:solidFill>
+                  <a:srgbClr val="D62828"/>
+                </a:solidFill>
+                <a:latin typeface="Arial"/>
+              </a:rPr>
+              <a:t>ist</a:t>
+            </a:r>
+            <a:r>
+              <a:rPr sz="2200" b="1" i="0" dirty="0">
+                <a:solidFill>
+                  <a:srgbClr val="D62828"/>
+                </a:solidFill>
+                <a:latin typeface="Arial"/>
+              </a:rPr>
+              <a:t> der </a:t>
+            </a:r>
+            <a:r>
+              <a:rPr sz="2200" b="1" i="0" dirty="0" err="1">
+                <a:solidFill>
+                  <a:srgbClr val="D62828"/>
+                </a:solidFill>
+                <a:latin typeface="Arial"/>
+              </a:rPr>
+              <a:t>beste</a:t>
+            </a:r>
+            <a:r>
+              <a:rPr sz="2200" b="1" i="0" dirty="0">
+                <a:solidFill>
+                  <a:srgbClr val="D62828"/>
+                </a:solidFill>
+                <a:latin typeface="Arial"/>
+              </a:rPr>
+              <a:t> </a:t>
+            </a:r>
+            <a:r>
+              <a:rPr sz="2200" b="1" i="0" dirty="0" err="1">
+                <a:solidFill>
+                  <a:srgbClr val="D62828"/>
+                </a:solidFill>
+                <a:latin typeface="Arial"/>
+              </a:rPr>
+              <a:t>Kompromiss</a:t>
+            </a:r>
+            <a:r>
+              <a:rPr sz="2200" b="1" i="0" dirty="0">
+                <a:solidFill>
+                  <a:srgbClr val="D62828"/>
+                </a:solidFill>
+                <a:latin typeface="Arial"/>
+              </a:rPr>
+              <a:t>?</a:t>
             </a:r>
           </a:p>
         </p:txBody>
@@ -8540,7 +10400,7 @@
 </file>
 
 <file path=ppt/slides/slide3.xml><?xml version="1.0" encoding="utf-8"?>
-<p:sld xmlns:a="http://schemas.openxmlformats.org/drawingml/2006/main" xmlns:p="http://schemas.openxmlformats.org/presentationml/2006/main" xmlns:r="http://schemas.openxmlformats.org/officeDocument/2006/relationships">
+<p:sld xmlns:a="http://schemas.openxmlformats.org/drawingml/2006/main" xmlns:r="http://schemas.openxmlformats.org/officeDocument/2006/relationships" xmlns:p="http://schemas.openxmlformats.org/presentationml/2006/main">
   <p:cSld>
     <p:bg>
       <p:bgPr>
@@ -8556,7 +10416,14 @@
         <p:cNvGrpSpPr/>
         <p:nvPr/>
       </p:nvGrpSpPr>
-      <p:grpSpPr/>
+      <p:grpSpPr>
+        <a:xfrm>
+          <a:off x="0" y="0"/>
+          <a:ext cx="0" cy="0"/>
+          <a:chOff x="0" y="0"/>
+          <a:chExt cx="0" cy="0"/>
+        </a:xfrm>
+      </p:grpSpPr>
       <p:sp>
         <p:nvSpPr>
           <p:cNvPr id="2" name="TextBox 1"/>
@@ -8574,7 +10441,7 @@
           <a:noFill/>
         </p:spPr>
         <p:txBody>
-          <a:bodyPr wrap="square" anchor="t" lIns="0" rIns="0" tIns="0" bIns="0">
+          <a:bodyPr wrap="square" lIns="0" tIns="0" rIns="0" bIns="0" anchor="t">
             <a:spAutoFit/>
           </a:bodyPr>
           <a:lstStyle/>
@@ -8640,48 +10507,7 @@
           <a:lstStyle/>
           <a:p>
             <a:pPr algn="ctr"/>
-          </a:p>
-        </p:txBody>
-      </p:sp>
-      <p:sp>
-        <p:nvSpPr>
-          <p:cNvPr id="4" name="TextBox 3"/>
-          <p:cNvSpPr txBox="1"/>
-          <p:nvPr/>
-        </p:nvSpPr>
-        <p:spPr>
-          <a:xfrm>
-            <a:off x="640080" y="1325880"/>
-            <a:ext cx="10972800" cy="548640"/>
-          </a:xfrm>
-          <a:prstGeom prst="rect">
-            <a:avLst/>
-          </a:prstGeom>
-          <a:noFill/>
-        </p:spPr>
-        <p:txBody>
-          <a:bodyPr wrap="square" anchor="t" lIns="0" rIns="0" tIns="0" bIns="0">
-            <a:spAutoFit/>
-          </a:bodyPr>
-          <a:lstStyle/>
-          <a:p>
-            <a:pPr algn="l">
-              <a:spcBef>
-                <a:spcPts val="0"/>
-              </a:spcBef>
-              <a:spcAft>
-                <a:spcPts val="600"/>
-              </a:spcAft>
-            </a:pPr>
-            <a:r>
-              <a:rPr sz="1500" b="0" i="0">
-                <a:solidFill>
-                  <a:srgbClr val="6C7A89"/>
-                </a:solidFill>
-                <a:latin typeface="Arial"/>
-              </a:rPr>
-              <a:t>modular umgesetzt in hrv_fft_analyse.m</a:t>
-            </a:r>
+            <a:endParaRPr/>
           </a:p>
         </p:txBody>
       </p:sp>
@@ -8724,7 +10550,7 @@
           </a:fontRef>
         </p:style>
         <p:txBody>
-          <a:bodyPr rtlCol="0" anchor="ctr" wrap="square" lIns="73152" rIns="73152" tIns="36576" bIns="36576"/>
+          <a:bodyPr wrap="square" lIns="73152" tIns="36576" rIns="73152" bIns="36576" rtlCol="0" anchor="ctr"/>
           <a:lstStyle/>
           <a:p>
             <a:pPr algn="ctr">
@@ -8736,14 +10562,32 @@
               </a:spcAft>
             </a:pPr>
             <a:r>
-              <a:rPr sz="1400" b="1" i="0">
+              <a:rPr sz="1400" b="1" i="0" dirty="0">
                 <a:solidFill>
                   <a:srgbClr val="1A2332"/>
                 </a:solidFill>
                 <a:latin typeface="Arial"/>
               </a:rPr>
               <a:t>1  EKG laden
-(EDF-Datei)</a:t>
+(EDF-</a:t>
+            </a:r>
+            <a:r>
+              <a:rPr sz="1400" b="1" i="0" dirty="0" err="1">
+                <a:solidFill>
+                  <a:srgbClr val="1A2332"/>
+                </a:solidFill>
+                <a:latin typeface="Arial"/>
+              </a:rPr>
+              <a:t>Datei</a:t>
+            </a:r>
+            <a:r>
+              <a:rPr sz="1400" b="1" i="0" dirty="0">
+                <a:solidFill>
+                  <a:srgbClr val="1A2332"/>
+                </a:solidFill>
+                <a:latin typeface="Arial"/>
+              </a:rPr>
+              <a:t>)</a:t>
             </a:r>
           </a:p>
         </p:txBody>
@@ -8787,7 +10631,7 @@
           </a:fontRef>
         </p:style>
         <p:txBody>
-          <a:bodyPr rtlCol="0" anchor="ctr" wrap="square" lIns="73152" rIns="73152" tIns="36576" bIns="36576"/>
+          <a:bodyPr wrap="square" lIns="73152" tIns="36576" rIns="73152" bIns="36576" rtlCol="0" anchor="ctr"/>
           <a:lstStyle/>
           <a:p>
             <a:pPr algn="ctr">
@@ -8850,7 +10694,7 @@
           </a:fontRef>
         </p:style>
         <p:txBody>
-          <a:bodyPr rtlCol="0" anchor="ctr" wrap="square" lIns="73152" rIns="73152" tIns="36576" bIns="36576"/>
+          <a:bodyPr wrap="square" lIns="73152" tIns="36576" rIns="73152" bIns="36576" rtlCol="0" anchor="ctr"/>
           <a:lstStyle/>
           <a:p>
             <a:pPr algn="ctr">
@@ -8913,7 +10757,7 @@
           </a:fontRef>
         </p:style>
         <p:txBody>
-          <a:bodyPr rtlCol="0" anchor="ctr" wrap="square" lIns="73152" rIns="73152" tIns="36576" bIns="36576"/>
+          <a:bodyPr wrap="square" lIns="73152" tIns="36576" rIns="73152" bIns="36576" rtlCol="0" anchor="ctr"/>
           <a:lstStyle/>
           <a:p>
             <a:pPr algn="ctr">
@@ -8976,7 +10820,7 @@
           </a:fontRef>
         </p:style>
         <p:txBody>
-          <a:bodyPr rtlCol="0" anchor="ctr" wrap="square" lIns="73152" rIns="73152" tIns="36576" bIns="36576"/>
+          <a:bodyPr wrap="square" lIns="73152" tIns="36576" rIns="73152" bIns="36576" rtlCol="0" anchor="ctr"/>
           <a:lstStyle/>
           <a:p>
             <a:pPr algn="ctr">
@@ -9039,7 +10883,7 @@
           </a:fontRef>
         </p:style>
         <p:txBody>
-          <a:bodyPr rtlCol="0" anchor="ctr" wrap="square" lIns="73152" rIns="73152" tIns="36576" bIns="36576"/>
+          <a:bodyPr wrap="square" lIns="73152" tIns="36576" rIns="73152" bIns="36576" rtlCol="0" anchor="ctr"/>
           <a:lstStyle/>
           <a:p>
             <a:pPr algn="ctr">
@@ -9051,15 +10895,48 @@
               </a:spcAft>
             </a:pPr>
             <a:r>
-              <a:rPr sz="1400" b="1" i="0">
+              <a:rPr sz="1400" b="1" i="0" dirty="0">
                 <a:solidFill>
                   <a:srgbClr val="1A2332"/>
                 </a:solidFill>
                 <a:latin typeface="Arial"/>
               </a:rPr>
-              <a:t>6  HRV-Bänder +
-Wasserfall</a:t>
-            </a:r>
+              <a:t>6  HRV-</a:t>
+            </a:r>
+            <a:r>
+              <a:rPr sz="1400" b="1" i="0" dirty="0" err="1">
+                <a:solidFill>
+                  <a:srgbClr val="1A2332"/>
+                </a:solidFill>
+                <a:latin typeface="Arial"/>
+              </a:rPr>
+              <a:t>Bänder</a:t>
+            </a:r>
+            <a:r>
+              <a:rPr sz="1400" b="1" i="0" dirty="0">
+                <a:solidFill>
+                  <a:srgbClr val="1A2332"/>
+                </a:solidFill>
+                <a:latin typeface="Arial"/>
+              </a:rPr>
+              <a:t> +
+</a:t>
+            </a:r>
+            <a:r>
+              <a:rPr sz="1400" b="1" i="0" dirty="0" err="1">
+                <a:solidFill>
+                  <a:srgbClr val="1A2332"/>
+                </a:solidFill>
+                <a:latin typeface="Arial"/>
+              </a:rPr>
+              <a:t>Wasserfall</a:t>
+            </a:r>
+            <a:endParaRPr sz="1400" b="1" i="0" dirty="0">
+              <a:solidFill>
+                <a:srgbClr val="1A2332"/>
+              </a:solidFill>
+              <a:latin typeface="Arial"/>
+            </a:endParaRPr>
           </a:p>
         </p:txBody>
       </p:sp>
@@ -9104,6 +10981,7 @@
           <a:lstStyle/>
           <a:p>
             <a:pPr algn="ctr"/>
+            <a:endParaRPr/>
           </a:p>
         </p:txBody>
       </p:sp>
@@ -9148,6 +11026,7 @@
           <a:lstStyle/>
           <a:p>
             <a:pPr algn="ctr"/>
+            <a:endParaRPr/>
           </a:p>
         </p:txBody>
       </p:sp>
@@ -9192,6 +11071,7 @@
           <a:lstStyle/>
           <a:p>
             <a:pPr algn="ctr"/>
+            <a:endParaRPr/>
           </a:p>
         </p:txBody>
       </p:sp>
@@ -9236,6 +11116,7 @@
           <a:lstStyle/>
           <a:p>
             <a:pPr algn="ctr"/>
+            <a:endParaRPr/>
           </a:p>
         </p:txBody>
       </p:sp>
@@ -9280,48 +11161,7 @@
           <a:lstStyle/>
           <a:p>
             <a:pPr algn="ctr"/>
-          </a:p>
-        </p:txBody>
-      </p:sp>
-      <p:sp>
-        <p:nvSpPr>
-          <p:cNvPr id="16" name="TextBox 15"/>
-          <p:cNvSpPr txBox="1"/>
-          <p:nvPr/>
-        </p:nvSpPr>
-        <p:spPr>
-          <a:xfrm>
-            <a:off x="566928" y="5806440"/>
-            <a:ext cx="10972800" cy="548640"/>
-          </a:xfrm>
-          <a:prstGeom prst="rect">
-            <a:avLst/>
-          </a:prstGeom>
-          <a:noFill/>
-        </p:spPr>
-        <p:txBody>
-          <a:bodyPr wrap="square" anchor="t" lIns="0" rIns="0" tIns="0" bIns="0">
-            <a:spAutoFit/>
-          </a:bodyPr>
-          <a:lstStyle/>
-          <a:p>
-            <a:pPr algn="l">
-              <a:spcBef>
-                <a:spcPts val="0"/>
-              </a:spcBef>
-              <a:spcAft>
-                <a:spcPts val="600"/>
-              </a:spcAft>
-            </a:pPr>
-            <a:r>
-              <a:rPr sz="1400" b="0" i="1">
-                <a:solidFill>
-                  <a:srgbClr val="6C7A89"/>
-                </a:solidFill>
-                <a:latin typeface="Arial"/>
-              </a:rPr>
-              <a:t>Kern der Untersuchung: derselbe Schritt 5 wird mit sechs verschiedenen Fensterfunktionen durchlaufen und verglichen.</a:t>
-            </a:r>
+            <a:endParaRPr/>
           </a:p>
         </p:txBody>
       </p:sp>
@@ -9334,7 +11174,7 @@
 </file>
 
 <file path=ppt/slides/slide4.xml><?xml version="1.0" encoding="utf-8"?>
-<p:sld xmlns:a="http://schemas.openxmlformats.org/drawingml/2006/main" xmlns:p="http://schemas.openxmlformats.org/presentationml/2006/main" xmlns:r="http://schemas.openxmlformats.org/officeDocument/2006/relationships">
+<p:sld xmlns:a="http://schemas.openxmlformats.org/drawingml/2006/main" xmlns:r="http://schemas.openxmlformats.org/officeDocument/2006/relationships" xmlns:p="http://schemas.openxmlformats.org/presentationml/2006/main">
   <p:cSld>
     <p:bg>
       <p:bgPr>
@@ -9350,7 +11190,14 @@
         <p:cNvGrpSpPr/>
         <p:nvPr/>
       </p:nvGrpSpPr>
-      <p:grpSpPr/>
+      <p:grpSpPr>
+        <a:xfrm>
+          <a:off x="0" y="0"/>
+          <a:ext cx="0" cy="0"/>
+          <a:chOff x="0" y="0"/>
+          <a:chExt cx="0" cy="0"/>
+        </a:xfrm>
+      </p:grpSpPr>
       <p:sp>
         <p:nvSpPr>
           <p:cNvPr id="2" name="TextBox 1"/>
@@ -9368,7 +11215,7 @@
           <a:noFill/>
         </p:spPr>
         <p:txBody>
-          <a:bodyPr wrap="square" anchor="t" lIns="0" rIns="0" tIns="0" bIns="0">
+          <a:bodyPr wrap="square" lIns="0" tIns="0" rIns="0" bIns="0" anchor="t">
             <a:spAutoFit/>
           </a:bodyPr>
           <a:lstStyle/>
@@ -9434,6 +11281,7 @@
           <a:lstStyle/>
           <a:p>
             <a:pPr algn="ctr"/>
+            <a:endParaRPr/>
           </a:p>
         </p:txBody>
       </p:sp>
@@ -9476,7 +11324,7 @@
           </a:fontRef>
         </p:style>
         <p:txBody>
-          <a:bodyPr rtlCol="0" anchor="ctr" wrap="square" lIns="73152" rIns="73152" tIns="36576" bIns="36576"/>
+          <a:bodyPr wrap="square" lIns="73152" tIns="36576" rIns="73152" bIns="36576" rtlCol="0" anchor="ctr"/>
           <a:lstStyle/>
           <a:p>
             <a:pPr algn="ctr">
@@ -9539,7 +11387,7 @@
           </a:fontRef>
         </p:style>
         <p:txBody>
-          <a:bodyPr rtlCol="0" anchor="ctr" wrap="square" lIns="73152" rIns="73152" tIns="36576" bIns="36576"/>
+          <a:bodyPr wrap="square" lIns="73152" tIns="36576" rIns="73152" bIns="36576" rtlCol="0" anchor="ctr"/>
           <a:lstStyle/>
           <a:p>
             <a:pPr algn="ctr">
@@ -9580,7 +11428,7 @@
           <a:noFill/>
         </p:spPr>
         <p:txBody>
-          <a:bodyPr wrap="square" anchor="ctr" lIns="0" rIns="0" tIns="0" bIns="0">
+          <a:bodyPr wrap="square" lIns="0" tIns="0" rIns="0" bIns="0" anchor="ctr">
             <a:spAutoFit/>
           </a:bodyPr>
           <a:lstStyle/>
@@ -9614,7 +11462,7 @@
         <p:spPr>
           <a:xfrm>
             <a:off x="822960" y="3977639"/>
-            <a:ext cx="10607040" cy="731520"/>
+            <a:ext cx="10607040" cy="615553"/>
           </a:xfrm>
           <a:prstGeom prst="rect">
             <a:avLst/>
@@ -9622,7 +11470,7 @@
           <a:noFill/>
         </p:spPr>
         <p:txBody>
-          <a:bodyPr wrap="square" anchor="t" lIns="0" rIns="0" tIns="0" bIns="0">
+          <a:bodyPr wrap="square" lIns="0" tIns="0" rIns="0" bIns="0" anchor="t">
             <a:spAutoFit/>
           </a:bodyPr>
           <a:lstStyle/>
@@ -9636,13 +11484,175 @@
               </a:spcAft>
             </a:pPr>
             <a:r>
-              <a:rPr sz="2000" b="1" i="0">
+              <a:rPr sz="2000" b="1" i="0" dirty="0" err="1">
                 <a:solidFill>
                   <a:srgbClr val="D62828"/>
                 </a:solidFill>
                 <a:latin typeface="Arial"/>
               </a:rPr>
-              <a:t>Beides gleichzeitig geht nicht – jedes Fenster wählt einen anderen Punkt auf dieser Waage.</a:t>
+              <a:t>Beides</a:t>
+            </a:r>
+            <a:r>
+              <a:rPr sz="2000" b="1" i="0" dirty="0">
+                <a:solidFill>
+                  <a:srgbClr val="D62828"/>
+                </a:solidFill>
+                <a:latin typeface="Arial"/>
+              </a:rPr>
+              <a:t> </a:t>
+            </a:r>
+            <a:r>
+              <a:rPr sz="2000" b="1" i="0" dirty="0" err="1">
+                <a:solidFill>
+                  <a:srgbClr val="D62828"/>
+                </a:solidFill>
+                <a:latin typeface="Arial"/>
+              </a:rPr>
+              <a:t>gleichzeitig</a:t>
+            </a:r>
+            <a:r>
+              <a:rPr sz="2000" b="1" i="0" dirty="0">
+                <a:solidFill>
+                  <a:srgbClr val="D62828"/>
+                </a:solidFill>
+                <a:latin typeface="Arial"/>
+              </a:rPr>
+              <a:t> </a:t>
+            </a:r>
+            <a:r>
+              <a:rPr sz="2000" b="1" i="0" dirty="0" err="1">
+                <a:solidFill>
+                  <a:srgbClr val="D62828"/>
+                </a:solidFill>
+                <a:latin typeface="Arial"/>
+              </a:rPr>
+              <a:t>geht</a:t>
+            </a:r>
+            <a:r>
+              <a:rPr sz="2000" b="1" i="0" dirty="0">
+                <a:solidFill>
+                  <a:srgbClr val="D62828"/>
+                </a:solidFill>
+                <a:latin typeface="Arial"/>
+              </a:rPr>
+              <a:t> nicht</a:t>
+            </a:r>
+            <a:r>
+              <a:rPr lang="de-DE" sz="2000" b="1" i="0" dirty="0">
+                <a:solidFill>
+                  <a:srgbClr val="D62828"/>
+                </a:solidFill>
+                <a:latin typeface="Arial"/>
+              </a:rPr>
+              <a:t>, </a:t>
+            </a:r>
+            <a:r>
+              <a:rPr sz="2000" b="1" i="0" dirty="0" err="1">
+                <a:solidFill>
+                  <a:srgbClr val="D62828"/>
+                </a:solidFill>
+                <a:latin typeface="Arial"/>
+              </a:rPr>
+              <a:t>jedes</a:t>
+            </a:r>
+            <a:r>
+              <a:rPr sz="2000" b="1" i="0" dirty="0">
+                <a:solidFill>
+                  <a:srgbClr val="D62828"/>
+                </a:solidFill>
+                <a:latin typeface="Arial"/>
+              </a:rPr>
+              <a:t> Fenster </a:t>
+            </a:r>
+            <a:r>
+              <a:rPr sz="2000" b="1" i="0" dirty="0" err="1">
+                <a:solidFill>
+                  <a:srgbClr val="D62828"/>
+                </a:solidFill>
+                <a:latin typeface="Arial"/>
+              </a:rPr>
+              <a:t>wählt</a:t>
+            </a:r>
+            <a:r>
+              <a:rPr sz="2000" b="1" i="0" dirty="0">
+                <a:solidFill>
+                  <a:srgbClr val="D62828"/>
+                </a:solidFill>
+                <a:latin typeface="Arial"/>
+              </a:rPr>
+              <a:t> </a:t>
+            </a:r>
+            <a:r>
+              <a:rPr sz="2000" b="1" i="0" dirty="0" err="1">
+                <a:solidFill>
+                  <a:srgbClr val="D62828"/>
+                </a:solidFill>
+                <a:latin typeface="Arial"/>
+              </a:rPr>
+              <a:t>einen</a:t>
+            </a:r>
+            <a:r>
+              <a:rPr sz="2000" b="1" i="0" dirty="0">
+                <a:solidFill>
+                  <a:srgbClr val="D62828"/>
+                </a:solidFill>
+                <a:latin typeface="Arial"/>
+              </a:rPr>
+              <a:t> </a:t>
+            </a:r>
+            <a:r>
+              <a:rPr sz="2000" b="1" i="0" dirty="0" err="1">
+                <a:solidFill>
+                  <a:srgbClr val="D62828"/>
+                </a:solidFill>
+                <a:latin typeface="Arial"/>
+              </a:rPr>
+              <a:t>anderen</a:t>
+            </a:r>
+            <a:r>
+              <a:rPr sz="2000" b="1" i="0" dirty="0">
+                <a:solidFill>
+                  <a:srgbClr val="D62828"/>
+                </a:solidFill>
+                <a:latin typeface="Arial"/>
+              </a:rPr>
+              <a:t> </a:t>
+            </a:r>
+            <a:r>
+              <a:rPr sz="2000" b="1" i="0" dirty="0" err="1">
+                <a:solidFill>
+                  <a:srgbClr val="D62828"/>
+                </a:solidFill>
+                <a:latin typeface="Arial"/>
+              </a:rPr>
+              <a:t>Punkt</a:t>
+            </a:r>
+            <a:r>
+              <a:rPr sz="2000" b="1" i="0" dirty="0">
+                <a:solidFill>
+                  <a:srgbClr val="D62828"/>
+                </a:solidFill>
+                <a:latin typeface="Arial"/>
+              </a:rPr>
+              <a:t> auf </a:t>
+            </a:r>
+            <a:r>
+              <a:rPr sz="2000" b="1" i="0" dirty="0" err="1">
+                <a:solidFill>
+                  <a:srgbClr val="D62828"/>
+                </a:solidFill>
+                <a:latin typeface="Arial"/>
+              </a:rPr>
+              <a:t>dieser</a:t>
+            </a:r>
+            <a:r>
+              <a:rPr sz="2000" b="1" i="0" dirty="0">
+                <a:solidFill>
+                  <a:srgbClr val="D62828"/>
+                </a:solidFill>
+                <a:latin typeface="Arial"/>
+              </a:rPr>
+              <a:t> Waage.</a:t>
             </a:r>
           </a:p>
         </p:txBody>
@@ -9664,7 +11674,7 @@
           <a:noFill/>
         </p:spPr>
         <p:txBody>
-          <a:bodyPr wrap="square" anchor="t" lIns="0" rIns="0" tIns="0" bIns="0">
+          <a:bodyPr wrap="square" lIns="0" tIns="0" rIns="0" bIns="0" anchor="t">
             <a:spAutoFit/>
           </a:bodyPr>
           <a:lstStyle/>
@@ -9678,13 +11688,22 @@
               </a:spcAft>
             </a:pPr>
             <a:r>
-              <a:rPr sz="1600" b="1" i="0">
+              <a:rPr sz="1600" b="1" i="0" dirty="0" err="1">
                 <a:solidFill>
                   <a:srgbClr val="6C7A89"/>
                 </a:solidFill>
                 <a:latin typeface="Arial"/>
               </a:rPr>
-              <a:t>Untersucht:</a:t>
+              <a:t>Untersucht</a:t>
+            </a:r>
+            <a:r>
+              <a:rPr sz="1600" b="1" i="0" dirty="0">
+                <a:solidFill>
+                  <a:srgbClr val="6C7A89"/>
+                </a:solidFill>
+                <a:latin typeface="Arial"/>
+              </a:rPr>
+              <a:t>:</a:t>
             </a:r>
           </a:p>
           <a:p>
@@ -9697,13 +11716,22 @@
               </a:spcAft>
             </a:pPr>
             <a:r>
-              <a:rPr sz="2000" b="1" i="0">
+              <a:rPr sz="2000" b="1" i="0" dirty="0" err="1">
                 <a:solidFill>
                   <a:srgbClr val="1A2332"/>
                 </a:solidFill>
                 <a:latin typeface="Arial"/>
               </a:rPr>
-              <a:t>Rechteck   ·   Hann   ·   Hamming   ·   Blackman   ·   Kaiser   ·   Flat-Top</a:t>
+              <a:t>Rechteck</a:t>
+            </a:r>
+            <a:r>
+              <a:rPr sz="2000" b="1" i="0" dirty="0">
+                <a:solidFill>
+                  <a:srgbClr val="1A2332"/>
+                </a:solidFill>
+                <a:latin typeface="Arial"/>
+              </a:rPr>
+              <a:t>   ·   Hann   ·   Hamming   ·   Blackman   ·   Kaiser   ·   Flat-Top</a:t>
             </a:r>
           </a:p>
         </p:txBody>
@@ -9717,7 +11745,7 @@
 </file>
 
 <file path=ppt/slides/slide5.xml><?xml version="1.0" encoding="utf-8"?>
-<p:sld xmlns:a="http://schemas.openxmlformats.org/drawingml/2006/main" xmlns:p="http://schemas.openxmlformats.org/presentationml/2006/main" xmlns:r="http://schemas.openxmlformats.org/officeDocument/2006/relationships">
+<p:sld xmlns:a="http://schemas.openxmlformats.org/drawingml/2006/main" xmlns:r="http://schemas.openxmlformats.org/officeDocument/2006/relationships" xmlns:p="http://schemas.openxmlformats.org/presentationml/2006/main">
   <p:cSld>
     <p:bg>
       <p:bgPr>
@@ -9733,7 +11761,14 @@
         <p:cNvGrpSpPr/>
         <p:nvPr/>
       </p:nvGrpSpPr>
-      <p:grpSpPr/>
+      <p:grpSpPr>
+        <a:xfrm>
+          <a:off x="0" y="0"/>
+          <a:ext cx="0" cy="0"/>
+          <a:chOff x="0" y="0"/>
+          <a:chExt cx="0" cy="0"/>
+        </a:xfrm>
+      </p:grpSpPr>
       <p:sp>
         <p:nvSpPr>
           <p:cNvPr id="2" name="Rectangle 1"/>
@@ -9775,6 +11810,7 @@
           <a:lstStyle/>
           <a:p>
             <a:pPr algn="ctr"/>
+            <a:endParaRPr/>
           </a:p>
         </p:txBody>
       </p:sp>
@@ -9795,7 +11831,7 @@
           <a:noFill/>
         </p:spPr>
         <p:txBody>
-          <a:bodyPr wrap="square" anchor="t" lIns="0" rIns="0" tIns="0" bIns="0">
+          <a:bodyPr wrap="square" lIns="0" tIns="0" rIns="0" bIns="0" anchor="t">
             <a:spAutoFit/>
           </a:bodyPr>
           <a:lstStyle/>
@@ -9837,7 +11873,7 @@
           <a:noFill/>
         </p:spPr>
         <p:txBody>
-          <a:bodyPr wrap="square" anchor="t" lIns="0" rIns="0" tIns="0" bIns="0">
+          <a:bodyPr wrap="square" lIns="0" tIns="0" rIns="0" bIns="0" anchor="t">
             <a:spAutoFit/>
           </a:bodyPr>
           <a:lstStyle/>
@@ -9858,181 +11894,6 @@
                 <a:latin typeface="Arial"/>
               </a:rPr>
               <a:t>MATLAB: Code-Struktur &amp; Ergebnisse</a:t>
-            </a:r>
-          </a:p>
-        </p:txBody>
-      </p:sp>
-      <p:sp>
-        <p:nvSpPr>
-          <p:cNvPr id="5" name="TextBox 4"/>
-          <p:cNvSpPr txBox="1"/>
-          <p:nvPr/>
-        </p:nvSpPr>
-        <p:spPr>
-          <a:xfrm>
-            <a:off x="914400" y="2697480"/>
-            <a:ext cx="10424160" cy="3840480"/>
-          </a:xfrm>
-          <a:prstGeom prst="rect">
-            <a:avLst/>
-          </a:prstGeom>
-          <a:noFill/>
-        </p:spPr>
-        <p:txBody>
-          <a:bodyPr wrap="square" anchor="t" lIns="0" rIns="0" tIns="0" bIns="0">
-            <a:spAutoFit/>
-          </a:bodyPr>
-          <a:lstStyle/>
-          <a:p>
-            <a:pPr algn="l">
-              <a:spcBef>
-                <a:spcPts val="0"/>
-              </a:spcBef>
-              <a:spcAft>
-                <a:spcPts val="900"/>
-              </a:spcAft>
-            </a:pPr>
-            <a:r>
-              <a:rPr sz="1800" b="0" i="0">
-                <a:solidFill>
-                  <a:srgbClr val="FFFFFF"/>
-                </a:solidFill>
-                <a:latin typeface="Arial"/>
-              </a:rPr>
-              <a:t>•  Code-Struktur zeigen – modulare Funktionen in hrv_fft_analyse.m</a:t>
-            </a:r>
-          </a:p>
-          <a:p>
-            <a:pPr algn="l">
-              <a:spcBef>
-                <a:spcPts val="0"/>
-              </a:spcBef>
-              <a:spcAft>
-                <a:spcPts val="900"/>
-              </a:spcAft>
-            </a:pPr>
-            <a:r>
-              <a:rPr sz="1800" b="0" i="0">
-                <a:solidFill>
-                  <a:srgbClr val="FFFFFF"/>
-                </a:solidFill>
-                <a:latin typeface="Arial"/>
-              </a:rPr>
-              <a:t>•  Skript starten (F5)</a:t>
-            </a:r>
-          </a:p>
-          <a:p>
-            <a:pPr algn="l">
-              <a:spcBef>
-                <a:spcPts val="0"/>
-              </a:spcBef>
-              <a:spcAft>
-                <a:spcPts val="900"/>
-              </a:spcAft>
-            </a:pPr>
-            <a:r>
-              <a:rPr sz="1800" b="0" i="0">
-                <a:solidFill>
-                  <a:srgbClr val="FFFFFF"/>
-                </a:solidFill>
-                <a:latin typeface="Arial"/>
-              </a:rPr>
-              <a:t>•  EKG roh vs. gefiltert  +  erkannte R-Zacken</a:t>
-            </a:r>
-          </a:p>
-          <a:p>
-            <a:pPr algn="l">
-              <a:spcBef>
-                <a:spcPts val="0"/>
-              </a:spcBef>
-              <a:spcAft>
-                <a:spcPts val="900"/>
-              </a:spcAft>
-            </a:pPr>
-            <a:r>
-              <a:rPr sz="1800" b="0" i="0">
-                <a:solidFill>
-                  <a:srgbClr val="FFFFFF"/>
-                </a:solidFill>
-                <a:latin typeface="Arial"/>
-              </a:rPr>
-              <a:t>•  Tachogramm (RR-Intervalle über die Zeit)</a:t>
-            </a:r>
-          </a:p>
-          <a:p>
-            <a:pPr algn="l">
-              <a:spcBef>
-                <a:spcPts val="0"/>
-              </a:spcBef>
-              <a:spcAft>
-                <a:spcPts val="900"/>
-              </a:spcAft>
-            </a:pPr>
-            <a:r>
-              <a:rPr sz="1800" b="0" i="0">
-                <a:solidFill>
-                  <a:srgbClr val="FFFFFF"/>
-                </a:solidFill>
-                <a:latin typeface="Arial"/>
-              </a:rPr>
-              <a:t>•  Fenster im Zeit- &amp; Frequenzbereich (Haupt-/Nebenkeulen)</a:t>
-            </a:r>
-          </a:p>
-          <a:p>
-            <a:pPr algn="l">
-              <a:spcBef>
-                <a:spcPts val="0"/>
-              </a:spcBef>
-              <a:spcAft>
-                <a:spcPts val="900"/>
-              </a:spcAft>
-            </a:pPr>
-            <a:r>
-              <a:rPr sz="1800" b="0" i="0">
-                <a:solidFill>
-                  <a:srgbClr val="FFFFFF"/>
-                </a:solidFill>
-                <a:latin typeface="Arial"/>
-              </a:rPr>
-              <a:t>•  Überlagerte Spektren (dB)  →  Leakage direkt sichtbar</a:t>
-            </a:r>
-          </a:p>
-          <a:p>
-            <a:pPr algn="l">
-              <a:spcBef>
-                <a:spcPts val="0"/>
-              </a:spcBef>
-              <a:spcAft>
-                <a:spcPts val="900"/>
-              </a:spcAft>
-            </a:pPr>
-            <a:r>
-              <a:rPr sz="1800" b="0" i="0">
-                <a:solidFill>
-                  <a:srgbClr val="FFFFFF"/>
-                </a:solidFill>
-                <a:latin typeface="Arial"/>
-              </a:rPr>
-              <a:t>•  Wasserfälle: Rechteck (zackig) vs. Hann / Flat-Top (glatt)</a:t>
-            </a:r>
-          </a:p>
-          <a:p>
-            <a:pPr algn="l">
-              <a:spcBef>
-                <a:spcPts val="0"/>
-              </a:spcBef>
-              <a:spcAft>
-                <a:spcPts val="900"/>
-              </a:spcAft>
-            </a:pPr>
-            <a:r>
-              <a:rPr sz="1800" b="0" i="0">
-                <a:solidFill>
-                  <a:srgbClr val="FFFFFF"/>
-                </a:solidFill>
-                <a:latin typeface="Arial"/>
-              </a:rPr>
-              <a:t>•  Vergleichstabelle im Command Window</a:t>
             </a:r>
           </a:p>
         </p:txBody>
@@ -10046,7 +11907,7 @@
 </file>
 
 <file path=ppt/slides/slide6.xml><?xml version="1.0" encoding="utf-8"?>
-<p:sld xmlns:a="http://schemas.openxmlformats.org/drawingml/2006/main" xmlns:p="http://schemas.openxmlformats.org/presentationml/2006/main" xmlns:r="http://schemas.openxmlformats.org/officeDocument/2006/relationships">
+<p:sld xmlns:a="http://schemas.openxmlformats.org/drawingml/2006/main" xmlns:r="http://schemas.openxmlformats.org/officeDocument/2006/relationships" xmlns:p="http://schemas.openxmlformats.org/presentationml/2006/main">
   <p:cSld>
     <p:bg>
       <p:bgPr>
@@ -10062,7 +11923,14 @@
         <p:cNvGrpSpPr/>
         <p:nvPr/>
       </p:nvGrpSpPr>
-      <p:grpSpPr/>
+      <p:grpSpPr>
+        <a:xfrm>
+          <a:off x="0" y="0"/>
+          <a:ext cx="0" cy="0"/>
+          <a:chOff x="0" y="0"/>
+          <a:chExt cx="0" cy="0"/>
+        </a:xfrm>
+      </p:grpSpPr>
       <p:sp>
         <p:nvSpPr>
           <p:cNvPr id="2" name="TextBox 1"/>
@@ -10080,7 +11948,7 @@
           <a:noFill/>
         </p:spPr>
         <p:txBody>
-          <a:bodyPr wrap="square" anchor="t" lIns="0" rIns="0" tIns="0" bIns="0">
+          <a:bodyPr wrap="square" lIns="0" tIns="0" rIns="0" bIns="0" anchor="t">
             <a:spAutoFit/>
           </a:bodyPr>
           <a:lstStyle/>
@@ -10146,6 +12014,7 @@
           <a:lstStyle/>
           <a:p>
             <a:pPr algn="ctr"/>
+            <a:endParaRPr/>
           </a:p>
         </p:txBody>
       </p:sp>
@@ -10158,7 +12027,7 @@
         <p:spPr>
           <a:xfrm>
             <a:off x="822960" y="1874519"/>
-            <a:ext cx="10607040" cy="1188720"/>
+            <a:ext cx="10607040" cy="307777"/>
           </a:xfrm>
           <a:prstGeom prst="rect">
             <a:avLst/>
@@ -10166,7 +12035,7 @@
           <a:noFill/>
         </p:spPr>
         <p:txBody>
-          <a:bodyPr wrap="square" anchor="t" lIns="0" rIns="0" tIns="0" bIns="0">
+          <a:bodyPr wrap="square" lIns="0" tIns="0" rIns="0" bIns="0" anchor="t">
             <a:spAutoFit/>
           </a:bodyPr>
           <a:lstStyle/>
@@ -10180,14 +12049,65 @@
               </a:spcAft>
             </a:pPr>
             <a:r>
-              <a:rPr sz="2000" b="0" i="0">
+              <a:rPr sz="2000" b="0" i="0" dirty="0">
                 <a:solidFill>
                   <a:srgbClr val="1A2332"/>
                 </a:solidFill>
                 <a:latin typeface="Arial"/>
               </a:rPr>
-              <a:t>Leakage bläht das schwache HF-Band auf – dieselbe Messung, nur ein anderes Fenster:</a:t>
-            </a:r>
+              <a:t>Leakage </a:t>
+            </a:r>
+            <a:r>
+              <a:rPr sz="2000" b="0" i="0" dirty="0" err="1">
+                <a:solidFill>
+                  <a:srgbClr val="1A2332"/>
+                </a:solidFill>
+                <a:latin typeface="Arial"/>
+              </a:rPr>
+              <a:t>bläht</a:t>
+            </a:r>
+            <a:r>
+              <a:rPr sz="2000" b="0" i="0" dirty="0">
+                <a:solidFill>
+                  <a:srgbClr val="1A2332"/>
+                </a:solidFill>
+                <a:latin typeface="Arial"/>
+              </a:rPr>
+              <a:t> das </a:t>
+            </a:r>
+            <a:r>
+              <a:rPr sz="2000" b="0" i="0" dirty="0" err="1">
+                <a:solidFill>
+                  <a:srgbClr val="1A2332"/>
+                </a:solidFill>
+                <a:latin typeface="Arial"/>
+              </a:rPr>
+              <a:t>schwache</a:t>
+            </a:r>
+            <a:r>
+              <a:rPr sz="2000" b="0" i="0" dirty="0">
+                <a:solidFill>
+                  <a:srgbClr val="1A2332"/>
+                </a:solidFill>
+                <a:latin typeface="Arial"/>
+              </a:rPr>
+              <a:t> HF-Band auf</a:t>
+            </a:r>
+            <a:r>
+              <a:rPr lang="de-DE" sz="2000" b="0" i="0" dirty="0">
+                <a:solidFill>
+                  <a:srgbClr val="1A2332"/>
+                </a:solidFill>
+                <a:latin typeface="Arial"/>
+              </a:rPr>
+              <a:t> dieselbe Messung, nur ein anderes Fenster:</a:t>
+            </a:r>
+            <a:endParaRPr sz="2000" b="0" i="0" dirty="0">
+              <a:solidFill>
+                <a:srgbClr val="1A2332"/>
+              </a:solidFill>
+              <a:latin typeface="Arial"/>
+            </a:endParaRPr>
           </a:p>
         </p:txBody>
       </p:sp>
@@ -10230,7 +12150,7 @@
           </a:fontRef>
         </p:style>
         <p:txBody>
-          <a:bodyPr rtlCol="0" anchor="ctr" wrap="square" lIns="73152" rIns="73152" tIns="36576" bIns="36576"/>
+          <a:bodyPr wrap="square" lIns="73152" tIns="36576" rIns="73152" bIns="36576" rtlCol="0" anchor="ctr"/>
           <a:lstStyle/>
           <a:p>
             <a:pPr algn="ctr">
@@ -10296,6 +12216,7 @@
           <a:lstStyle/>
           <a:p>
             <a:pPr algn="ctr"/>
+            <a:endParaRPr/>
           </a:p>
         </p:txBody>
       </p:sp>
@@ -10338,7 +12259,7 @@
           </a:fontRef>
         </p:style>
         <p:txBody>
-          <a:bodyPr rtlCol="0" anchor="ctr" wrap="square" lIns="73152" rIns="73152" tIns="36576" bIns="36576"/>
+          <a:bodyPr wrap="square" lIns="73152" tIns="36576" rIns="73152" bIns="36576" rtlCol="0" anchor="ctr"/>
           <a:lstStyle/>
           <a:p>
             <a:pPr algn="ctr">
@@ -10380,7 +12301,7 @@
           <a:noFill/>
         </p:spPr>
         <p:txBody>
-          <a:bodyPr wrap="square" anchor="ctr" lIns="0" rIns="0" tIns="0" bIns="0">
+          <a:bodyPr wrap="square" lIns="0" tIns="0" rIns="0" bIns="0" anchor="ctr">
             <a:spAutoFit/>
           </a:bodyPr>
           <a:lstStyle/>
@@ -10423,7 +12344,7 @@
           <a:noFill/>
         </p:spPr>
         <p:txBody>
-          <a:bodyPr wrap="square" anchor="t" lIns="0" rIns="0" tIns="0" bIns="0">
+          <a:bodyPr wrap="square" lIns="0" tIns="0" rIns="0" bIns="0" anchor="t">
             <a:spAutoFit/>
           </a:bodyPr>
           <a:lstStyle/>
@@ -10457,7 +12378,7 @@
 </file>
 
 <file path=ppt/slides/slide7.xml><?xml version="1.0" encoding="utf-8"?>
-<p:sld xmlns:a="http://schemas.openxmlformats.org/drawingml/2006/main" xmlns:p="http://schemas.openxmlformats.org/presentationml/2006/main" xmlns:r="http://schemas.openxmlformats.org/officeDocument/2006/relationships">
+<p:sld xmlns:a="http://schemas.openxmlformats.org/drawingml/2006/main" xmlns:r="http://schemas.openxmlformats.org/officeDocument/2006/relationships" xmlns:p="http://schemas.openxmlformats.org/presentationml/2006/main">
   <p:cSld>
     <p:bg>
       <p:bgPr>
@@ -10473,7 +12394,14 @@
         <p:cNvGrpSpPr/>
         <p:nvPr/>
       </p:nvGrpSpPr>
-      <p:grpSpPr/>
+      <p:grpSpPr>
+        <a:xfrm>
+          <a:off x="0" y="0"/>
+          <a:ext cx="0" cy="0"/>
+          <a:chOff x="0" y="0"/>
+          <a:chExt cx="0" cy="0"/>
+        </a:xfrm>
+      </p:grpSpPr>
       <p:sp>
         <p:nvSpPr>
           <p:cNvPr id="2" name="TextBox 1"/>
@@ -10491,7 +12419,7 @@
           <a:noFill/>
         </p:spPr>
         <p:txBody>
-          <a:bodyPr wrap="square" anchor="t" lIns="0" rIns="0" tIns="0" bIns="0">
+          <a:bodyPr wrap="square" lIns="0" tIns="0" rIns="0" bIns="0" anchor="t">
             <a:spAutoFit/>
           </a:bodyPr>
           <a:lstStyle/>
@@ -10557,6 +12485,7 @@
           <a:lstStyle/>
           <a:p>
             <a:pPr algn="ctr"/>
+            <a:endParaRPr/>
           </a:p>
         </p:txBody>
       </p:sp>
@@ -10577,7 +12506,7 @@
           <a:noFill/>
         </p:spPr>
         <p:txBody>
-          <a:bodyPr wrap="square" anchor="t" lIns="0" rIns="0" tIns="0" bIns="0">
+          <a:bodyPr wrap="square" lIns="0" tIns="0" rIns="0" bIns="0" anchor="t">
             <a:spAutoFit/>
           </a:bodyPr>
           <a:lstStyle/>
@@ -10591,7 +12520,7 @@
               </a:spcAft>
             </a:pPr>
             <a:r>
-              <a:rPr sz="2400" b="1" i="0">
+              <a:rPr sz="2400" b="1" i="0" dirty="0">
                 <a:solidFill>
                   <a:srgbClr val="D62828"/>
                 </a:solidFill>
@@ -10610,13 +12539,103 @@
               </a:spcAft>
             </a:pPr>
             <a:r>
-              <a:rPr sz="1800" b="0" i="0">
+              <a:rPr sz="1800" b="0" i="0" dirty="0">
                 <a:solidFill>
                   <a:srgbClr val="1A2332"/>
                 </a:solidFill>
                 <a:latin typeface="Arial"/>
               </a:rPr>
-              <a:t>bester Allround-Kompromiss für die HRV: ordentliche Auflösung, wenig Leakage, stabile Bandwerte.</a:t>
+              <a:t>bester </a:t>
+            </a:r>
+            <a:r>
+              <a:rPr sz="1800" b="0" i="0" dirty="0" err="1">
+                <a:solidFill>
+                  <a:srgbClr val="1A2332"/>
+                </a:solidFill>
+                <a:latin typeface="Arial"/>
+              </a:rPr>
+              <a:t>Allround-Kompromiss</a:t>
+            </a:r>
+            <a:r>
+              <a:rPr sz="1800" b="0" i="0" dirty="0">
+                <a:solidFill>
+                  <a:srgbClr val="1A2332"/>
+                </a:solidFill>
+                <a:latin typeface="Arial"/>
+              </a:rPr>
+              <a:t> für die HRV: </a:t>
+            </a:r>
+            <a:r>
+              <a:rPr sz="1800" b="0" i="0" dirty="0" err="1">
+                <a:solidFill>
+                  <a:srgbClr val="1A2332"/>
+                </a:solidFill>
+                <a:latin typeface="Arial"/>
+              </a:rPr>
+              <a:t>ordentliche</a:t>
+            </a:r>
+            <a:r>
+              <a:rPr sz="1800" b="0" i="0" dirty="0">
+                <a:solidFill>
+                  <a:srgbClr val="1A2332"/>
+                </a:solidFill>
+                <a:latin typeface="Arial"/>
+              </a:rPr>
+              <a:t> </a:t>
+            </a:r>
+            <a:r>
+              <a:rPr sz="1800" b="0" i="0" dirty="0" err="1">
+                <a:solidFill>
+                  <a:srgbClr val="1A2332"/>
+                </a:solidFill>
+                <a:latin typeface="Arial"/>
+              </a:rPr>
+              <a:t>Auflösung</a:t>
+            </a:r>
+            <a:r>
+              <a:rPr sz="1800" b="0" i="0" dirty="0">
+                <a:solidFill>
+                  <a:srgbClr val="1A2332"/>
+                </a:solidFill>
+                <a:latin typeface="Arial"/>
+              </a:rPr>
+              <a:t>, </a:t>
+            </a:r>
+            <a:r>
+              <a:rPr sz="1800" b="0" i="0" dirty="0" err="1">
+                <a:solidFill>
+                  <a:srgbClr val="1A2332"/>
+                </a:solidFill>
+                <a:latin typeface="Arial"/>
+              </a:rPr>
+              <a:t>wenig</a:t>
+            </a:r>
+            <a:r>
+              <a:rPr sz="1800" b="0" i="0" dirty="0">
+                <a:solidFill>
+                  <a:srgbClr val="1A2332"/>
+                </a:solidFill>
+                <a:latin typeface="Arial"/>
+              </a:rPr>
+              <a:t> Leakage, stabile </a:t>
+            </a:r>
+            <a:r>
+              <a:rPr sz="1800" b="0" i="0" dirty="0" err="1">
+                <a:solidFill>
+                  <a:srgbClr val="1A2332"/>
+                </a:solidFill>
+                <a:latin typeface="Arial"/>
+              </a:rPr>
+              <a:t>Bandwerte</a:t>
+            </a:r>
+            <a:r>
+              <a:rPr sz="1800" b="0" i="0" dirty="0">
+                <a:solidFill>
+                  <a:srgbClr val="1A2332"/>
+                </a:solidFill>
+                <a:latin typeface="Arial"/>
+              </a:rPr>
+              <a:t>.</a:t>
             </a:r>
           </a:p>
           <a:p>
@@ -10629,7 +12648,7 @@
               </a:spcAft>
             </a:pPr>
             <a:r>
-              <a:rPr sz="2400" b="1" i="0">
+              <a:rPr sz="2400" b="1" i="0" dirty="0">
                 <a:solidFill>
                   <a:srgbClr val="1A2332"/>
                 </a:solidFill>
@@ -10648,13 +12667,94 @@
               </a:spcAft>
             </a:pPr>
             <a:r>
-              <a:rPr sz="1800" b="0" i="0">
+              <a:rPr sz="1800" b="0" i="0" dirty="0" err="1">
                 <a:solidFill>
                   <a:srgbClr val="1A2332"/>
                 </a:solidFill>
                 <a:latin typeface="Arial"/>
               </a:rPr>
-              <a:t>wenn man den Kompromiss selbst feinjustieren möchte.</a:t>
+              <a:t>wenn</a:t>
+            </a:r>
+            <a:r>
+              <a:rPr sz="1800" b="0" i="0" dirty="0">
+                <a:solidFill>
+                  <a:srgbClr val="1A2332"/>
+                </a:solidFill>
+                <a:latin typeface="Arial"/>
+              </a:rPr>
+              <a:t> man den </a:t>
+            </a:r>
+            <a:r>
+              <a:rPr sz="1800" b="0" i="0" dirty="0" err="1">
+                <a:solidFill>
+                  <a:srgbClr val="1A2332"/>
+                </a:solidFill>
+                <a:latin typeface="Arial"/>
+              </a:rPr>
+              <a:t>Kompromiss</a:t>
+            </a:r>
+            <a:r>
+              <a:rPr sz="1800" b="0" i="0" dirty="0">
+                <a:solidFill>
+                  <a:srgbClr val="1A2332"/>
+                </a:solidFill>
+                <a:latin typeface="Arial"/>
+              </a:rPr>
+              <a:t> </a:t>
+            </a:r>
+            <a:r>
+              <a:rPr sz="1800" b="0" i="0" dirty="0" err="1">
+                <a:solidFill>
+                  <a:srgbClr val="1A2332"/>
+                </a:solidFill>
+                <a:latin typeface="Arial"/>
+              </a:rPr>
+              <a:t>selbst</a:t>
+            </a:r>
+            <a:r>
+              <a:rPr sz="1800" b="0" i="0" dirty="0">
+                <a:solidFill>
+                  <a:srgbClr val="1A2332"/>
+                </a:solidFill>
+                <a:latin typeface="Arial"/>
+              </a:rPr>
+              <a:t> </a:t>
+            </a:r>
+            <a:r>
+              <a:rPr sz="1800" b="0" i="0" dirty="0" err="1">
+                <a:solidFill>
+                  <a:srgbClr val="1A2332"/>
+                </a:solidFill>
+                <a:latin typeface="Arial"/>
+              </a:rPr>
+              <a:t>feinjustieren</a:t>
+            </a:r>
+            <a:r>
+              <a:rPr sz="1800" b="0" i="0" dirty="0">
+                <a:solidFill>
+                  <a:srgbClr val="1A2332"/>
+                </a:solidFill>
+                <a:latin typeface="Arial"/>
+              </a:rPr>
+              <a:t> </a:t>
+            </a:r>
+            <a:r>
+              <a:rPr sz="1800" b="0" i="0" dirty="0" err="1">
+                <a:solidFill>
+                  <a:srgbClr val="1A2332"/>
+                </a:solidFill>
+                <a:latin typeface="Arial"/>
+              </a:rPr>
+              <a:t>möchte</a:t>
+            </a:r>
+            <a:r>
+              <a:rPr sz="1800" b="0" i="0" dirty="0">
+                <a:solidFill>
+                  <a:srgbClr val="1A2332"/>
+                </a:solidFill>
+                <a:latin typeface="Arial"/>
+              </a:rPr>
+              <a:t>.</a:t>
             </a:r>
           </a:p>
           <a:p>
@@ -10667,7 +12767,7 @@
               </a:spcAft>
             </a:pPr>
             <a:r>
-              <a:rPr sz="2400" b="1" i="0">
+              <a:rPr sz="2400" b="1" i="0" dirty="0" err="1">
                 <a:solidFill>
                   <a:srgbClr val="1A2332"/>
                 </a:solidFill>
@@ -10675,6 +12775,12 @@
               </a:rPr>
               <a:t>Rechteck</a:t>
             </a:r>
+            <a:endParaRPr sz="2400" b="1" i="0" dirty="0">
+              <a:solidFill>
+                <a:srgbClr val="1A2332"/>
+              </a:solidFill>
+              <a:latin typeface="Arial"/>
+            </a:endParaRPr>
           </a:p>
           <a:p>
             <a:pPr algn="l">
@@ -10686,13 +12792,148 @@
               </a:spcAft>
             </a:pPr>
             <a:r>
-              <a:rPr sz="1800" b="0" i="0">
+              <a:rPr sz="1800" b="0" i="0" dirty="0" err="1">
                 <a:solidFill>
                   <a:srgbClr val="1A2332"/>
                 </a:solidFill>
                 <a:latin typeface="Arial"/>
               </a:rPr>
-              <a:t>nur als Negativbeispiel – zeigt, wie schlimm Leakage ohne Fenster ist.</a:t>
+              <a:t>nur</a:t>
+            </a:r>
+            <a:r>
+              <a:rPr sz="1800" b="0" i="0" dirty="0">
+                <a:solidFill>
+                  <a:srgbClr val="1A2332"/>
+                </a:solidFill>
+                <a:latin typeface="Arial"/>
+              </a:rPr>
+              <a:t> </a:t>
+            </a:r>
+            <a:r>
+              <a:rPr sz="1800" b="0" i="0" dirty="0" err="1">
+                <a:solidFill>
+                  <a:srgbClr val="1A2332"/>
+                </a:solidFill>
+                <a:latin typeface="Arial"/>
+              </a:rPr>
+              <a:t>als</a:t>
+            </a:r>
+            <a:r>
+              <a:rPr sz="1800" b="0" i="0" dirty="0">
+                <a:solidFill>
+                  <a:srgbClr val="1A2332"/>
+                </a:solidFill>
+                <a:latin typeface="Arial"/>
+              </a:rPr>
+              <a:t> </a:t>
+            </a:r>
+            <a:r>
+              <a:rPr sz="1800" b="0" i="0" dirty="0" err="1">
+                <a:solidFill>
+                  <a:srgbClr val="1A2332"/>
+                </a:solidFill>
+                <a:latin typeface="Arial"/>
+              </a:rPr>
+              <a:t>Negativbeispiel</a:t>
+            </a:r>
+            <a:r>
+              <a:rPr sz="1800" b="0" i="0" dirty="0">
+                <a:solidFill>
+                  <a:srgbClr val="1A2332"/>
+                </a:solidFill>
+                <a:latin typeface="Arial"/>
+              </a:rPr>
+              <a:t> – </a:t>
+            </a:r>
+            <a:r>
+              <a:rPr sz="1800" b="0" i="0" dirty="0" err="1">
+                <a:solidFill>
+                  <a:srgbClr val="1A2332"/>
+                </a:solidFill>
+                <a:latin typeface="Arial"/>
+              </a:rPr>
+              <a:t>zeigt</a:t>
+            </a:r>
+            <a:r>
+              <a:rPr sz="1800" b="0" i="0" dirty="0">
+                <a:solidFill>
+                  <a:srgbClr val="1A2332"/>
+                </a:solidFill>
+                <a:latin typeface="Arial"/>
+              </a:rPr>
+              <a:t>, </a:t>
+            </a:r>
+            <a:r>
+              <a:rPr sz="1800" b="0" i="0" dirty="0" err="1">
+                <a:solidFill>
+                  <a:srgbClr val="1A2332"/>
+                </a:solidFill>
+                <a:latin typeface="Arial"/>
+              </a:rPr>
+              <a:t>wie</a:t>
+            </a:r>
+            <a:r>
+              <a:rPr sz="1800" b="0" i="0" dirty="0">
+                <a:solidFill>
+                  <a:srgbClr val="1A2332"/>
+                </a:solidFill>
+                <a:latin typeface="Arial"/>
+              </a:rPr>
+              <a:t> </a:t>
+            </a:r>
+            <a:r>
+              <a:rPr sz="1800" b="0" i="0" dirty="0" err="1">
+                <a:solidFill>
+                  <a:srgbClr val="1A2332"/>
+                </a:solidFill>
+                <a:latin typeface="Arial"/>
+              </a:rPr>
+              <a:t>schlimm</a:t>
+            </a:r>
+            <a:r>
+              <a:rPr sz="1800" b="0" i="0" dirty="0">
+                <a:solidFill>
+                  <a:srgbClr val="1A2332"/>
+                </a:solidFill>
+                <a:latin typeface="Arial"/>
+              </a:rPr>
+              <a:t> Leakage </a:t>
+            </a:r>
+            <a:r>
+              <a:rPr sz="1800" b="0" i="0" dirty="0" err="1">
+                <a:solidFill>
+                  <a:srgbClr val="1A2332"/>
+                </a:solidFill>
+                <a:latin typeface="Arial"/>
+              </a:rPr>
+              <a:t>ohne</a:t>
+            </a:r>
+            <a:r>
+              <a:rPr sz="1800" b="0" i="0" dirty="0">
+                <a:solidFill>
+                  <a:srgbClr val="1A2332"/>
+                </a:solidFill>
+                <a:latin typeface="Arial"/>
+              </a:rPr>
+              <a:t> Fenster </a:t>
+            </a:r>
+            <a:r>
+              <a:rPr sz="1800" b="0" i="0" dirty="0" err="1">
+                <a:solidFill>
+                  <a:srgbClr val="1A2332"/>
+                </a:solidFill>
+                <a:latin typeface="Arial"/>
+              </a:rPr>
+              <a:t>ist</a:t>
+            </a:r>
+            <a:r>
+              <a:rPr sz="1800" b="0" i="0" dirty="0">
+                <a:solidFill>
+                  <a:srgbClr val="1A2332"/>
+                </a:solidFill>
+                <a:latin typeface="Arial"/>
+              </a:rPr>
+              <a:t>.</a:t>
             </a:r>
           </a:p>
           <a:p>
@@ -10705,7 +12946,7 @@
               </a:spcAft>
             </a:pPr>
             <a:r>
-              <a:rPr sz="2400" b="1" i="0">
+              <a:rPr sz="2400" b="1" i="0" dirty="0">
                 <a:solidFill>
                   <a:srgbClr val="1A2332"/>
                 </a:solidFill>
@@ -10724,13 +12965,130 @@
               </a:spcAft>
             </a:pPr>
             <a:r>
-              <a:rPr sz="1800" b="0" i="0">
+              <a:rPr sz="1800" b="0" i="0" dirty="0" err="1">
                 <a:solidFill>
                   <a:srgbClr val="1A2332"/>
                 </a:solidFill>
                 <a:latin typeface="Arial"/>
               </a:rPr>
-              <a:t>nur, wenn es rein auf die exakte Amplitude eines Peaks ankommt (bei HRV selten).</a:t>
+              <a:t>nur</a:t>
+            </a:r>
+            <a:r>
+              <a:rPr sz="1800" b="0" i="0" dirty="0">
+                <a:solidFill>
+                  <a:srgbClr val="1A2332"/>
+                </a:solidFill>
+                <a:latin typeface="Arial"/>
+              </a:rPr>
+              <a:t>, </a:t>
+            </a:r>
+            <a:r>
+              <a:rPr sz="1800" b="0" i="0" dirty="0" err="1">
+                <a:solidFill>
+                  <a:srgbClr val="1A2332"/>
+                </a:solidFill>
+                <a:latin typeface="Arial"/>
+              </a:rPr>
+              <a:t>wenn</a:t>
+            </a:r>
+            <a:r>
+              <a:rPr sz="1800" b="0" i="0" dirty="0">
+                <a:solidFill>
+                  <a:srgbClr val="1A2332"/>
+                </a:solidFill>
+                <a:latin typeface="Arial"/>
+              </a:rPr>
+              <a:t> es rein auf die </a:t>
+            </a:r>
+            <a:r>
+              <a:rPr sz="1800" b="0" i="0" dirty="0" err="1">
+                <a:solidFill>
+                  <a:srgbClr val="1A2332"/>
+                </a:solidFill>
+                <a:latin typeface="Arial"/>
+              </a:rPr>
+              <a:t>exakte</a:t>
+            </a:r>
+            <a:r>
+              <a:rPr sz="1800" b="0" i="0" dirty="0">
+                <a:solidFill>
+                  <a:srgbClr val="1A2332"/>
+                </a:solidFill>
+                <a:latin typeface="Arial"/>
+              </a:rPr>
+              <a:t> Amplitude </a:t>
+            </a:r>
+            <a:r>
+              <a:rPr sz="1800" b="0" i="0" dirty="0" err="1">
+                <a:solidFill>
+                  <a:srgbClr val="1A2332"/>
+                </a:solidFill>
+                <a:latin typeface="Arial"/>
+              </a:rPr>
+              <a:t>eines</a:t>
+            </a:r>
+            <a:r>
+              <a:rPr sz="1800" b="0" i="0" dirty="0">
+                <a:solidFill>
+                  <a:srgbClr val="1A2332"/>
+                </a:solidFill>
+                <a:latin typeface="Arial"/>
+              </a:rPr>
+              <a:t> Peaks </a:t>
+            </a:r>
+            <a:r>
+              <a:rPr sz="1800" b="0" i="0" dirty="0" err="1">
+                <a:solidFill>
+                  <a:srgbClr val="1A2332"/>
+                </a:solidFill>
+                <a:latin typeface="Arial"/>
+              </a:rPr>
+              <a:t>ankommt</a:t>
+            </a:r>
+            <a:r>
+              <a:rPr sz="1800" b="0" i="0" dirty="0">
+                <a:solidFill>
+                  <a:srgbClr val="1A2332"/>
+                </a:solidFill>
+                <a:latin typeface="Arial"/>
+              </a:rPr>
+              <a:t> (</a:t>
+            </a:r>
+            <a:r>
+              <a:rPr sz="1800" b="0" i="0" dirty="0" err="1">
+                <a:solidFill>
+                  <a:srgbClr val="1A2332"/>
+                </a:solidFill>
+                <a:latin typeface="Arial"/>
+              </a:rPr>
+              <a:t>bei</a:t>
+            </a:r>
+            <a:r>
+              <a:rPr sz="1800" b="0" i="0" dirty="0">
+                <a:solidFill>
+                  <a:srgbClr val="1A2332"/>
+                </a:solidFill>
+                <a:latin typeface="Arial"/>
+              </a:rPr>
+              <a:t> HRV </a:t>
+            </a:r>
+            <a:r>
+              <a:rPr sz="1800" b="0" i="0" dirty="0" err="1">
+                <a:solidFill>
+                  <a:srgbClr val="1A2332"/>
+                </a:solidFill>
+                <a:latin typeface="Arial"/>
+              </a:rPr>
+              <a:t>selten</a:t>
+            </a:r>
+            <a:r>
+              <a:rPr sz="1800" b="0" i="0" dirty="0">
+                <a:solidFill>
+                  <a:srgbClr val="1A2332"/>
+                </a:solidFill>
+                <a:latin typeface="Arial"/>
+              </a:rPr>
+              <a:t>).</a:t>
             </a:r>
           </a:p>
         </p:txBody>
@@ -10744,7 +13102,7 @@
 </file>
 
 <file path=ppt/slides/slide8.xml><?xml version="1.0" encoding="utf-8"?>
-<p:sld xmlns:a="http://schemas.openxmlformats.org/drawingml/2006/main" xmlns:p="http://schemas.openxmlformats.org/presentationml/2006/main" xmlns:r="http://schemas.openxmlformats.org/officeDocument/2006/relationships">
+<p:sld xmlns:a="http://schemas.openxmlformats.org/drawingml/2006/main" xmlns:r="http://schemas.openxmlformats.org/officeDocument/2006/relationships" xmlns:p="http://schemas.openxmlformats.org/presentationml/2006/main">
   <p:cSld>
     <p:bg>
       <p:bgPr>
@@ -10760,7 +13118,14 @@
         <p:cNvGrpSpPr/>
         <p:nvPr/>
       </p:nvGrpSpPr>
-      <p:grpSpPr/>
+      <p:grpSpPr>
+        <a:xfrm>
+          <a:off x="0" y="0"/>
+          <a:ext cx="0" cy="0"/>
+          <a:chOff x="0" y="0"/>
+          <a:chExt cx="0" cy="0"/>
+        </a:xfrm>
+      </p:grpSpPr>
       <p:sp>
         <p:nvSpPr>
           <p:cNvPr id="2" name="TextBox 1"/>
@@ -10769,8 +13134,8 @@
         </p:nvSpPr>
         <p:spPr>
           <a:xfrm>
-            <a:off x="822960" y="2468880"/>
-            <a:ext cx="10515600" cy="1828800"/>
+            <a:off x="822960" y="3029337"/>
+            <a:ext cx="10515600" cy="707886"/>
           </a:xfrm>
           <a:prstGeom prst="rect">
             <a:avLst/>
@@ -10778,7 +13143,7 @@
           <a:noFill/>
         </p:spPr>
         <p:txBody>
-          <a:bodyPr wrap="square" anchor="ctr" lIns="0" rIns="0" tIns="0" bIns="0">
+          <a:bodyPr wrap="square" lIns="0" tIns="0" rIns="0" bIns="0" anchor="ctr">
             <a:spAutoFit/>
           </a:bodyPr>
           <a:lstStyle/>
@@ -10792,32 +13157,22 @@
               </a:spcAft>
             </a:pPr>
             <a:r>
-              <a:rPr sz="4600" b="1" i="0">
+              <a:rPr sz="4600" b="1" i="0" dirty="0" err="1">
                 <a:solidFill>
                   <a:srgbClr val="FFFFFF"/>
                 </a:solidFill>
                 <a:latin typeface="Arial"/>
               </a:rPr>
-              <a:t>Vielen Dank!</a:t>
-            </a:r>
-          </a:p>
-          <a:p>
-            <a:pPr algn="l">
-              <a:spcBef>
-                <a:spcPts val="0"/>
-              </a:spcBef>
-              <a:spcAft>
-                <a:spcPts val="0"/>
-              </a:spcAft>
-            </a:pPr>
-            <a:r>
-              <a:rPr sz="2400" b="1" i="0">
-                <a:solidFill>
-                  <a:srgbClr val="D62828"/>
-                </a:solidFill>
-                <a:latin typeface="Arial"/>
-              </a:rPr>
-              <a:t>Fragen?</a:t>
+              <a:t>Vielen</a:t>
+            </a:r>
+            <a:r>
+              <a:rPr sz="4600" b="1" i="0" dirty="0">
+                <a:solidFill>
+                  <a:srgbClr val="FFFFFF"/>
+                </a:solidFill>
+                <a:latin typeface="Arial"/>
+              </a:rPr>
+              <a:t> Dank!</a:t>
             </a:r>
           </a:p>
         </p:txBody>
@@ -15111,7 +17466,7 @@
 </file>
 
 <file path=ppt/theme/theme2.xml><?xml version="1.0" encoding="utf-8"?>
-<a:theme xmlns:a="http://schemas.openxmlformats.org/drawingml/2006/main" name="Office Theme">
+<a:theme xmlns:a="http://schemas.openxmlformats.org/drawingml/2006/main" name="Office">
   <a:themeElements>
     <a:clrScheme name="Office">
       <a:dk1>
@@ -15121,44 +17476,44 @@
         <a:sysClr val="window" lastClr="FFFFFF"/>
       </a:lt1>
       <a:dk2>
-        <a:srgbClr val="1F497D"/>
+        <a:srgbClr val="0E2841"/>
       </a:dk2>
       <a:lt2>
-        <a:srgbClr val="EEECE1"/>
+        <a:srgbClr val="E8E8E8"/>
       </a:lt2>
       <a:accent1>
-        <a:srgbClr val="4F81BD"/>
+        <a:srgbClr val="156082"/>
       </a:accent1>
       <a:accent2>
-        <a:srgbClr val="C0504D"/>
+        <a:srgbClr val="E97132"/>
       </a:accent2>
       <a:accent3>
-        <a:srgbClr val="9BBB59"/>
+        <a:srgbClr val="196B24"/>
       </a:accent3>
       <a:accent4>
-        <a:srgbClr val="8064A2"/>
+        <a:srgbClr val="0F9ED5"/>
       </a:accent4>
       <a:accent5>
-        <a:srgbClr val="4BACC6"/>
+        <a:srgbClr val="A02B93"/>
       </a:accent5>
       <a:accent6>
-        <a:srgbClr val="F79646"/>
+        <a:srgbClr val="4EA72E"/>
       </a:accent6>
       <a:hlink>
-        <a:srgbClr val="0000FF"/>
+        <a:srgbClr val="467886"/>
       </a:hlink>
       <a:folHlink>
-        <a:srgbClr val="800080"/>
+        <a:srgbClr val="96607D"/>
       </a:folHlink>
     </a:clrScheme>
     <a:fontScheme name="Office">
       <a:majorFont>
-        <a:latin typeface="Calibri"/>
+        <a:latin typeface="Aptos Display" panose="02110004020202020204"/>
         <a:ea typeface=""/>
         <a:cs typeface=""/>
-        <a:font script="Jpan" typeface="ＭＳ Ｐゴシック"/>
+        <a:font script="Jpan" typeface="游ゴシック Light"/>
         <a:font script="Hang" typeface="맑은 고딕"/>
-        <a:font script="Hans" typeface="宋体"/>
+        <a:font script="Hans" typeface="等线 Light"/>
         <a:font script="Hant" typeface="新細明體"/>
         <a:font script="Arab" typeface="Times New Roman"/>
         <a:font script="Hebr" typeface="Times New Roman"/>
@@ -15186,14 +17541,31 @@
         <a:font script="Viet" typeface="Times New Roman"/>
         <a:font script="Uigh" typeface="Microsoft Uighur"/>
         <a:font script="Geor" typeface="Sylfaen"/>
+        <a:font script="Armn" typeface="Arial"/>
+        <a:font script="Bugi" typeface="Leelawadee UI"/>
+        <a:font script="Bopo" typeface="Microsoft JhengHei"/>
+        <a:font script="Java" typeface="Javanese Text"/>
+        <a:font script="Lisu" typeface="Segoe UI"/>
+        <a:font script="Mymr" typeface="Myanmar Text"/>
+        <a:font script="Nkoo" typeface="Ebrima"/>
+        <a:font script="Olck" typeface="Nirmala UI"/>
+        <a:font script="Osma" typeface="Ebrima"/>
+        <a:font script="Phag" typeface="Phagspa"/>
+        <a:font script="Syrn" typeface="Estrangelo Edessa"/>
+        <a:font script="Syrj" typeface="Estrangelo Edessa"/>
+        <a:font script="Syre" typeface="Estrangelo Edessa"/>
+        <a:font script="Sora" typeface="Nirmala UI"/>
+        <a:font script="Tale" typeface="Microsoft Tai Le"/>
+        <a:font script="Talu" typeface="Microsoft New Tai Lue"/>
+        <a:font script="Tfng" typeface="Ebrima"/>
       </a:majorFont>
       <a:minorFont>
-        <a:latin typeface="Calibri"/>
+        <a:latin typeface="Aptos" panose="02110004020202020204"/>
         <a:ea typeface=""/>
         <a:cs typeface=""/>
-        <a:font script="Jpan" typeface="ＭＳ Ｐゴシック"/>
+        <a:font script="Jpan" typeface="游ゴシック"/>
         <a:font script="Hang" typeface="맑은 고딕"/>
-        <a:font script="Hans" typeface="宋体"/>
+        <a:font script="Hans" typeface="等线"/>
         <a:font script="Hant" typeface="新細明體"/>
         <a:font script="Arab" typeface="Arial"/>
         <a:font script="Hebr" typeface="Arial"/>
@@ -15221,6 +17593,23 @@
         <a:font script="Viet" typeface="Arial"/>
         <a:font script="Uigh" typeface="Microsoft Uighur"/>
         <a:font script="Geor" typeface="Sylfaen"/>
+        <a:font script="Armn" typeface="Arial"/>
+        <a:font script="Bugi" typeface="Leelawadee UI"/>
+        <a:font script="Bopo" typeface="Microsoft JhengHei"/>
+        <a:font script="Java" typeface="Javanese Text"/>
+        <a:font script="Lisu" typeface="Segoe UI"/>
+        <a:font script="Mymr" typeface="Myanmar Text"/>
+        <a:font script="Nkoo" typeface="Ebrima"/>
+        <a:font script="Olck" typeface="Nirmala UI"/>
+        <a:font script="Osma" typeface="Ebrima"/>
+        <a:font script="Phag" typeface="Phagspa"/>
+        <a:font script="Syrn" typeface="Estrangelo Edessa"/>
+        <a:font script="Syrj" typeface="Estrangelo Edessa"/>
+        <a:font script="Syre" typeface="Estrangelo Edessa"/>
+        <a:font script="Sora" typeface="Nirmala UI"/>
+        <a:font script="Tale" typeface="Microsoft Tai Le"/>
+        <a:font script="Talu" typeface="Microsoft New Tai Lue"/>
+        <a:font script="Tfng" typeface="Ebrima"/>
       </a:minorFont>
     </a:fontScheme>
     <a:fmtScheme name="Office">
@@ -15232,180 +17621,136 @@
           <a:gsLst>
             <a:gs pos="0">
               <a:schemeClr val="phClr">
-                <a:tint val="50000"/>
-                <a:satMod val="300000"/>
+                <a:lumMod val="110000"/>
+                <a:satMod val="105000"/>
+                <a:tint val="67000"/>
               </a:schemeClr>
             </a:gs>
-            <a:gs pos="35000">
+            <a:gs pos="50000">
               <a:schemeClr val="phClr">
-                <a:tint val="37000"/>
-                <a:satMod val="300000"/>
+                <a:lumMod val="105000"/>
+                <a:satMod val="103000"/>
+                <a:tint val="73000"/>
               </a:schemeClr>
             </a:gs>
             <a:gs pos="100000">
               <a:schemeClr val="phClr">
-                <a:tint val="15000"/>
-                <a:satMod val="350000"/>
+                <a:lumMod val="105000"/>
+                <a:satMod val="109000"/>
+                <a:tint val="81000"/>
               </a:schemeClr>
             </a:gs>
           </a:gsLst>
-          <a:lin ang="16200000" scaled="1"/>
+          <a:lin ang="5400000" scaled="0"/>
         </a:gradFill>
         <a:gradFill rotWithShape="1">
           <a:gsLst>
             <a:gs pos="0">
               <a:schemeClr val="phClr">
-                <a:tint val="100000"/>
+                <a:satMod val="103000"/>
+                <a:lumMod val="102000"/>
+                <a:tint val="94000"/>
+              </a:schemeClr>
+            </a:gs>
+            <a:gs pos="50000">
+              <a:schemeClr val="phClr">
+                <a:satMod val="110000"/>
+                <a:lumMod val="100000"/>
                 <a:shade val="100000"/>
-                <a:satMod val="130000"/>
               </a:schemeClr>
             </a:gs>
             <a:gs pos="100000">
               <a:schemeClr val="phClr">
-                <a:tint val="50000"/>
-                <a:shade val="100000"/>
-                <a:satMod val="350000"/>
+                <a:lumMod val="99000"/>
+                <a:satMod val="120000"/>
+                <a:shade val="78000"/>
               </a:schemeClr>
             </a:gs>
           </a:gsLst>
-          <a:lin ang="16200000" scaled="0"/>
+          <a:lin ang="5400000" scaled="0"/>
         </a:gradFill>
       </a:fillStyleLst>
       <a:lnStyleLst>
-        <a:ln w="9525" cap="flat" cmpd="sng" algn="ctr">
+        <a:ln w="12700" cap="flat" cmpd="sng" algn="ctr">
           <a:solidFill>
-            <a:schemeClr val="phClr">
-              <a:shade val="95000"/>
-              <a:satMod val="105000"/>
-            </a:schemeClr>
+            <a:schemeClr val="phClr"/>
           </a:solidFill>
           <a:prstDash val="solid"/>
+          <a:miter lim="800000"/>
+        </a:ln>
+        <a:ln w="19050" cap="flat" cmpd="sng" algn="ctr">
+          <a:solidFill>
+            <a:schemeClr val="phClr"/>
+          </a:solidFill>
+          <a:prstDash val="solid"/>
+          <a:miter lim="800000"/>
         </a:ln>
         <a:ln w="25400" cap="flat" cmpd="sng" algn="ctr">
           <a:solidFill>
             <a:schemeClr val="phClr"/>
           </a:solidFill>
           <a:prstDash val="solid"/>
-        </a:ln>
-        <a:ln w="38100" cap="flat" cmpd="sng" algn="ctr">
-          <a:solidFill>
-            <a:schemeClr val="phClr"/>
-          </a:solidFill>
-          <a:prstDash val="solid"/>
+          <a:miter lim="800000"/>
         </a:ln>
       </a:lnStyleLst>
       <a:effectStyleLst>
         <a:effectStyle>
+          <a:effectLst/>
+        </a:effectStyle>
+        <a:effectStyle>
+          <a:effectLst/>
+        </a:effectStyle>
+        <a:effectStyle>
           <a:effectLst>
-            <a:outerShdw blurRad="40000" dist="20000" dir="5400000" rotWithShape="0">
+            <a:outerShdw blurRad="57150" dist="19050" dir="5400000" algn="ctr" rotWithShape="0">
               <a:srgbClr val="000000">
-                <a:alpha val="38000"/>
+                <a:alpha val="63000"/>
               </a:srgbClr>
             </a:outerShdw>
           </a:effectLst>
-        </a:effectStyle>
-        <a:effectStyle>
-          <a:effectLst>
-            <a:outerShdw blurRad="40000" dist="23000" dir="5400000" rotWithShape="0">
-              <a:srgbClr val="000000">
-                <a:alpha val="35000"/>
-              </a:srgbClr>
-            </a:outerShdw>
-          </a:effectLst>
-        </a:effectStyle>
-        <a:effectStyle>
-          <a:effectLst>
-            <a:outerShdw blurRad="40000" dist="23000" dir="5400000" rotWithShape="0">
-              <a:srgbClr val="000000">
-                <a:alpha val="35000"/>
-              </a:srgbClr>
-            </a:outerShdw>
-          </a:effectLst>
-          <a:scene3d>
-            <a:camera prst="orthographicFront">
-              <a:rot lat="0" lon="0" rev="0"/>
-            </a:camera>
-            <a:lightRig rig="threePt" dir="t">
-              <a:rot lat="0" lon="0" rev="1200000"/>
-            </a:lightRig>
-          </a:scene3d>
-          <a:sp3d>
-            <a:bevelT w="63500" h="25400"/>
-          </a:sp3d>
         </a:effectStyle>
       </a:effectStyleLst>
       <a:bgFillStyleLst>
         <a:solidFill>
           <a:schemeClr val="phClr"/>
         </a:solidFill>
+        <a:solidFill>
+          <a:schemeClr val="phClr">
+            <a:tint val="95000"/>
+            <a:satMod val="170000"/>
+          </a:schemeClr>
+        </a:solidFill>
         <a:gradFill rotWithShape="1">
           <a:gsLst>
             <a:gs pos="0">
               <a:schemeClr val="phClr">
-                <a:tint val="40000"/>
-                <a:satMod val="350000"/>
+                <a:tint val="93000"/>
+                <a:satMod val="150000"/>
+                <a:shade val="98000"/>
+                <a:lumMod val="102000"/>
               </a:schemeClr>
             </a:gs>
-            <a:gs pos="40000">
+            <a:gs pos="50000">
               <a:schemeClr val="phClr">
-                <a:tint val="45000"/>
-                <a:shade val="99000"/>
-                <a:satMod val="350000"/>
+                <a:tint val="98000"/>
+                <a:satMod val="130000"/>
+                <a:shade val="90000"/>
+                <a:lumMod val="103000"/>
               </a:schemeClr>
             </a:gs>
             <a:gs pos="100000">
               <a:schemeClr val="phClr">
-                <a:shade val="20000"/>
-                <a:satMod val="255000"/>
+                <a:shade val="63000"/>
+                <a:satMod val="120000"/>
               </a:schemeClr>
             </a:gs>
           </a:gsLst>
-          <a:path path="circle">
-            <a:fillToRect l="50000" t="-80000" r="50000" b="180000"/>
-          </a:path>
-        </a:gradFill>
-        <a:gradFill rotWithShape="1">
-          <a:gsLst>
-            <a:gs pos="0">
-              <a:schemeClr val="phClr">
-                <a:tint val="80000"/>
-                <a:satMod val="300000"/>
-              </a:schemeClr>
-            </a:gs>
-            <a:gs pos="100000">
-              <a:schemeClr val="phClr">
-                <a:shade val="30000"/>
-                <a:satMod val="200000"/>
-              </a:schemeClr>
-            </a:gs>
-          </a:gsLst>
-          <a:path path="circle">
-            <a:fillToRect l="50000" t="50000" r="50000" b="50000"/>
-          </a:path>
+          <a:lin ang="5400000" scaled="0"/>
         </a:gradFill>
       </a:bgFillStyleLst>
     </a:fmtScheme>
   </a:themeElements>
   <a:objectDefaults>
-    <a:spDef>
-      <a:spPr/>
-      <a:bodyPr/>
-      <a:lstStyle/>
-      <a:style>
-        <a:lnRef idx="1">
-          <a:schemeClr val="accent1"/>
-        </a:lnRef>
-        <a:fillRef idx="3">
-          <a:schemeClr val="accent1"/>
-        </a:fillRef>
-        <a:effectRef idx="2">
-          <a:schemeClr val="accent1"/>
-        </a:effectRef>
-        <a:fontRef idx="minor">
-          <a:schemeClr val="lt1"/>
-        </a:fontRef>
-      </a:style>
-    </a:spDef>
     <a:lnDef>
       <a:spPr/>
       <a:bodyPr/>
@@ -15427,5 +17772,10 @@
     </a:lnDef>
   </a:objectDefaults>
   <a:extraClrSchemeLst/>
+  <a:extLst>
+    <a:ext uri="{05A4C25C-085E-4340-85A3-A5531E510DB2}">
+      <thm15:themeFamily xmlns:thm15="http://schemas.microsoft.com/office/thememl/2012/main" name="Office Theme" id="{2E142A2C-CD16-42D6-873A-C26D2A0506FA}" vid="{1BDDFF52-6CD6-40A5-AB3C-68EB2F1E4D0A}"/>
+    </a:ext>
+  </a:extLst>
 </a:theme>
 </file>